--- a/meridian.pptx
+++ b/meridian.pptx
@@ -4,22 +4,25 @@
   <p:sldMasterIdLst>
     <p:sldMasterId id="2147483672" r:id="rId1"/>
   </p:sldMasterIdLst>
+  <p:notesMasterIdLst>
+    <p:notesMasterId r:id="rId26"/>
+  </p:notesMasterIdLst>
   <p:sldIdLst>
-    <p:sldId id="285" r:id="rId2"/>
-    <p:sldId id="258" r:id="rId3"/>
-    <p:sldId id="259" r:id="rId4"/>
-    <p:sldId id="260" r:id="rId5"/>
-    <p:sldId id="261" r:id="rId6"/>
-    <p:sldId id="262" r:id="rId7"/>
-    <p:sldId id="263" r:id="rId8"/>
-    <p:sldId id="264" r:id="rId9"/>
-    <p:sldId id="284" r:id="rId10"/>
-    <p:sldId id="267" r:id="rId11"/>
-    <p:sldId id="268" r:id="rId12"/>
-    <p:sldId id="269" r:id="rId13"/>
-    <p:sldId id="270" r:id="rId14"/>
-    <p:sldId id="271" r:id="rId15"/>
-    <p:sldId id="272" r:id="rId16"/>
+    <p:sldId id="293" r:id="rId2"/>
+    <p:sldId id="294" r:id="rId3"/>
+    <p:sldId id="295" r:id="rId4"/>
+    <p:sldId id="296" r:id="rId5"/>
+    <p:sldId id="297" r:id="rId6"/>
+    <p:sldId id="298" r:id="rId7"/>
+    <p:sldId id="299" r:id="rId8"/>
+    <p:sldId id="300" r:id="rId9"/>
+    <p:sldId id="301" r:id="rId10"/>
+    <p:sldId id="302" r:id="rId11"/>
+    <p:sldId id="303" r:id="rId12"/>
+    <p:sldId id="304" r:id="rId13"/>
+    <p:sldId id="305" r:id="rId14"/>
+    <p:sldId id="306" r:id="rId15"/>
+    <p:sldId id="307" r:id="rId16"/>
     <p:sldId id="273" r:id="rId17"/>
     <p:sldId id="274" r:id="rId18"/>
     <p:sldId id="275" r:id="rId19"/>
@@ -729,6 +732,1757 @@
 </c:chartSpace>
 </file>
 
+<file path=ppt/notesMasters/notesMaster1.xml><?xml version="1.0" encoding="utf-8"?>
+<p:notesMaster xmlns:a="http://schemas.openxmlformats.org/drawingml/2006/main" xmlns:r="http://schemas.openxmlformats.org/officeDocument/2006/relationships" xmlns:p="http://schemas.openxmlformats.org/presentationml/2006/main">
+  <p:cSld>
+    <p:bg>
+      <p:bgRef idx="1001">
+        <a:schemeClr val="bg1"/>
+      </p:bgRef>
+    </p:bg>
+    <p:spTree>
+      <p:nvGrpSpPr>
+        <p:cNvPr id="1" name=""/>
+        <p:cNvGrpSpPr/>
+        <p:nvPr/>
+      </p:nvGrpSpPr>
+      <p:grpSpPr>
+        <a:xfrm>
+          <a:off x="0" y="0"/>
+          <a:ext cx="0" cy="0"/>
+          <a:chOff x="0" y="0"/>
+          <a:chExt cx="0" cy="0"/>
+        </a:xfrm>
+      </p:grpSpPr>
+      <p:sp>
+        <p:nvSpPr>
+          <p:cNvPr id="2" name="Header Placeholder 1"/>
+          <p:cNvSpPr>
+            <a:spLocks noGrp="1"/>
+          </p:cNvSpPr>
+          <p:nvPr>
+            <p:ph type="hdr" sz="quarter"/>
+          </p:nvPr>
+        </p:nvSpPr>
+        <p:spPr>
+          <a:xfrm>
+            <a:off x="0" y="0"/>
+            <a:ext cx="2971800" cy="458788"/>
+          </a:xfrm>
+          <a:prstGeom prst="rect">
+            <a:avLst/>
+          </a:prstGeom>
+        </p:spPr>
+        <p:txBody>
+          <a:bodyPr vert="horz" lIns="91440" tIns="45720" rIns="91440" bIns="45720" rtlCol="0"/>
+          <a:lstStyle>
+            <a:lvl1pPr algn="l">
+              <a:defRPr sz="1200"/>
+            </a:lvl1pPr>
+          </a:lstStyle>
+          <a:p>
+            <a:endParaRPr lang="en-FR"/>
+          </a:p>
+        </p:txBody>
+      </p:sp>
+      <p:sp>
+        <p:nvSpPr>
+          <p:cNvPr id="3" name="Date Placeholder 2"/>
+          <p:cNvSpPr>
+            <a:spLocks noGrp="1"/>
+          </p:cNvSpPr>
+          <p:nvPr>
+            <p:ph type="dt" idx="1"/>
+          </p:nvPr>
+        </p:nvSpPr>
+        <p:spPr>
+          <a:xfrm>
+            <a:off x="3884613" y="0"/>
+            <a:ext cx="2971800" cy="458788"/>
+          </a:xfrm>
+          <a:prstGeom prst="rect">
+            <a:avLst/>
+          </a:prstGeom>
+        </p:spPr>
+        <p:txBody>
+          <a:bodyPr vert="horz" lIns="91440" tIns="45720" rIns="91440" bIns="45720" rtlCol="0"/>
+          <a:lstStyle>
+            <a:lvl1pPr algn="r">
+              <a:defRPr sz="1200"/>
+            </a:lvl1pPr>
+          </a:lstStyle>
+          <a:p>
+            <a:fld id="{AAC1DF72-3AE9-DC48-AC73-6913F76D8B60}" type="datetimeFigureOut">
+              <a:rPr lang="en-FR" smtClean="0"/>
+              <a:t>16/09/2026</a:t>
+            </a:fld>
+            <a:endParaRPr lang="en-FR"/>
+          </a:p>
+        </p:txBody>
+      </p:sp>
+      <p:sp>
+        <p:nvSpPr>
+          <p:cNvPr id="4" name="Slide Image Placeholder 3"/>
+          <p:cNvSpPr>
+            <a:spLocks noGrp="1" noRot="1" noChangeAspect="1"/>
+          </p:cNvSpPr>
+          <p:nvPr>
+            <p:ph type="sldImg" idx="2"/>
+          </p:nvPr>
+        </p:nvSpPr>
+        <p:spPr>
+          <a:xfrm>
+            <a:off x="685800" y="1143000"/>
+            <a:ext cx="5486400" cy="3086100"/>
+          </a:xfrm>
+          <a:prstGeom prst="rect">
+            <a:avLst/>
+          </a:prstGeom>
+          <a:noFill/>
+          <a:ln w="12700">
+            <a:solidFill>
+              <a:prstClr val="black"/>
+            </a:solidFill>
+          </a:ln>
+        </p:spPr>
+        <p:txBody>
+          <a:bodyPr vert="horz" lIns="91440" tIns="45720" rIns="91440" bIns="45720" rtlCol="0" anchor="ctr"/>
+          <a:lstStyle/>
+          <a:p>
+            <a:endParaRPr lang="en-FR"/>
+          </a:p>
+        </p:txBody>
+      </p:sp>
+      <p:sp>
+        <p:nvSpPr>
+          <p:cNvPr id="5" name="Notes Placeholder 4"/>
+          <p:cNvSpPr>
+            <a:spLocks noGrp="1"/>
+          </p:cNvSpPr>
+          <p:nvPr>
+            <p:ph type="body" sz="quarter" idx="3"/>
+          </p:nvPr>
+        </p:nvSpPr>
+        <p:spPr>
+          <a:xfrm>
+            <a:off x="685800" y="4400550"/>
+            <a:ext cx="5486400" cy="3600450"/>
+          </a:xfrm>
+          <a:prstGeom prst="rect">
+            <a:avLst/>
+          </a:prstGeom>
+        </p:spPr>
+        <p:txBody>
+          <a:bodyPr vert="horz" lIns="91440" tIns="45720" rIns="91440" bIns="45720" rtlCol="0"/>
+          <a:lstStyle/>
+          <a:p>
+            <a:pPr lvl="0"/>
+            <a:r>
+              <a:rPr lang="en-GB"/>
+              <a:t>Click to edit Master text styles</a:t>
+            </a:r>
+          </a:p>
+          <a:p>
+            <a:pPr lvl="1"/>
+            <a:r>
+              <a:rPr lang="en-GB"/>
+              <a:t>Second level</a:t>
+            </a:r>
+          </a:p>
+          <a:p>
+            <a:pPr lvl="2"/>
+            <a:r>
+              <a:rPr lang="en-GB"/>
+              <a:t>Third level</a:t>
+            </a:r>
+          </a:p>
+          <a:p>
+            <a:pPr lvl="3"/>
+            <a:r>
+              <a:rPr lang="en-GB"/>
+              <a:t>Fourth level</a:t>
+            </a:r>
+          </a:p>
+          <a:p>
+            <a:pPr lvl="4"/>
+            <a:r>
+              <a:rPr lang="en-GB"/>
+              <a:t>Fifth level</a:t>
+            </a:r>
+            <a:endParaRPr lang="en-FR"/>
+          </a:p>
+        </p:txBody>
+      </p:sp>
+      <p:sp>
+        <p:nvSpPr>
+          <p:cNvPr id="6" name="Footer Placeholder 5"/>
+          <p:cNvSpPr>
+            <a:spLocks noGrp="1"/>
+          </p:cNvSpPr>
+          <p:nvPr>
+            <p:ph type="ftr" sz="quarter" idx="4"/>
+          </p:nvPr>
+        </p:nvSpPr>
+        <p:spPr>
+          <a:xfrm>
+            <a:off x="0" y="8685213"/>
+            <a:ext cx="2971800" cy="458787"/>
+          </a:xfrm>
+          <a:prstGeom prst="rect">
+            <a:avLst/>
+          </a:prstGeom>
+        </p:spPr>
+        <p:txBody>
+          <a:bodyPr vert="horz" lIns="91440" tIns="45720" rIns="91440" bIns="45720" rtlCol="0" anchor="b"/>
+          <a:lstStyle>
+            <a:lvl1pPr algn="l">
+              <a:defRPr sz="1200"/>
+            </a:lvl1pPr>
+          </a:lstStyle>
+          <a:p>
+            <a:endParaRPr lang="en-FR"/>
+          </a:p>
+        </p:txBody>
+      </p:sp>
+      <p:sp>
+        <p:nvSpPr>
+          <p:cNvPr id="7" name="Slide Number Placeholder 6"/>
+          <p:cNvSpPr>
+            <a:spLocks noGrp="1"/>
+          </p:cNvSpPr>
+          <p:nvPr>
+            <p:ph type="sldNum" sz="quarter" idx="5"/>
+          </p:nvPr>
+        </p:nvSpPr>
+        <p:spPr>
+          <a:xfrm>
+            <a:off x="3884613" y="8685213"/>
+            <a:ext cx="2971800" cy="458787"/>
+          </a:xfrm>
+          <a:prstGeom prst="rect">
+            <a:avLst/>
+          </a:prstGeom>
+        </p:spPr>
+        <p:txBody>
+          <a:bodyPr vert="horz" lIns="91440" tIns="45720" rIns="91440" bIns="45720" rtlCol="0" anchor="b"/>
+          <a:lstStyle>
+            <a:lvl1pPr algn="r">
+              <a:defRPr sz="1200"/>
+            </a:lvl1pPr>
+          </a:lstStyle>
+          <a:p>
+            <a:fld id="{05BDED24-37C4-074C-AE90-3D14477ED167}" type="slidenum">
+              <a:rPr lang="en-FR" smtClean="0"/>
+              <a:t>‹#›</a:t>
+            </a:fld>
+            <a:endParaRPr lang="en-FR"/>
+          </a:p>
+        </p:txBody>
+      </p:sp>
+    </p:spTree>
+    <p:extLst>
+      <p:ext uri="{BB962C8B-B14F-4D97-AF65-F5344CB8AC3E}">
+        <p14:creationId xmlns:p14="http://schemas.microsoft.com/office/powerpoint/2010/main" val="1492911243"/>
+      </p:ext>
+    </p:extLst>
+  </p:cSld>
+  <p:clrMap bg1="lt1" tx1="dk1" bg2="lt2" tx2="dk2" accent1="accent1" accent2="accent2" accent3="accent3" accent4="accent4" accent5="accent5" accent6="accent6" hlink="hlink" folHlink="folHlink"/>
+  <p:notesStyle>
+    <a:lvl1pPr marL="0" algn="l" defTabSz="914400" rtl="0" eaLnBrk="1" latinLnBrk="0" hangingPunct="1">
+      <a:defRPr sz="1200" kern="1200">
+        <a:solidFill>
+          <a:schemeClr val="tx1"/>
+        </a:solidFill>
+        <a:latin typeface="+mn-lt"/>
+        <a:ea typeface="+mn-ea"/>
+        <a:cs typeface="+mn-cs"/>
+      </a:defRPr>
+    </a:lvl1pPr>
+    <a:lvl2pPr marL="457200" algn="l" defTabSz="914400" rtl="0" eaLnBrk="1" latinLnBrk="0" hangingPunct="1">
+      <a:defRPr sz="1200" kern="1200">
+        <a:solidFill>
+          <a:schemeClr val="tx1"/>
+        </a:solidFill>
+        <a:latin typeface="+mn-lt"/>
+        <a:ea typeface="+mn-ea"/>
+        <a:cs typeface="+mn-cs"/>
+      </a:defRPr>
+    </a:lvl2pPr>
+    <a:lvl3pPr marL="914400" algn="l" defTabSz="914400" rtl="0" eaLnBrk="1" latinLnBrk="0" hangingPunct="1">
+      <a:defRPr sz="1200" kern="1200">
+        <a:solidFill>
+          <a:schemeClr val="tx1"/>
+        </a:solidFill>
+        <a:latin typeface="+mn-lt"/>
+        <a:ea typeface="+mn-ea"/>
+        <a:cs typeface="+mn-cs"/>
+      </a:defRPr>
+    </a:lvl3pPr>
+    <a:lvl4pPr marL="1371600" algn="l" defTabSz="914400" rtl="0" eaLnBrk="1" latinLnBrk="0" hangingPunct="1">
+      <a:defRPr sz="1200" kern="1200">
+        <a:solidFill>
+          <a:schemeClr val="tx1"/>
+        </a:solidFill>
+        <a:latin typeface="+mn-lt"/>
+        <a:ea typeface="+mn-ea"/>
+        <a:cs typeface="+mn-cs"/>
+      </a:defRPr>
+    </a:lvl4pPr>
+    <a:lvl5pPr marL="1828800" algn="l" defTabSz="914400" rtl="0" eaLnBrk="1" latinLnBrk="0" hangingPunct="1">
+      <a:defRPr sz="1200" kern="1200">
+        <a:solidFill>
+          <a:schemeClr val="tx1"/>
+        </a:solidFill>
+        <a:latin typeface="+mn-lt"/>
+        <a:ea typeface="+mn-ea"/>
+        <a:cs typeface="+mn-cs"/>
+      </a:defRPr>
+    </a:lvl5pPr>
+    <a:lvl6pPr marL="2286000" algn="l" defTabSz="914400" rtl="0" eaLnBrk="1" latinLnBrk="0" hangingPunct="1">
+      <a:defRPr sz="1200" kern="1200">
+        <a:solidFill>
+          <a:schemeClr val="tx1"/>
+        </a:solidFill>
+        <a:latin typeface="+mn-lt"/>
+        <a:ea typeface="+mn-ea"/>
+        <a:cs typeface="+mn-cs"/>
+      </a:defRPr>
+    </a:lvl6pPr>
+    <a:lvl7pPr marL="2743200" algn="l" defTabSz="914400" rtl="0" eaLnBrk="1" latinLnBrk="0" hangingPunct="1">
+      <a:defRPr sz="1200" kern="1200">
+        <a:solidFill>
+          <a:schemeClr val="tx1"/>
+        </a:solidFill>
+        <a:latin typeface="+mn-lt"/>
+        <a:ea typeface="+mn-ea"/>
+        <a:cs typeface="+mn-cs"/>
+      </a:defRPr>
+    </a:lvl7pPr>
+    <a:lvl8pPr marL="3200400" algn="l" defTabSz="914400" rtl="0" eaLnBrk="1" latinLnBrk="0" hangingPunct="1">
+      <a:defRPr sz="1200" kern="1200">
+        <a:solidFill>
+          <a:schemeClr val="tx1"/>
+        </a:solidFill>
+        <a:latin typeface="+mn-lt"/>
+        <a:ea typeface="+mn-ea"/>
+        <a:cs typeface="+mn-cs"/>
+      </a:defRPr>
+    </a:lvl8pPr>
+    <a:lvl9pPr marL="3657600" algn="l" defTabSz="914400" rtl="0" eaLnBrk="1" latinLnBrk="0" hangingPunct="1">
+      <a:defRPr sz="1200" kern="1200">
+        <a:solidFill>
+          <a:schemeClr val="tx1"/>
+        </a:solidFill>
+        <a:latin typeface="+mn-lt"/>
+        <a:ea typeface="+mn-ea"/>
+        <a:cs typeface="+mn-cs"/>
+      </a:defRPr>
+    </a:lvl9pPr>
+  </p:notesStyle>
+</p:notesMaster>
+</file>
+
+<file path=ppt/notesSlides/notesSlide1.xml><?xml version="1.0" encoding="utf-8"?>
+<p:notes xmlns:a="http://schemas.openxmlformats.org/drawingml/2006/main" xmlns:r="http://schemas.openxmlformats.org/officeDocument/2006/relationships" xmlns:p="http://schemas.openxmlformats.org/presentationml/2006/main">
+  <p:cSld>
+    <p:spTree>
+      <p:nvGrpSpPr>
+        <p:cNvPr id="1" name=""/>
+        <p:cNvGrpSpPr/>
+        <p:nvPr/>
+      </p:nvGrpSpPr>
+      <p:grpSpPr>
+        <a:xfrm>
+          <a:off x="0" y="0"/>
+          <a:ext cx="0" cy="0"/>
+          <a:chOff x="0" y="0"/>
+          <a:chExt cx="0" cy="0"/>
+        </a:xfrm>
+      </p:grpSpPr>
+      <p:sp>
+        <p:nvSpPr>
+          <p:cNvPr id="2" name="Notes Placeholder 1"/>
+          <p:cNvSpPr>
+            <a:spLocks noGrp="1"/>
+          </p:cNvSpPr>
+          <p:nvPr>
+            <p:ph type="body" idx="1"/>
+          </p:nvPr>
+        </p:nvSpPr>
+        <p:spPr>
+          <a:xfrm>
+            <a:off x="685800" y="4343400"/>
+            <a:ext cx="5486400" cy="4114800"/>
+          </a:xfrm>
+          <a:prstGeom prst="rect">
+            <a:avLst/>
+          </a:prstGeom>
+        </p:spPr>
+        <p:txBody>
+          <a:bodyPr/>
+          <a:lstStyle/>
+          <a:p>
+            <a:r>
+              <a:rPr lang="fr-FR" dirty="0"/>
+              <a:t>Slide 1 · Titre — 00:00 → 00:20 · Miguel</a:t>
+            </a:r>
+          </a:p>
+          <a:p>
+            <a:r>
+              <a:rPr lang="fr-FR" dirty="0"/>
+              <a:t>Bonjour. Miguel Monereo, et Maxime. Nous portons la sécurité de l'information chez MERIDIAN Logistique.</a:t>
+            </a:r>
+          </a:p>
+          <a:p>
+            <a:r>
+              <a:rPr lang="fr-FR" dirty="0"/>
+              <a:t>Nous avons dix-huit minutes. Nous n'allons pas vous faire un rapport : nous venons vous demander quatre décisions, et vous dire ce qu'elles coûtent.</a:t>
+            </a:r>
+          </a:p>
+          <a:p>
+            <a:r>
+              <a:rPr lang="fr-FR" dirty="0"/>
+              <a:t>[Clic immédiat. Pas de slide « sommaire ».]</a:t>
+            </a:r>
+          </a:p>
+        </p:txBody>
+      </p:sp>
+    </p:spTree>
+  </p:cSld>
+  <p:clrMapOvr>
+    <a:masterClrMapping/>
+  </p:clrMapOvr>
+</p:notes>
+</file>
+
+<file path=ppt/notesSlides/notesSlide10.xml><?xml version="1.0" encoding="utf-8"?>
+<p:notes xmlns:a="http://schemas.openxmlformats.org/drawingml/2006/main" xmlns:r="http://schemas.openxmlformats.org/officeDocument/2006/relationships" xmlns:p="http://schemas.openxmlformats.org/presentationml/2006/main">
+  <p:cSld>
+    <p:spTree>
+      <p:nvGrpSpPr>
+        <p:cNvPr id="1" name=""/>
+        <p:cNvGrpSpPr/>
+        <p:nvPr/>
+      </p:nvGrpSpPr>
+      <p:grpSpPr>
+        <a:xfrm>
+          <a:off x="0" y="0"/>
+          <a:ext cx="0" cy="0"/>
+          <a:chOff x="0" y="0"/>
+          <a:chExt cx="0" cy="0"/>
+        </a:xfrm>
+      </p:grpSpPr>
+      <p:sp>
+        <p:nvSpPr>
+          <p:cNvPr id="2" name="Notes Placeholder 1"/>
+          <p:cNvSpPr>
+            <a:spLocks noGrp="1"/>
+          </p:cNvSpPr>
+          <p:nvPr>
+            <p:ph type="body" idx="1"/>
+          </p:nvPr>
+        </p:nvSpPr>
+        <p:spPr>
+          <a:xfrm>
+            <a:off x="685800" y="4343400"/>
+            <a:ext cx="5486400" cy="4114800"/>
+          </a:xfrm>
+          <a:prstGeom prst="rect">
+            <a:avLst/>
+          </a:prstGeom>
+        </p:spPr>
+        <p:txBody>
+          <a:bodyPr/>
+          <a:lstStyle/>
+          <a:p>
+            <a:r>
+              <a:rPr lang="fr-FR" dirty="0"/>
+              <a:t>Slide 10 · Treize mesures, rangées par décision — 11:50 → 12:50 · Miguel</a:t>
+            </a:r>
+          </a:p>
+          <a:p>
+            <a:r>
+              <a:rPr lang="fr-FR" dirty="0"/>
+              <a:t>Le plan, maintenant. Treize mesures.</a:t>
+            </a:r>
+          </a:p>
+          <a:p>
+            <a:r>
+              <a:rPr lang="fr-FR" dirty="0"/>
+              <a:t>Nous les avons rangées par décision, pas par risque. C'est volontaire : VOUS NE SIGNEZ PAS UN SCÉNARIO, VOUS SIGNEZ UN AVENANT, UN BUDGET OU UNE ACCEPTATION.</a:t>
+            </a:r>
+          </a:p>
+          <a:p>
+            <a:r>
+              <a:rPr lang="fr-FR" dirty="0"/>
+              <a:t>Cinq relèvent de vous : deux avenants contractuels, deux acceptations de risque, et le pilotage du projet avec MERIDIAN Santé.</a:t>
+            </a:r>
+          </a:p>
+          <a:p>
+            <a:r>
+              <a:rPr lang="fr-FR" dirty="0"/>
+              <a:t>Huit relèvent de l'exécution. Et dans ces huit, deux comptent double, parce qu'elles traitent plusieurs risques à la fois. La première : des comptes nominatifs et une authentification forte pour notre prestataire. La seconde : séparer le réseau de bureau du réseau des machines, sur les six sites.</a:t>
+            </a:r>
+          </a:p>
+          <a:p>
+            <a:r>
+              <a:rPr lang="fr-FR" dirty="0"/>
+              <a:t>Si vous ne deviez en financer que deux, ce sont ces deux-là.</a:t>
+            </a:r>
+          </a:p>
+          <a:p>
+            <a:r>
+              <a:rPr lang="fr-FR" dirty="0"/>
+              <a:t>° Chaque mesure a un responsable nommé et une date. La plus proche est en novembre, la plus lointaine en septembre 2027.</a:t>
+            </a:r>
+          </a:p>
+        </p:txBody>
+      </p:sp>
+    </p:spTree>
+  </p:cSld>
+  <p:clrMapOvr>
+    <a:masterClrMapping/>
+  </p:clrMapOvr>
+</p:notes>
+</file>
+
+<file path=ppt/notesSlides/notesSlide11.xml><?xml version="1.0" encoding="utf-8"?>
+<p:notes xmlns:a="http://schemas.openxmlformats.org/drawingml/2006/main" xmlns:r="http://schemas.openxmlformats.org/officeDocument/2006/relationships" xmlns:p="http://schemas.openxmlformats.org/presentationml/2006/main">
+  <p:cSld>
+    <p:spTree>
+      <p:nvGrpSpPr>
+        <p:cNvPr id="1" name=""/>
+        <p:cNvGrpSpPr/>
+        <p:nvPr/>
+      </p:nvGrpSpPr>
+      <p:grpSpPr>
+        <a:xfrm>
+          <a:off x="0" y="0"/>
+          <a:ext cx="0" cy="0"/>
+          <a:chOff x="0" y="0"/>
+          <a:chExt cx="0" cy="0"/>
+        </a:xfrm>
+      </p:grpSpPr>
+      <p:sp>
+        <p:nvSpPr>
+          <p:cNvPr id="2" name="Notes Placeholder 1"/>
+          <p:cNvSpPr>
+            <a:spLocks noGrp="1"/>
+          </p:cNvSpPr>
+          <p:nvPr>
+            <p:ph type="body" idx="1"/>
+          </p:nvPr>
+        </p:nvSpPr>
+        <p:spPr>
+          <a:xfrm>
+            <a:off x="685800" y="4343400"/>
+            <a:ext cx="5486400" cy="4114800"/>
+          </a:xfrm>
+          <a:prstGeom prst="rect">
+            <a:avLst/>
+          </a:prstGeom>
+        </p:spPr>
+        <p:txBody>
+          <a:bodyPr/>
+          <a:lstStyle/>
+          <a:p>
+            <a:r>
+              <a:rPr lang="fr-FR" dirty="0"/>
+              <a:t>Slide 11 · L'arbitrage — 12:50 → 13:50 · Miguel</a:t>
+            </a:r>
+          </a:p>
+          <a:p>
+            <a:r>
+              <a:rPr lang="fr-FR" dirty="0"/>
+              <a:t>Et voici ce que cela coûte.</a:t>
+            </a:r>
+          </a:p>
+          <a:p>
+            <a:r>
+              <a:rPr lang="fr-FR" dirty="0"/>
+              <a:t>À gauche, ce que nous demandons : quatre-vingt-deux mille euros par an, treize mesures. Un coût certain, annuel, borné.</a:t>
+            </a:r>
+          </a:p>
+          <a:p>
+            <a:r>
+              <a:rPr lang="fr-FR" dirty="0"/>
+              <a:t>À droite, ce que nous évitons. Douze mille euros pour une seule journée d'arrêt — déjà le tiers du budget annuel du plan, pour une seule journée de l'accident que ce plan traite. Et plusieurs millions si l'attaque aboutit.</a:t>
+            </a:r>
+          </a:p>
+          <a:p>
+            <a:r>
+              <a:rPr lang="fr-FR" dirty="0"/>
+              <a:t>La phrase que je voudrais que vous reteniez est celle-ci. [Pause.] UN COÛT CERTAIN, ANNUEL ET BORNÉ, CONTRE UNE PERTE PLAUSIBLE ET NON BORNÉE. UNE PERTE QUI SE RÉALISE EN UN JOUR DE PLUS QUE LE PLAN N'EN COÛTE EN UN AN.</a:t>
+            </a:r>
+          </a:p>
+          <a:p>
+            <a:r>
+              <a:rPr lang="fr-FR" dirty="0"/>
+              <a:t>° Un mot sur la solidité de ces chiffres. Le douze mille est contractuel. La borne haute est un ordre de grandeur, et nous l'assumons comme tel — c'est justement pour la remplacer par un chiffre mesuré que nous demandons le test de novembre.</a:t>
+            </a:r>
+          </a:p>
+        </p:txBody>
+      </p:sp>
+    </p:spTree>
+  </p:cSld>
+  <p:clrMapOvr>
+    <a:masterClrMapping/>
+  </p:clrMapOvr>
+</p:notes>
+</file>
+
+<file path=ppt/notesSlides/notesSlide12.xml><?xml version="1.0" encoding="utf-8"?>
+<p:notes xmlns:a="http://schemas.openxmlformats.org/drawingml/2006/main" xmlns:r="http://schemas.openxmlformats.org/officeDocument/2006/relationships" xmlns:p="http://schemas.openxmlformats.org/presentationml/2006/main">
+  <p:cSld>
+    <p:spTree>
+      <p:nvGrpSpPr>
+        <p:cNvPr id="1" name=""/>
+        <p:cNvGrpSpPr/>
+        <p:nvPr/>
+      </p:nvGrpSpPr>
+      <p:grpSpPr>
+        <a:xfrm>
+          <a:off x="0" y="0"/>
+          <a:ext cx="0" cy="0"/>
+          <a:chOff x="0" y="0"/>
+          <a:chExt cx="0" cy="0"/>
+        </a:xfrm>
+      </p:grpSpPr>
+      <p:sp>
+        <p:nvSpPr>
+          <p:cNvPr id="2" name="Notes Placeholder 1"/>
+          <p:cNvSpPr>
+            <a:spLocks noGrp="1"/>
+          </p:cNvSpPr>
+          <p:nvPr>
+            <p:ph type="body" idx="1"/>
+          </p:nvPr>
+        </p:nvSpPr>
+        <p:spPr>
+          <a:xfrm>
+            <a:off x="685800" y="4343400"/>
+            <a:ext cx="5486400" cy="4114800"/>
+          </a:xfrm>
+          <a:prstGeom prst="rect">
+            <a:avLst/>
+          </a:prstGeom>
+        </p:spPr>
+        <p:txBody>
+          <a:bodyPr/>
+          <a:lstStyle/>
+          <a:p>
+            <a:r>
+              <a:rPr lang="fr-FR" dirty="0"/>
+              <a:t>Slide 12 · Ce qui reste ouvert — 13:50 → 14:35 · Miguel</a:t>
+            </a:r>
+          </a:p>
+          <a:p>
+            <a:r>
+              <a:rPr lang="fr-FR" dirty="0"/>
+              <a:t>Trois choses n'ont pas de réponse aujourd'hui. Chacune porte une date. Je préfère vous les donner plutôt que d'attendre que vous les trouviez.</a:t>
+            </a:r>
+          </a:p>
+          <a:p>
+            <a:r>
+              <a:rPr lang="fr-FR" dirty="0"/>
+              <a:t>Un : combien de temps pour repartir après un arrêt. Nous ne le savons pas. Test de restauration, 14 novembre.</a:t>
+            </a:r>
+          </a:p>
+          <a:p>
+            <a:r>
+              <a:rPr lang="fr-FR" dirty="0"/>
+              <a:t>Deux : le risque porté par l'intégrateur de nos machines reste à moyen, et il ne descendra pas plus bas, quel que soit le budget. ° C'est une limite de ce type de partenaire, pas un échec du plan. Revue sous douze mois.</a:t>
+            </a:r>
+          </a:p>
+          <a:p>
+            <a:r>
+              <a:rPr lang="fr-FR" dirty="0"/>
+              <a:t>Trois : la reprise du flux vers MERIDIAN Santé n'atteint sa cible qu'en fin de projet, en septembre 2027. D'ici là, le risque reste élevé dans les faits.</a:t>
+            </a:r>
+          </a:p>
+          <a:p>
+            <a:r>
+              <a:rPr lang="fr-FR" dirty="0"/>
+              <a:t>[Passage de parole.] Maxime conclut.</a:t>
+            </a:r>
+          </a:p>
+        </p:txBody>
+      </p:sp>
+    </p:spTree>
+  </p:cSld>
+  <p:clrMapOvr>
+    <a:masterClrMapping/>
+  </p:clrMapOvr>
+</p:notes>
+</file>
+
+<file path=ppt/notesSlides/notesSlide13.xml><?xml version="1.0" encoding="utf-8"?>
+<p:notes xmlns:a="http://schemas.openxmlformats.org/drawingml/2006/main" xmlns:r="http://schemas.openxmlformats.org/officeDocument/2006/relationships" xmlns:p="http://schemas.openxmlformats.org/presentationml/2006/main">
+  <p:cSld>
+    <p:spTree>
+      <p:nvGrpSpPr>
+        <p:cNvPr id="1" name=""/>
+        <p:cNvGrpSpPr/>
+        <p:nvPr/>
+      </p:nvGrpSpPr>
+      <p:grpSpPr>
+        <a:xfrm>
+          <a:off x="0" y="0"/>
+          <a:ext cx="0" cy="0"/>
+          <a:chOff x="0" y="0"/>
+          <a:chExt cx="0" cy="0"/>
+        </a:xfrm>
+      </p:grpSpPr>
+      <p:sp>
+        <p:nvSpPr>
+          <p:cNvPr id="2" name="Notes Placeholder 1"/>
+          <p:cNvSpPr>
+            <a:spLocks noGrp="1"/>
+          </p:cNvSpPr>
+          <p:nvPr>
+            <p:ph type="body" idx="1"/>
+          </p:nvPr>
+        </p:nvSpPr>
+        <p:spPr>
+          <a:xfrm>
+            <a:off x="685800" y="4343400"/>
+            <a:ext cx="5486400" cy="4114800"/>
+          </a:xfrm>
+          <a:prstGeom prst="rect">
+            <a:avLst/>
+          </a:prstGeom>
+        </p:spPr>
+        <p:txBody>
+          <a:bodyPr/>
+          <a:lstStyle/>
+          <a:p>
+            <a:r>
+              <a:rPr lang="fr-FR" dirty="0"/>
+              <a:t>Slide 13 · Deux périmètres, et comment vous le saurez — 14:35 → 16:05 · Maxime</a:t>
+            </a:r>
+          </a:p>
+          <a:p>
+            <a:r>
+              <a:rPr lang="fr-FR" dirty="0"/>
+              <a:t>Deux périmètres, et c'est un choix.</a:t>
+            </a:r>
+          </a:p>
+          <a:p>
+            <a:r>
+              <a:rPr lang="fr-FR" dirty="0"/>
+              <a:t>Le système de management couvre la filiale entière : six exclusions nommées, quatre interfaces déclarées.</a:t>
+            </a:r>
+          </a:p>
+          <a:p>
+            <a:r>
+              <a:rPr lang="fr-FR" dirty="0"/>
+              <a:t>Le périmètre de la première certification est plus étroit : seulement les services que reçoit notre client pharmaceutique. Avec une exception écrite — l'automatisation du site E4 en est exclue, jusqu'au 14 juin 2027.</a:t>
+            </a:r>
+          </a:p>
+          <a:p>
+            <a:r>
+              <a:rPr lang="fr-FR" dirty="0"/>
+              <a:t>Pourquoi ? Parce que ce site sert ce client, et qu'il porte aussi des machines de tri sur un réseau qui n'est pas séparé du reste. CERTIFIER CE PÉRIMÈTRE AUJOURD'HUI, CE SERAIT CERTIFIER CE DÉFAUT. L'exclusion tombera sur preuve, pas à la date.</a:t>
+            </a:r>
+          </a:p>
+          <a:p>
+            <a:r>
+              <a:rPr lang="fr-FR" dirty="0"/>
+              <a:t>° Et nous ne faisons pas attendre le client dix-huit mois : nous lui répondons dès maintenant, au titre d'une démarche documentée équivalente. Le référentiel, l'audit, le plan chiffré. Les trois pièces existent.</a:t>
+            </a:r>
+          </a:p>
+          <a:p>
+            <a:r>
+              <a:rPr lang="fr-FR" dirty="0"/>
+              <a:t>Dernier point : comment saurez-vous que tout cela tient ? Sept indicateurs, un point trimestriel, une revue annuelle. Chacun se présente sous la même forme : CE CHIFFRE VOUS DIT SI… ET S'IL FRANCHIT LE SEUIL, LA DÉCISION À PRENDRE EST…</a:t>
+            </a:r>
+          </a:p>
+          <a:p>
+            <a:r>
+              <a:rPr lang="fr-FR" dirty="0"/>
+              <a:t>Un seul exemple, celui qui commande cette page. La séparation des réseaux : zéro entrepôt sur six aujourd'hui. Ce chiffre vous dit si l'exclusion du site E4 peut tomber au 14 juin 2027. S'il n'est pas à six sur six à cette date, la décision à prendre est de reporter la certification, ou de la lancer sans ce site.</a:t>
+            </a:r>
+          </a:p>
+        </p:txBody>
+      </p:sp>
+    </p:spTree>
+  </p:cSld>
+  <p:clrMapOvr>
+    <a:masterClrMapping/>
+  </p:clrMapOvr>
+</p:notes>
+</file>
+
+<file path=ppt/notesSlides/notesSlide14.xml><?xml version="1.0" encoding="utf-8"?>
+<p:notes xmlns:a="http://schemas.openxmlformats.org/drawingml/2006/main" xmlns:r="http://schemas.openxmlformats.org/officeDocument/2006/relationships" xmlns:p="http://schemas.openxmlformats.org/presentationml/2006/main">
+  <p:cSld>
+    <p:spTree>
+      <p:nvGrpSpPr>
+        <p:cNvPr id="1" name=""/>
+        <p:cNvGrpSpPr/>
+        <p:nvPr/>
+      </p:nvGrpSpPr>
+      <p:grpSpPr>
+        <a:xfrm>
+          <a:off x="0" y="0"/>
+          <a:ext cx="0" cy="0"/>
+          <a:chOff x="0" y="0"/>
+          <a:chExt cx="0" cy="0"/>
+        </a:xfrm>
+      </p:grpSpPr>
+      <p:sp>
+        <p:nvSpPr>
+          <p:cNvPr id="2" name="Notes Placeholder 1"/>
+          <p:cNvSpPr>
+            <a:spLocks noGrp="1"/>
+          </p:cNvSpPr>
+          <p:nvPr>
+            <p:ph type="body" idx="1"/>
+          </p:nvPr>
+        </p:nvSpPr>
+        <p:spPr>
+          <a:xfrm>
+            <a:off x="685800" y="4343400"/>
+            <a:ext cx="5486400" cy="4114800"/>
+          </a:xfrm>
+          <a:prstGeom prst="rect">
+            <a:avLst/>
+          </a:prstGeom>
+        </p:spPr>
+        <p:txBody>
+          <a:bodyPr/>
+          <a:lstStyle/>
+          <a:p>
+            <a:r>
+              <a:rPr lang="fr-FR" dirty="0"/>
+              <a:t>Slide 14 · Ce que nous vous demandons de signer — 16:05 → 17:20 · les deux (pas de coupe)</a:t>
+            </a:r>
+          </a:p>
+          <a:p>
+            <a:r>
+              <a:rPr lang="fr-FR" dirty="0"/>
+              <a:t>MIGUEL : Voilà ce que nous vous demandons de signer. Quatre décisions, pas une de plus.</a:t>
+            </a:r>
+          </a:p>
+          <a:p>
+            <a:r>
+              <a:rPr lang="fr-FR" dirty="0"/>
+              <a:t>Un. Confirmer la règle d'acceptation du risque que j'ai énoncée tout à l'heure. C'est la direction générale qui la fixe, le conseil l'approuve. Sans elle, nos treize mesures n'ont plus d'ordre de priorité.</a:t>
+            </a:r>
+          </a:p>
+          <a:p>
+            <a:r>
+              <a:rPr lang="fr-FR" dirty="0"/>
+              <a:t>Deux. Financer le plan : quatre-vingt-deux mille euros par an, sur l'exercice 2027.</a:t>
+            </a:r>
+          </a:p>
+          <a:p>
+            <a:r>
+              <a:rPr lang="fr-FR" dirty="0"/>
+              <a:t>MAXIME : Trois. Autoriser deux avenants contractuels — avec notre prestataire de maintenance, et avec l'intégrateur de nos machines. AVANT LE RENOUVELLEMENT DE NOVEMBRE. Après, la fenêtre se referme : les mêmes exigences se paient, ou ne s'obtiennent pas.</a:t>
+            </a:r>
+          </a:p>
+          <a:p>
+            <a:r>
+              <a:rPr lang="fr-FR" dirty="0"/>
+              <a:t>Quatre. Arrêter le périmètre de la première certification, tel que je viens de le décrire.</a:t>
+            </a:r>
+          </a:p>
+          <a:p>
+            <a:r>
+              <a:rPr lang="fr-FR" dirty="0"/>
+              <a:t>Deux signatures les accompagnent : l'acceptation formelle du risque sur la chaîne du froid, et une acceptation simple sur les données d'expédition du client. Et je le redis : AUCUNE DÉROGATION DEMANDÉE.</a:t>
+            </a:r>
+          </a:p>
+        </p:txBody>
+      </p:sp>
+    </p:spTree>
+  </p:cSld>
+  <p:clrMapOvr>
+    <a:masterClrMapping/>
+  </p:clrMapOvr>
+</p:notes>
+</file>
+
+<file path=ppt/notesSlides/notesSlide15.xml><?xml version="1.0" encoding="utf-8"?>
+<p:notes xmlns:a="http://schemas.openxmlformats.org/drawingml/2006/main" xmlns:r="http://schemas.openxmlformats.org/officeDocument/2006/relationships" xmlns:p="http://schemas.openxmlformats.org/presentationml/2006/main">
+  <p:cSld>
+    <p:spTree>
+      <p:nvGrpSpPr>
+        <p:cNvPr id="1" name=""/>
+        <p:cNvGrpSpPr/>
+        <p:nvPr/>
+      </p:nvGrpSpPr>
+      <p:grpSpPr>
+        <a:xfrm>
+          <a:off x="0" y="0"/>
+          <a:ext cx="0" cy="0"/>
+          <a:chOff x="0" y="0"/>
+          <a:chExt cx="0" cy="0"/>
+        </a:xfrm>
+      </p:grpSpPr>
+      <p:sp>
+        <p:nvSpPr>
+          <p:cNvPr id="2" name="Notes Placeholder 1"/>
+          <p:cNvSpPr>
+            <a:spLocks noGrp="1"/>
+          </p:cNvSpPr>
+          <p:nvPr>
+            <p:ph type="body" idx="1"/>
+          </p:nvPr>
+        </p:nvSpPr>
+        <p:spPr>
+          <a:xfrm>
+            <a:off x="685800" y="4343400"/>
+            <a:ext cx="5486400" cy="4114800"/>
+          </a:xfrm>
+          <a:prstGeom prst="rect">
+            <a:avLst/>
+          </a:prstGeom>
+        </p:spPr>
+        <p:txBody>
+          <a:bodyPr/>
+          <a:lstStyle/>
+          <a:p>
+            <a:r>
+              <a:rPr lang="fr-FR" dirty="0"/>
+              <a:t>Slide 15 · La limite — 17:20 → 18:00 · Maxime (pas de coupe)</a:t>
+            </a:r>
+          </a:p>
+          <a:p>
+            <a:r>
+              <a:rPr lang="fr-FR" dirty="0"/>
+              <a:t>Un dernier mot, et c'est une limite que je préfère poser moi-même.</a:t>
+            </a:r>
+          </a:p>
+          <a:p>
+            <a:r>
+              <a:rPr lang="fr-FR" dirty="0"/>
+              <a:t>UN DOSSIER PROUVE UNE MÉTHODE. IL NE PROUVE JAMAIS LA SÉCURITÉ. Des serveurs mal configurés se moquent de la qualité du classeur.</a:t>
+            </a:r>
+          </a:p>
+          <a:p>
+            <a:r>
+              <a:rPr lang="fr-FR" dirty="0"/>
+              <a:t>Ce que nous venons d'établir : où nous en sommes, ce qui nous menace, et ce que coûte le traitement. Ce que nous n'avons pas établi : que nous sommes protégés.</a:t>
+            </a:r>
+          </a:p>
+          <a:p>
+            <a:r>
+              <a:rPr lang="fr-FR" dirty="0"/>
+              <a:t>° Notre propre mesure est une auto-évaluation, pas un audit indépendant, et notre dossier le dit.</a:t>
+            </a:r>
+          </a:p>
+          <a:p>
+            <a:r>
+              <a:rPr lang="fr-FR" dirty="0"/>
+              <a:t>Trois dates transformeront cette méthode en preuve. Le 14 novembre, le test de restauration. Le 14 janvier, les comptes nominatifs de notre prestataire. Le 14 juin, la séparation des réseaux.</a:t>
+            </a:r>
+          </a:p>
+          <a:p>
+            <a:r>
+              <a:rPr lang="fr-FR" dirty="0"/>
+              <a:t>Nous prenons vos questions.</a:t>
+            </a:r>
+          </a:p>
+          <a:p>
+            <a:r>
+              <a:rPr lang="fr-FR" dirty="0"/>
+              <a:t>[La slide 15 reste affichée pendant les douze minutes de questions.]</a:t>
+            </a:r>
+          </a:p>
+        </p:txBody>
+      </p:sp>
+    </p:spTree>
+  </p:cSld>
+  <p:clrMapOvr>
+    <a:masterClrMapping/>
+  </p:clrMapOvr>
+</p:notes>
+</file>
+
+<file path=ppt/notesSlides/notesSlide2.xml><?xml version="1.0" encoding="utf-8"?>
+<p:notes xmlns:a="http://schemas.openxmlformats.org/drawingml/2006/main" xmlns:r="http://schemas.openxmlformats.org/officeDocument/2006/relationships" xmlns:p="http://schemas.openxmlformats.org/presentationml/2006/main">
+  <p:cSld>
+    <p:spTree>
+      <p:nvGrpSpPr>
+        <p:cNvPr id="1" name=""/>
+        <p:cNvGrpSpPr/>
+        <p:nvPr/>
+      </p:nvGrpSpPr>
+      <p:grpSpPr>
+        <a:xfrm>
+          <a:off x="0" y="0"/>
+          <a:ext cx="0" cy="0"/>
+          <a:chOff x="0" y="0"/>
+          <a:chExt cx="0" cy="0"/>
+        </a:xfrm>
+      </p:grpSpPr>
+      <p:sp>
+        <p:nvSpPr>
+          <p:cNvPr id="2" name="Notes Placeholder 1"/>
+          <p:cNvSpPr>
+            <a:spLocks noGrp="1"/>
+          </p:cNvSpPr>
+          <p:nvPr>
+            <p:ph type="body" idx="1"/>
+          </p:nvPr>
+        </p:nvSpPr>
+        <p:spPr>
+          <a:xfrm>
+            <a:off x="685800" y="4343400"/>
+            <a:ext cx="5486400" cy="4114800"/>
+          </a:xfrm>
+          <a:prstGeom prst="rect">
+            <a:avLst/>
+          </a:prstGeom>
+        </p:spPr>
+        <p:txBody>
+          <a:bodyPr/>
+          <a:lstStyle/>
+          <a:p>
+            <a:r>
+              <a:rPr lang="fr-FR" dirty="0"/>
+              <a:t>Slide 2 · Le message en une minute — 00:20 → 01:05 · Miguel</a:t>
+            </a:r>
+          </a:p>
+          <a:p>
+            <a:r>
+              <a:rPr lang="fr-FR" dirty="0"/>
+              <a:t>Je commence par le résumé, pour que vous l'ayez tout de suite.</a:t>
+            </a:r>
+          </a:p>
+          <a:p>
+            <a:r>
+              <a:rPr lang="fr-FR" dirty="0"/>
+              <a:t>Quarante pour cent de tout ce que le groupe expédie passe par un seul système informatique. Sur un seul site. Et nous n'avons jamais vérifié que nous savions le redémarrer.</a:t>
+            </a:r>
+          </a:p>
+          <a:p>
+            <a:r>
+              <a:rPr lang="fr-FR" dirty="0"/>
+              <a:t>Une journée d'arrêt nous coûte douze mille euros de pénalités. Ce n'est pas une estimation, c'est notre contrat.</a:t>
+            </a:r>
+          </a:p>
+          <a:p>
+            <a:r>
+              <a:rPr lang="fr-FR" dirty="0"/>
+              <a:t>° En 2017, la même situation a coûté près de trois cents millions de dollars à un transporteur européen ; Maxime y reviendra.</a:t>
+            </a:r>
+          </a:p>
+          <a:p>
+            <a:r>
+              <a:rPr lang="fr-FR" dirty="0"/>
+              <a:t>Nous venons vous demander quatre-vingt-deux mille euros par an. LE PLAN COMPLET COÛTE MOINS DE SEPT JOURS D'ARRÊT.</a:t>
+            </a:r>
+          </a:p>
+          <a:p>
+            <a:r>
+              <a:rPr lang="fr-FR" dirty="0"/>
+              <a:t>Voilà la décision que nous vous apportons. Les quinze minutes qui suivent l'expliquent.</a:t>
+            </a:r>
+          </a:p>
+          <a:p>
+            <a:r>
+              <a:rPr lang="fr-FR" dirty="0"/>
+              <a:t>[Pause d'une seconde. Puis :] Commençons par ce que nous protégeons.</a:t>
+            </a:r>
+          </a:p>
+        </p:txBody>
+      </p:sp>
+    </p:spTree>
+  </p:cSld>
+  <p:clrMapOvr>
+    <a:masterClrMapping/>
+  </p:clrMapOvr>
+</p:notes>
+</file>
+
+<file path=ppt/notesSlides/notesSlide3.xml><?xml version="1.0" encoding="utf-8"?>
+<p:notes xmlns:a="http://schemas.openxmlformats.org/drawingml/2006/main" xmlns:r="http://schemas.openxmlformats.org/officeDocument/2006/relationships" xmlns:p="http://schemas.openxmlformats.org/presentationml/2006/main">
+  <p:cSld>
+    <p:spTree>
+      <p:nvGrpSpPr>
+        <p:cNvPr id="1" name=""/>
+        <p:cNvGrpSpPr/>
+        <p:nvPr/>
+      </p:nvGrpSpPr>
+      <p:grpSpPr>
+        <a:xfrm>
+          <a:off x="0" y="0"/>
+          <a:ext cx="0" cy="0"/>
+          <a:chOff x="0" y="0"/>
+          <a:chExt cx="0" cy="0"/>
+        </a:xfrm>
+      </p:grpSpPr>
+      <p:sp>
+        <p:nvSpPr>
+          <p:cNvPr id="2" name="Notes Placeholder 1"/>
+          <p:cNvSpPr>
+            <a:spLocks noGrp="1"/>
+          </p:cNvSpPr>
+          <p:nvPr>
+            <p:ph type="body" idx="1"/>
+          </p:nvPr>
+        </p:nvSpPr>
+        <p:spPr>
+          <a:xfrm>
+            <a:off x="685800" y="4343400"/>
+            <a:ext cx="5486400" cy="4114800"/>
+          </a:xfrm>
+          <a:prstGeom prst="rect">
+            <a:avLst/>
+          </a:prstGeom>
+        </p:spPr>
+        <p:txBody>
+          <a:bodyPr/>
+          <a:lstStyle/>
+          <a:p>
+            <a:r>
+              <a:rPr lang="fr-FR" dirty="0"/>
+              <a:t>Slide 3 · Les cinq éléments critiques — 01:05 → 03:00 · Miguel</a:t>
+            </a:r>
+          </a:p>
+          <a:p>
+            <a:r>
+              <a:rPr lang="fr-FR" dirty="0"/>
+              <a:t>Première question : qu'est-ce que nous protégeons ?</a:t>
+            </a:r>
+          </a:p>
+          <a:p>
+            <a:r>
+              <a:rPr lang="fr-FR" dirty="0"/>
+              <a:t>Nous avons cartographié la filiale. Quatre activités. Treize équipements ou logiciels qui les font tourner. Et parmi eux, cinq qui comptent plus que les autres.</a:t>
+            </a:r>
+          </a:p>
+          <a:p>
+            <a:r>
+              <a:rPr lang="fr-FR" dirty="0"/>
+              <a:t>Un mot sur la méthode, parce qu'elle vaut plus que la liste : NOUS AVONS ÉCRIT LE CRITÈRE DE CLASSEMENT AVANT DE CLASSER. Quatre conditions. L'activité qu'il porte est vitale. Si on y touche, ça dépasse la filiale. La faiblesse est connue et réelle aujourd'hui. Et il n'existe pas de remplacement rapide.</a:t>
+            </a:r>
+          </a:p>
+          <a:p>
+            <a:r>
+              <a:rPr lang="fr-FR" dirty="0"/>
+              <a:t>Deux choses ressortent, et ce sont elles que je voudrais que vous reteniez.</a:t>
+            </a:r>
+          </a:p>
+          <a:p>
+            <a:r>
+              <a:rPr lang="fr-FR" dirty="0"/>
+              <a:t>La première, c'est la portée. Ces cinq-là débordent la filiale. Le premier, notre système d'entrepôt, arrête quarante pour cent du volume du groupe. ° Le quatrième, le logiciel des sondes de température, porte à la fois la chaîne du froid et la preuve que nous devons à notre client pharmaceutique.</a:t>
+            </a:r>
+          </a:p>
+          <a:p>
+            <a:r>
+              <a:rPr lang="fr-FR" dirty="0"/>
+              <a:t>La deuxième est plus inhabituelle. [Pause.] Le troisième de cette liste n'est ni un serveur, ni un logiciel. C'est une personne. Notre responsable d'exploitation est le seul à connaître l'organisation des six entrepôts. Rien n'est écrit. C'EST LE SEUL ÉLÉMENT DE CETTE LISTE QU'AUCUN BUDGET NE REMPLACE APRÈS COUP.</a:t>
+            </a:r>
+          </a:p>
+          <a:p>
+            <a:r>
+              <a:rPr lang="fr-FR" dirty="0"/>
+              <a:t>° Et pour vous montrer que ce classement a vraiment été fait : nos trois cents scannettes n'y sont pas, parce qu'elles sont nombreuses, donc remplaçables. Le local serveur non plus : s'il chauffe, on le voit venir.</a:t>
+            </a:r>
+          </a:p>
+          <a:p>
+            <a:r>
+              <a:rPr lang="fr-FR" dirty="0"/>
+              <a:t>Voilà ce que nous protégeons. La question suivante, c'est : est-ce que c'est protégé ?</a:t>
+            </a:r>
+          </a:p>
+        </p:txBody>
+      </p:sp>
+    </p:spTree>
+  </p:cSld>
+  <p:clrMapOvr>
+    <a:masterClrMapping/>
+  </p:clrMapOvr>
+</p:notes>
+</file>
+
+<file path=ppt/notesSlides/notesSlide4.xml><?xml version="1.0" encoding="utf-8"?>
+<p:notes xmlns:a="http://schemas.openxmlformats.org/drawingml/2006/main" xmlns:r="http://schemas.openxmlformats.org/officeDocument/2006/relationships" xmlns:p="http://schemas.openxmlformats.org/presentationml/2006/main">
+  <p:cSld>
+    <p:spTree>
+      <p:nvGrpSpPr>
+        <p:cNvPr id="1" name=""/>
+        <p:cNvGrpSpPr/>
+        <p:nvPr/>
+      </p:nvGrpSpPr>
+      <p:grpSpPr>
+        <a:xfrm>
+          <a:off x="0" y="0"/>
+          <a:ext cx="0" cy="0"/>
+          <a:chOff x="0" y="0"/>
+          <a:chExt cx="0" cy="0"/>
+        </a:xfrm>
+      </p:grpSpPr>
+      <p:sp>
+        <p:nvSpPr>
+          <p:cNvPr id="2" name="Notes Placeholder 1"/>
+          <p:cNvSpPr>
+            <a:spLocks noGrp="1"/>
+          </p:cNvSpPr>
+          <p:nvPr>
+            <p:ph type="body" idx="1"/>
+          </p:nvPr>
+        </p:nvSpPr>
+        <p:spPr>
+          <a:xfrm>
+            <a:off x="685800" y="4343400"/>
+            <a:ext cx="5486400" cy="4114800"/>
+          </a:xfrm>
+          <a:prstGeom prst="rect">
+            <a:avLst/>
+          </a:prstGeom>
+        </p:spPr>
+        <p:txBody>
+          <a:bodyPr/>
+          <a:lstStyle/>
+          <a:p>
+            <a:r>
+              <a:rPr lang="fr-FR" dirty="0"/>
+              <a:t>Slide 4 · Ce que la mesure a donné — 03:00 → 05:00 · Miguel</a:t>
+            </a:r>
+          </a:p>
+          <a:p>
+            <a:r>
+              <a:rPr lang="fr-FR" dirty="0"/>
+              <a:t>Nous l'avons mesuré, pour la première fois, avec le référentiel que vous avez adopté.</a:t>
+            </a:r>
+          </a:p>
+          <a:p>
+            <a:r>
+              <a:rPr lang="fr-FR" dirty="0"/>
+              <a:t>Le résultat tient en une phrase : DES FONDATIONS ÉCRITES, UNE APPLICATION NON PROUVÉE, DES ANGLES MORTS QUE NOUS NOMMONS.</a:t>
+            </a:r>
+          </a:p>
+          <a:p>
+            <a:r>
+              <a:rPr lang="fr-FR" dirty="0"/>
+              <a:t>Sur ce que nous avons regardé, presque rien n'est en place. Je dis bien : sur ce que nous avons regardé. ° Jamais « nous sommes conformes à neuf pour cent » — la différence compte devant un client, et la seconde formule se retournerait contre nous au premier contrôle.</a:t>
+            </a:r>
+          </a:p>
+          <a:p>
+            <a:r>
+              <a:rPr lang="fr-FR" dirty="0"/>
+              <a:t>Mais le vrai message de cette page n'est pas ce chiffre. [Pause. Désigner la ligne.] Regardez la troisième ligne. Le domaine physique : zéro exigence examinée sur quatorze. Zéro. Alors que nous exploitons six entrepôts, des chambres froides, et un seul local serveur.</a:t>
+            </a:r>
+          </a:p>
+          <a:p>
+            <a:r>
+              <a:rPr lang="fr-FR" dirty="0"/>
+              <a:t>Ce n'est pas un mauvais résultat. C'est un trou dans notre propre évaluation. Et il n'apparaît que parce que nous avons détaillé domaine par domaine. Le total seul le cachait.</a:t>
+            </a:r>
+          </a:p>
+          <a:p>
+            <a:r>
+              <a:rPr lang="fr-FR" dirty="0"/>
+              <a:t>Deuxième chose : les deux problèmes les plus graves touchent le même système. Celui de la page précédente, le premier de la liste. D'un côté, le réseau de bureau et le réseau des machines ne sont pas séparés. De l'autre, un compte d'administration est partagé avec notre prestataire, et nous ne savons pas combien de personnes s'en servent.</a:t>
+            </a:r>
+          </a:p>
+          <a:p>
+            <a:r>
+              <a:rPr lang="fr-FR" dirty="0"/>
+              <a:t>Enfin, la limite, et je préfère la dire moi-même : cette mesure, c'est nous qui l'avons faite. Il lui manque l'indépendance. Notre rapport l'écrit en première page.</a:t>
+            </a:r>
+          </a:p>
+          <a:p>
+            <a:r>
+              <a:rPr lang="fr-FR" dirty="0"/>
+              <a:t>[Passage de parole.] Maxime prend la suite : contre qui ?</a:t>
+            </a:r>
+          </a:p>
+        </p:txBody>
+      </p:sp>
+    </p:spTree>
+  </p:cSld>
+  <p:clrMapOvr>
+    <a:masterClrMapping/>
+  </p:clrMapOvr>
+</p:notes>
+</file>
+
+<file path=ppt/notesSlides/notesSlide5.xml><?xml version="1.0" encoding="utf-8"?>
+<p:notes xmlns:a="http://schemas.openxmlformats.org/drawingml/2006/main" xmlns:r="http://schemas.openxmlformats.org/officeDocument/2006/relationships" xmlns:p="http://schemas.openxmlformats.org/presentationml/2006/main">
+  <p:cSld>
+    <p:spTree>
+      <p:nvGrpSpPr>
+        <p:cNvPr id="1" name=""/>
+        <p:cNvGrpSpPr/>
+        <p:nvPr/>
+      </p:nvGrpSpPr>
+      <p:grpSpPr>
+        <a:xfrm>
+          <a:off x="0" y="0"/>
+          <a:ext cx="0" cy="0"/>
+          <a:chOff x="0" y="0"/>
+          <a:chExt cx="0" cy="0"/>
+        </a:xfrm>
+      </p:grpSpPr>
+      <p:sp>
+        <p:nvSpPr>
+          <p:cNvPr id="2" name="Notes Placeholder 1"/>
+          <p:cNvSpPr>
+            <a:spLocks noGrp="1"/>
+          </p:cNvSpPr>
+          <p:nvPr>
+            <p:ph type="body" idx="1"/>
+          </p:nvPr>
+        </p:nvSpPr>
+        <p:spPr>
+          <a:xfrm>
+            <a:off x="685800" y="4343400"/>
+            <a:ext cx="5486400" cy="4114800"/>
+          </a:xfrm>
+          <a:prstGeom prst="rect">
+            <a:avLst/>
+          </a:prstGeom>
+        </p:spPr>
+        <p:txBody>
+          <a:bodyPr/>
+          <a:lstStyle/>
+          <a:p>
+            <a:r>
+              <a:rPr lang="fr-FR" dirty="0"/>
+              <a:t>Slide 5 · Trois acteurs, trois cibles — 05:00 → 06:30 · Maxime</a:t>
+            </a:r>
+          </a:p>
+          <a:p>
+            <a:r>
+              <a:rPr lang="fr-FR" dirty="0"/>
+              <a:t>Maxime. Je porte les risques, les partenaires et le périmètre.</a:t>
+            </a:r>
+          </a:p>
+          <a:p>
+            <a:r>
+              <a:rPr lang="fr-FR" dirty="0"/>
+              <a:t>Nous avons examiné cinq profils d'attaquants. Nous en retenons trois. ° Les deux écartés le sont avec un motif écrit — c'est un choix de méthode, pas un oubli.</a:t>
+            </a:r>
+          </a:p>
+          <a:p>
+            <a:r>
+              <a:rPr lang="fr-FR" dirty="0"/>
+              <a:t>Le premier : un groupe criminel organisé. Il chiffre notre système d'entrepôt, l'expédition s'arrête, il demande une rançon.</a:t>
+            </a:r>
+          </a:p>
+          <a:p>
+            <a:r>
+              <a:rPr lang="fr-FR" dirty="0"/>
+              <a:t>Le deuxième : quelqu'un de chez nous. Un salarié mécontent, ou sur le départ. Il fausse les données de préparation, et il emporte le savoir-faire des six sites — celui dont Miguel vient de dire qu'il n'est écrit nulle part. C'EST LE SEUL DES TROIS QUI N'A BESOIN DE FORCER AUCUNE PORTE.</a:t>
+            </a:r>
+          </a:p>
+          <a:p>
+            <a:r>
+              <a:rPr lang="fr-FR" dirty="0"/>
+              <a:t>Le troisième : un concurrent, qui capte nos données d'exploitation et celles de notre client pharmaceutique.</a:t>
+            </a:r>
+          </a:p>
+          <a:p>
+            <a:r>
+              <a:rPr lang="fr-FR" dirty="0"/>
+              <a:t>Ce qui compte ici, ce n'est pas la liste. C'est que chacun de ces trois vise l'un des cinq éléments de la page précédente. Une analyse qui les ignorerait décrirait une autre entreprise que la nôtre.</a:t>
+            </a:r>
+          </a:p>
+          <a:p>
+            <a:r>
+              <a:rPr lang="fr-FR" dirty="0"/>
+              <a:t>Il y a un quatrième acteur. Je le garde pour dans deux minutes, parce qu'il n'entre pas par la même porte.</a:t>
+            </a:r>
+          </a:p>
+        </p:txBody>
+      </p:sp>
+    </p:spTree>
+  </p:cSld>
+  <p:clrMapOvr>
+    <a:masterClrMapping/>
+  </p:clrMapOvr>
+</p:notes>
+</file>
+
+<file path=ppt/notesSlides/notesSlide6.xml><?xml version="1.0" encoding="utf-8"?>
+<p:notes xmlns:a="http://schemas.openxmlformats.org/drawingml/2006/main" xmlns:r="http://schemas.openxmlformats.org/officeDocument/2006/relationships" xmlns:p="http://schemas.openxmlformats.org/presentationml/2006/main">
+  <p:cSld>
+    <p:spTree>
+      <p:nvGrpSpPr>
+        <p:cNvPr id="1" name=""/>
+        <p:cNvGrpSpPr/>
+        <p:nvPr/>
+      </p:nvGrpSpPr>
+      <p:grpSpPr>
+        <a:xfrm>
+          <a:off x="0" y="0"/>
+          <a:ext cx="0" cy="0"/>
+          <a:chOff x="0" y="0"/>
+          <a:chExt cx="0" cy="0"/>
+        </a:xfrm>
+      </p:grpSpPr>
+      <p:sp>
+        <p:nvSpPr>
+          <p:cNvPr id="2" name="Notes Placeholder 1"/>
+          <p:cNvSpPr>
+            <a:spLocks noGrp="1"/>
+          </p:cNvSpPr>
+          <p:nvPr>
+            <p:ph type="body" idx="1"/>
+          </p:nvPr>
+        </p:nvSpPr>
+        <p:spPr>
+          <a:xfrm>
+            <a:off x="685800" y="4343400"/>
+            <a:ext cx="5486400" cy="4114800"/>
+          </a:xfrm>
+          <a:prstGeom prst="rect">
+            <a:avLst/>
+          </a:prstGeom>
+        </p:spPr>
+        <p:txBody>
+          <a:bodyPr/>
+          <a:lstStyle/>
+          <a:p>
+            <a:r>
+              <a:rPr lang="fr-FR" dirty="0"/>
+              <a:t>Slide 6 · L'événement le plus grave — 06:30 → 08:00 · Maxime (pas de coupe)</a:t>
+            </a:r>
+          </a:p>
+          <a:p>
+            <a:r>
+              <a:rPr lang="fr-FR" dirty="0"/>
+              <a:t>Parmi tout cela, un événement se détache : l'arrêt non prévu de l'expédition au-delà de six heures.</a:t>
+            </a:r>
+          </a:p>
+          <a:p>
+            <a:r>
+              <a:rPr lang="fr-FR" dirty="0"/>
+              <a:t>Qu'il soit grave, vous le savez déjà : quarante pour cent du volume du groupe, douze mille euros par jour. Ce n'est pas ce que je viens vous dire. Je viens vous dire qu'il est CRÉDIBLE. Trois faits.</a:t>
+            </a:r>
+          </a:p>
+          <a:p>
+            <a:r>
+              <a:rPr lang="fr-FR" dirty="0"/>
+              <a:t>Un : le système est sur un seul site, sans secours.</a:t>
+            </a:r>
+          </a:p>
+          <a:p>
+            <a:r>
+              <a:rPr lang="fr-FR" dirty="0"/>
+              <a:t>Deux : nos sauvegardes tournent tous les jours, et elles n'ont jamais été restaurées. Pas une seule fois depuis la mise en service. Nous ne savons donc pas si elles fonctionnent.</a:t>
+            </a:r>
+          </a:p>
+          <a:p>
+            <a:r>
+              <a:rPr lang="fr-FR" dirty="0"/>
+              <a:t>Trois. [Pause.] C'est déjà arrivé. En avril. Le système s'est arrêté. Trois chefs d'entrepôt ont appelé le prestataire, deux ont appelé l'intégrateur, un a appelé le responsable informatique, qui était en congé. Et personne n'a noté l'heure.</a:t>
+            </a:r>
+          </a:p>
+          <a:p>
+            <a:r>
+              <a:rPr lang="fr-FR" dirty="0"/>
+              <a:t>Résultat : aujourd'hui, je ne peux pas vous dire combien de temps il nous faudrait pour repartir. C'est exactement ce que la première mesure de notre plan va mesurer, au 14 novembre.</a:t>
+            </a:r>
+          </a:p>
+          <a:p>
+            <a:r>
+              <a:rPr lang="fr-FR" dirty="0"/>
+              <a:t>Et il y a une porte d'entrée que nous n'avions pas vue en premier.</a:t>
+            </a:r>
+          </a:p>
+        </p:txBody>
+      </p:sp>
+    </p:spTree>
+  </p:cSld>
+  <p:clrMapOvr>
+    <a:masterClrMapping/>
+  </p:clrMapOvr>
+</p:notes>
+</file>
+
+<file path=ppt/notesSlides/notesSlide7.xml><?xml version="1.0" encoding="utf-8"?>
+<p:notes xmlns:a="http://schemas.openxmlformats.org/drawingml/2006/main" xmlns:r="http://schemas.openxmlformats.org/officeDocument/2006/relationships" xmlns:p="http://schemas.openxmlformats.org/presentationml/2006/main">
+  <p:cSld>
+    <p:spTree>
+      <p:nvGrpSpPr>
+        <p:cNvPr id="1" name=""/>
+        <p:cNvGrpSpPr/>
+        <p:nvPr/>
+      </p:nvGrpSpPr>
+      <p:grpSpPr>
+        <a:xfrm>
+          <a:off x="0" y="0"/>
+          <a:ext cx="0" cy="0"/>
+          <a:chOff x="0" y="0"/>
+          <a:chExt cx="0" cy="0"/>
+        </a:xfrm>
+      </p:grpSpPr>
+      <p:sp>
+        <p:nvSpPr>
+          <p:cNvPr id="2" name="Notes Placeholder 1"/>
+          <p:cNvSpPr>
+            <a:spLocks noGrp="1"/>
+          </p:cNvSpPr>
+          <p:nvPr>
+            <p:ph type="body" idx="1"/>
+          </p:nvPr>
+        </p:nvSpPr>
+        <p:spPr>
+          <a:xfrm>
+            <a:off x="685800" y="4343400"/>
+            <a:ext cx="5486400" cy="4114800"/>
+          </a:xfrm>
+          <a:prstGeom prst="rect">
+            <a:avLst/>
+          </a:prstGeom>
+        </p:spPr>
+        <p:txBody>
+          <a:bodyPr/>
+          <a:lstStyle/>
+          <a:p>
+            <a:r>
+              <a:rPr lang="fr-FR" dirty="0"/>
+              <a:t>Slide 7 · Le risque entre par le contrat — 08:00 → 09:45 · Maxime</a:t>
+            </a:r>
+          </a:p>
+          <a:p>
+            <a:r>
+              <a:rPr lang="fr-FR" dirty="0"/>
+              <a:t>Nous avons noté nos cinq partenaires sur deux choses : à quel point nous dépendons d'eux, et à quel point nous les maîtrisons. LE SEUIL A ÉTÉ FIXÉ AVANT LA NOTATION. Deux le dépassent.</a:t>
+            </a:r>
+          </a:p>
+          <a:p>
+            <a:r>
+              <a:rPr lang="fr-FR" dirty="0"/>
+              <a:t>L'intégrateur de nos machines de tri, tout en haut. Il se connecte en permanence à nos automates, par une liaison mobile qui ne passe pas par notre réseau surveillé. Son contrat ne contient aucune exigence de sécurité. Aucune.</a:t>
+            </a:r>
+          </a:p>
+          <a:p>
+            <a:r>
+              <a:rPr lang="fr-FR" dirty="0"/>
+              <a:t>Le prestataire qui maintient notre système d'entrepôt, juste en dessous. Il intervient avec un compte partagé, et nous ne savons pas combien de personnes s'en servent.</a:t>
+            </a:r>
+          </a:p>
+          <a:p>
+            <a:r>
+              <a:rPr lang="fr-FR" dirty="0"/>
+              <a:t>° Ce ne sont pas nos plus gros fournisseurs. Ce sont ceux dont nous dépendons le plus et que nous maîtrisons le moins.</a:t>
+            </a:r>
+          </a:p>
+          <a:p>
+            <a:r>
+              <a:rPr lang="fr-FR" dirty="0"/>
+              <a:t>Voilà pourquoi le scénario que nous jugeons le plus grave n'est pas quelqu'un qui force notre porte. C'est quelqu'un qui entre par celle de notre prestataire — une porte que nous lui avons ouverte par contrat.</a:t>
+            </a:r>
+          </a:p>
+          <a:p>
+            <a:r>
+              <a:rPr lang="fr-FR" dirty="0"/>
+              <a:t>En 2017, un transporteur européen s'est retrouvé exactement là. Il n'était pas visé. Il n'a pas été piraté. Il a installé, de bonne foi, la mise à jour d'un fournisseur compromis. Deux cent cinquante à trois cents millions de dollars, en un trimestre.</a:t>
+            </a:r>
+          </a:p>
+          <a:p>
+            <a:r>
+              <a:rPr lang="fr-FR" dirty="0"/>
+              <a:t>Je le résume comme ça : CHEZ NOUS, LE POINT D'ENTRÉE EST SIGNÉ, IL N'EST PAS PIRATÉ.</a:t>
+            </a:r>
+          </a:p>
+          <a:p>
+            <a:r>
+              <a:rPr lang="fr-FR" dirty="0"/>
+              <a:t>Et un risque qui entre par un contrat se traite par un contrat.</a:t>
+            </a:r>
+          </a:p>
+        </p:txBody>
+      </p:sp>
+    </p:spTree>
+  </p:cSld>
+  <p:clrMapOvr>
+    <a:masterClrMapping/>
+  </p:clrMapOvr>
+</p:notes>
+</file>
+
+<file path=ppt/notesSlides/notesSlide8.xml><?xml version="1.0" encoding="utf-8"?>
+<p:notes xmlns:a="http://schemas.openxmlformats.org/drawingml/2006/main" xmlns:r="http://schemas.openxmlformats.org/officeDocument/2006/relationships" xmlns:p="http://schemas.openxmlformats.org/presentationml/2006/main">
+  <p:cSld>
+    <p:spTree>
+      <p:nvGrpSpPr>
+        <p:cNvPr id="1" name=""/>
+        <p:cNvGrpSpPr/>
+        <p:nvPr/>
+      </p:nvGrpSpPr>
+      <p:grpSpPr>
+        <a:xfrm>
+          <a:off x="0" y="0"/>
+          <a:ext cx="0" cy="0"/>
+          <a:chOff x="0" y="0"/>
+          <a:chExt cx="0" cy="0"/>
+        </a:xfrm>
+      </p:grpSpPr>
+      <p:sp>
+        <p:nvSpPr>
+          <p:cNvPr id="2" name="Notes Placeholder 1"/>
+          <p:cNvSpPr>
+            <a:spLocks noGrp="1"/>
+          </p:cNvSpPr>
+          <p:nvPr>
+            <p:ph type="body" idx="1"/>
+          </p:nvPr>
+        </p:nvSpPr>
+        <p:spPr>
+          <a:xfrm>
+            <a:off x="685800" y="4343400"/>
+            <a:ext cx="5486400" cy="4114800"/>
+          </a:xfrm>
+          <a:prstGeom prst="rect">
+            <a:avLst/>
+          </a:prstGeom>
+        </p:spPr>
+        <p:txBody>
+          <a:bodyPr/>
+          <a:lstStyle/>
+          <a:p>
+            <a:r>
+              <a:rPr lang="fr-FR" dirty="0"/>
+              <a:t>Slide 8 · La règle que nous adoptons — 09:45 → 10:35 · Maxime</a:t>
+            </a:r>
+          </a:p>
+          <a:p>
+            <a:r>
+              <a:rPr lang="fr-FR" dirty="0"/>
+              <a:t>Voici donc la règle que nous vous proposons.</a:t>
+            </a:r>
+          </a:p>
+          <a:p>
+            <a:r>
+              <a:rPr lang="fr-FR" dirty="0"/>
+              <a:t>Aucun contrat donnant accès à l'un de nos cinq éléments critiques n'est signé ni renouvelé sans trois exigences. Savoir qui a fait quoi, nom par nom. Être prévenus en vingt-quatre heures si le prestataire est attaqué. Et pouvoir partir.</a:t>
+            </a:r>
+          </a:p>
+          <a:p>
+            <a:r>
+              <a:rPr lang="fr-FR" dirty="0"/>
+              <a:t>Elles ne coûtent rien la première année : ce sont des conditions de signature, pas des achats. C'est la direction juridique qui les oppose, avant signature.</a:t>
+            </a:r>
+          </a:p>
+          <a:p>
+            <a:r>
+              <a:rPr lang="fr-FR" dirty="0"/>
+              <a:t>Premier cas d'application : le contrat de maintenance de notre système d'entrepôt. IL ARRIVE À RENOUVELLEMENT EN NOVEMBRE, ET IL N'EN CONTIENT AUJOURD'HUI AUCUNE DES TROIS.</a:t>
+            </a:r>
+          </a:p>
+          <a:p>
+            <a:r>
+              <a:rPr lang="fr-FR" dirty="0"/>
+              <a:t>° Nous appliquons la même logique en amont des projets : six étapes de sécurité, chacune avec un critère vérifiable. Premier projet à y passer, la reprise du flux vers MERIDIAN Santé, bloqué depuis trois mois.</a:t>
+            </a:r>
+          </a:p>
+          <a:p>
+            <a:r>
+              <a:rPr lang="fr-FR" dirty="0"/>
+              <a:t>[Passage de parole.]</a:t>
+            </a:r>
+          </a:p>
+        </p:txBody>
+      </p:sp>
+    </p:spTree>
+  </p:cSld>
+  <p:clrMapOvr>
+    <a:masterClrMapping/>
+  </p:clrMapOvr>
+</p:notes>
+</file>
+
+<file path=ppt/notesSlides/notesSlide9.xml><?xml version="1.0" encoding="utf-8"?>
+<p:notes xmlns:a="http://schemas.openxmlformats.org/drawingml/2006/main" xmlns:r="http://schemas.openxmlformats.org/officeDocument/2006/relationships" xmlns:p="http://schemas.openxmlformats.org/presentationml/2006/main">
+  <p:cSld>
+    <p:spTree>
+      <p:nvGrpSpPr>
+        <p:cNvPr id="1" name=""/>
+        <p:cNvGrpSpPr/>
+        <p:nvPr/>
+      </p:nvGrpSpPr>
+      <p:grpSpPr>
+        <a:xfrm>
+          <a:off x="0" y="0"/>
+          <a:ext cx="0" cy="0"/>
+          <a:chOff x="0" y="0"/>
+          <a:chExt cx="0" cy="0"/>
+        </a:xfrm>
+      </p:grpSpPr>
+      <p:sp>
+        <p:nvSpPr>
+          <p:cNvPr id="2" name="Notes Placeholder 1"/>
+          <p:cNvSpPr>
+            <a:spLocks noGrp="1"/>
+          </p:cNvSpPr>
+          <p:nvPr>
+            <p:ph type="body" idx="1"/>
+          </p:nvPr>
+        </p:nvSpPr>
+        <p:spPr>
+          <a:xfrm>
+            <a:off x="685800" y="4343400"/>
+            <a:ext cx="5486400" cy="4114800"/>
+          </a:xfrm>
+          <a:prstGeom prst="rect">
+            <a:avLst/>
+          </a:prstGeom>
+        </p:spPr>
+        <p:txBody>
+          <a:bodyPr/>
+          <a:lstStyle/>
+          <a:p>
+            <a:r>
+              <a:rPr lang="fr-FR" dirty="0"/>
+              <a:t>Slide 9 · Le registre après traitement — 10:35 → 11:50 · Miguel</a:t>
+            </a:r>
+          </a:p>
+          <a:p>
+            <a:r>
+              <a:rPr lang="fr-FR" dirty="0"/>
+              <a:t>Miguel. Je reprends pour le plan et le budget.</a:t>
+            </a:r>
+          </a:p>
+          <a:p>
+            <a:r>
+              <a:rPr lang="fr-FR" dirty="0"/>
+              <a:t>Voici où nous en sommes après traitement. Huit risques au registre. Avant : trois au rouge. Après : plus aucun.</a:t>
+            </a:r>
+          </a:p>
+          <a:p>
+            <a:r>
+              <a:rPr lang="fr-FR" dirty="0"/>
+              <a:t>Cela suppose une règle que nous vous demandons de confirmer, et je la dis simplement. Un risque élevé : inacceptable, on le traite avant toute mise en service. Un risque moyen : toléré, mais daté, surveillé, et confié à quelqu'un de nommé. Un risque faible : accepté tel quel.</a:t>
+            </a:r>
+          </a:p>
+          <a:p>
+            <a:r>
+              <a:rPr lang="fr-FR" dirty="0"/>
+              <a:t>Maintenant, l'honnêteté. [Pause.] NOUS NE FERMONS AUCUN RISQUE. Aucun ne disparaît. Ils passent d'inacceptable à toléré-formalisé. Ce n'est pas la même chose, et nous ne le maquillons pas.</a:t>
+            </a:r>
+          </a:p>
+          <a:p>
+            <a:r>
+              <a:rPr lang="fr-FR" dirty="0"/>
+              <a:t>Sept fiches d'acceptation sont à signer. Et nous ne vous demandons aucune dérogation. C'est une position, pas un détail.</a:t>
+            </a:r>
+          </a:p>
+          <a:p>
+            <a:r>
+              <a:rPr lang="fr-FR" dirty="0"/>
+              <a:t>° Un exemple, pour vous montrer que la règle est vraiment appliquée. Sur la chaîne du froid, le risque ne baisse pas, alors que nous prenons une mesure. Parce que cette mesure est une surveillance, pas une correction. On ne baisse pas un niveau parce qu'on a agi ; on le baisse parce que la cause a changé.</a:t>
+            </a:r>
+          </a:p>
+        </p:txBody>
+      </p:sp>
+    </p:spTree>
+  </p:cSld>
+  <p:clrMapOvr>
+    <a:masterClrMapping/>
+  </p:clrMapOvr>
+</p:notes>
+</file>
+
 <file path=ppt/slideLayouts/slideLayout1.xml><?xml version="1.0" encoding="utf-8"?>
 <p:sldLayout xmlns:a="http://schemas.openxmlformats.org/drawingml/2006/main" xmlns:r="http://schemas.openxmlformats.org/officeDocument/2006/relationships" xmlns:p="http://schemas.openxmlformats.org/presentationml/2006/main" type="title">
   <p:cSld name="Title Slide">
@@ -4274,7 +6028,7 @@
     </p:spTree>
     <p:extLst>
       <p:ext uri="{BB962C8B-B14F-4D97-AF65-F5344CB8AC3E}">
-        <p14:creationId xmlns:p14="http://schemas.microsoft.com/office/powerpoint/2010/main" val="1283031506"/>
+        <p14:creationId xmlns:p14="http://schemas.microsoft.com/office/powerpoint/2010/main" val="2051767"/>
       </p:ext>
     </p:extLst>
   </p:cSld>
@@ -4829,7 +6583,27 @@
                 <a:latin typeface="Segoe UI"/>
                 <a:cs typeface="Segoe UI"/>
               </a:rPr>
-              <a:t>dont DEUX transversales, qui traitent plusieurs scénarios à la fois</a:t>
+              <a:t>dont </a:t>
+            </a:r>
+            <a:r>
+              <a:rPr lang="en-GB" sz="1600" b="1">
+                <a:solidFill>
+                  <a:srgbClr val="1A1A1A"/>
+                </a:solidFill>
+                <a:latin typeface="Segoe UI"/>
+                <a:cs typeface="Segoe UI"/>
+              </a:rPr>
+              <a:t>deux</a:t>
+            </a:r>
+            <a:r>
+              <a:rPr lang="en-GB" sz="1600">
+                <a:solidFill>
+                  <a:srgbClr val="1A1A1A"/>
+                </a:solidFill>
+                <a:latin typeface="Segoe UI"/>
+                <a:cs typeface="Segoe UI"/>
+              </a:rPr>
+              <a:t> transversales, qui traitent plusieurs scénarios à la fois</a:t>
             </a:r>
             <a:endParaRPr lang="en-FR" sz="1600">
               <a:solidFill>
@@ -5097,7 +6871,7 @@
     </p:spTree>
     <p:extLst>
       <p:ext uri="{BB962C8B-B14F-4D97-AF65-F5344CB8AC3E}">
-        <p14:creationId xmlns:p14="http://schemas.microsoft.com/office/powerpoint/2010/main" val="2964407473"/>
+        <p14:creationId xmlns:p14="http://schemas.microsoft.com/office/powerpoint/2010/main" val="1160454889"/>
       </p:ext>
     </p:extLst>
   </p:cSld>
@@ -5919,7 +7693,7 @@
     </p:spTree>
     <p:extLst>
       <p:ext uri="{BB962C8B-B14F-4D97-AF65-F5344CB8AC3E}">
-        <p14:creationId xmlns:p14="http://schemas.microsoft.com/office/powerpoint/2010/main" val="4246274019"/>
+        <p14:creationId xmlns:p14="http://schemas.microsoft.com/office/powerpoint/2010/main" val="1377716115"/>
       </p:ext>
     </p:extLst>
   </p:cSld>
@@ -6807,7 +8581,7 @@
     </p:spTree>
     <p:extLst>
       <p:ext uri="{BB962C8B-B14F-4D97-AF65-F5344CB8AC3E}">
-        <p14:creationId xmlns:p14="http://schemas.microsoft.com/office/powerpoint/2010/main" val="1792801939"/>
+        <p14:creationId xmlns:p14="http://schemas.microsoft.com/office/powerpoint/2010/main" val="3759228815"/>
       </p:ext>
     </p:extLst>
   </p:cSld>
@@ -7233,8 +9007,32 @@
                 <a:latin typeface="Segoe UI"/>
                 <a:cs typeface="Segoe UI"/>
               </a:rPr>
-              <a:t>chaîne du froid + flux d'entrepôt des sites E1 et E4
-HORS automatisation d'E4, jusqu'au 14 juin 2027</a:t>
+              <a:t>chaîne du froid + flux d'entrepôt des sites E1 et E4</a:t>
+            </a:r>
+            <a:br>
+              <a:rPr lang="en-GB" sz="1700">
+                <a:latin typeface="Segoe UI"/>
+              </a:rPr>
+            </a:br>
+            <a:r>
+              <a:rPr lang="en-GB" sz="1700" b="1">
+                <a:solidFill>
+                  <a:srgbClr val="3C3C3C"/>
+                </a:solidFill>
+                <a:latin typeface="Segoe UI"/>
+                <a:cs typeface="Segoe UI"/>
+              </a:rPr>
+              <a:t>hors</a:t>
+            </a:r>
+            <a:r>
+              <a:rPr lang="en-GB" sz="1700">
+                <a:solidFill>
+                  <a:srgbClr val="3C3C3C"/>
+                </a:solidFill>
+                <a:latin typeface="Segoe UI"/>
+                <a:cs typeface="Segoe UI"/>
+              </a:rPr>
+              <a:t> automatisation d'E4, jusqu'au 14 juin 2027</a:t>
             </a:r>
             <a:endParaRPr lang="en-FR" sz="1700">
               <a:solidFill>
@@ -7283,8 +9081,42 @@
                 <a:latin typeface="Segoe UI"/>
                 <a:cs typeface="Segoe UI"/>
               </a:rPr>
-              <a:t>Pourquoi : E4 est à la fois dédié à ce client ET porteur d'automates sur un réseau non séparé.
-Certifier large aujourd'hui reviendrait à certifier ce défaut.</a:t>
+              <a:t>Pourquoi : E4 est à la fois dédié à ce client </a:t>
+            </a:r>
+            <a:r>
+              <a:rPr lang="en-GB" b="1">
+                <a:solidFill>
+                  <a:srgbClr val="1A1A1A"/>
+                </a:solidFill>
+                <a:latin typeface="Segoe UI"/>
+                <a:cs typeface="Segoe UI"/>
+              </a:rPr>
+              <a:t>et</a:t>
+            </a:r>
+            <a:r>
+              <a:rPr lang="en-GB">
+                <a:solidFill>
+                  <a:srgbClr val="1A1A1A"/>
+                </a:solidFill>
+                <a:latin typeface="Segoe UI"/>
+                <a:cs typeface="Segoe UI"/>
+              </a:rPr>
+              <a:t> porteur d'automates sur un réseau non séparé.</a:t>
+            </a:r>
+            <a:br>
+              <a:rPr lang="en-GB">
+                <a:latin typeface="Segoe UI"/>
+              </a:rPr>
+            </a:br>
+            <a:r>
+              <a:rPr lang="en-GB">
+                <a:solidFill>
+                  <a:srgbClr val="1A1A1A"/>
+                </a:solidFill>
+                <a:latin typeface="Segoe UI"/>
+                <a:cs typeface="Segoe UI"/>
+              </a:rPr>
+              <a:t>Certifier large aujourd'hui reviendrait à certifier ce défaut.</a:t>
             </a:r>
             <a:endParaRPr lang="en-FR">
               <a:solidFill>
@@ -7364,8 +9196,8 @@
         </p:nvSpPr>
         <p:spPr>
           <a:xfrm>
-            <a:off x="914400" y="4978400"/>
-            <a:ext cx="5080000" cy="330200"/>
+            <a:off x="914400" y="4927600"/>
+            <a:ext cx="10414000" cy="330200"/>
           </a:xfrm>
           <a:prstGeom prst="rect">
             <a:avLst/>
@@ -7373,14 +9205,14 @@
           <a:noFill/>
         </p:spPr>
         <p:txBody>
-          <a:bodyPr vertOverflow="overflow" vert="horz" wrap="square" rtlCol="0" anchor="t">
-            <a:noAutofit/>
-          </a:bodyPr>
-          <a:lstStyle/>
-          <a:p>
-            <a:pPr algn="l"/>
-            <a:r>
-              <a:rPr lang="en-GB" b="1">
+          <a:bodyPr vertOverflow="overflow" vert="horz" wrap="none" rtlCol="0" anchor="t">
+            <a:noAutofit/>
+          </a:bodyPr>
+          <a:lstStyle/>
+          <a:p>
+            <a:pPr algn="l"/>
+            <a:r>
+              <a:rPr lang="fr-FR" b="1" dirty="0">
                 <a:solidFill>
                   <a:srgbClr val="1F4E79"/>
                 </a:solidFill>
@@ -7389,13 +9221,16 @@
               </a:rPr>
               <a:t>COMMENT VOUS LE SAUREZ</a:t>
             </a:r>
-            <a:endParaRPr lang="en-FR" b="1">
-              <a:solidFill>
-                <a:srgbClr val="1F4E79"/>
-              </a:solidFill>
-              <a:latin typeface="Segoe UI"/>
-              <a:cs typeface="Segoe UI"/>
-            </a:endParaRPr>
+            <a:r>
+              <a:rPr lang="fr-FR" sz="1400" dirty="0">
+                <a:solidFill>
+                  <a:srgbClr val="3C3C3C"/>
+                </a:solidFill>
+                <a:latin typeface="Segoe UI"/>
+                <a:cs typeface="Segoe UI"/>
+              </a:rPr>
+              <a:t>   7 indicateurs · point trimestriel au comité · revue annuelle de la politique</a:t>
+            </a:r>
           </a:p>
         </p:txBody>
       </p:sp>
@@ -7413,8 +9248,8 @@
         </p:nvSpPr>
         <p:spPr>
           <a:xfrm>
-            <a:off x="914400" y="5334000"/>
-            <a:ext cx="10414000" cy="711200"/>
+            <a:off x="914400" y="5283200"/>
+            <a:ext cx="10414000" cy="1016000"/>
           </a:xfrm>
           <a:prstGeom prst="rect">
             <a:avLst/>
@@ -7469,8 +9304,8 @@
         </p:nvSpPr>
         <p:spPr>
           <a:xfrm>
-            <a:off x="1219200" y="5461000"/>
-            <a:ext cx="9804400" cy="609600"/>
+            <a:off x="1219200" y="5372100"/>
+            <a:ext cx="9804400" cy="838200"/>
           </a:xfrm>
           <a:prstGeom prst="rect">
             <a:avLst/>
@@ -7483,32 +9318,105 @@
           </a:bodyPr>
           <a:lstStyle/>
           <a:p>
-            <a:pPr algn="l"/>
-            <a:r>
-              <a:rPr lang="en-GB" sz="1700" i="1">
+            <a:pPr algn="l">
+              <a:lnSpc>
+                <a:spcPts val="2000"/>
+              </a:lnSpc>
+              <a:buNone/>
+            </a:pPr>
+            <a:r>
+              <a:rPr lang="fr-FR" sz="1500" b="1" dirty="0">
+                <a:solidFill>
+                  <a:srgbClr val="1A1A1A"/>
+                </a:solidFill>
+                <a:latin typeface="Segoe UI"/>
+                <a:cs typeface="Segoe UI"/>
+              </a:rPr>
+              <a:t>Séparation des réseaux recettée</a:t>
+            </a:r>
+            <a:r>
+              <a:rPr lang="fr-FR" sz="1500" dirty="0">
                 <a:solidFill>
                   <a:srgbClr val="3C3C3C"/>
                 </a:solidFill>
                 <a:latin typeface="Segoe UI"/>
                 <a:cs typeface="Segoe UI"/>
               </a:rPr>
-              <a:t>[ à compléter avec D9 — séance 9 ] 5 à 8 indicateurs · les deux ou trois qui parlent au comité
-point trimestriel du responsable sécurité · revue au moins annuelle</a:t>
-            </a:r>
-            <a:endParaRPr lang="en-FR" sz="1700" i="1">
-              <a:solidFill>
-                <a:srgbClr val="3C3C3C"/>
-              </a:solidFill>
-              <a:latin typeface="Segoe UI"/>
-              <a:cs typeface="Segoe UI"/>
-            </a:endParaRPr>
+              <a:t>   —   0 sur 6 entrepôts</a:t>
+            </a:r>
+            <a:r>
+              <a:rPr lang="fr-FR" sz="1500" dirty="0">
+                <a:solidFill>
+                  <a:srgbClr val="1F4E79"/>
+                </a:solidFill>
+                <a:latin typeface="Segoe UI"/>
+                <a:cs typeface="Segoe UI"/>
+              </a:rPr>
+              <a:t>   ← c'est lui qui lève l'exclusion d'E4</a:t>
+            </a:r>
+          </a:p>
+          <a:p>
+            <a:pPr algn="l">
+              <a:lnSpc>
+                <a:spcPts val="2000"/>
+              </a:lnSpc>
+              <a:buNone/>
+            </a:pPr>
+            <a:r>
+              <a:rPr lang="fr-FR" sz="1500" b="1" dirty="0">
+                <a:solidFill>
+                  <a:srgbClr val="1A1A1A"/>
+                </a:solidFill>
+                <a:latin typeface="Segoe UI"/>
+                <a:cs typeface="Segoe UI"/>
+              </a:rPr>
+              <a:t>Restaurations du WMS testées</a:t>
+            </a:r>
+            <a:r>
+              <a:rPr lang="fr-FR" sz="1500" dirty="0">
+                <a:solidFill>
+                  <a:srgbClr val="3C3C3C"/>
+                </a:solidFill>
+                <a:latin typeface="Segoe UI"/>
+                <a:cs typeface="Segoe UI"/>
+              </a:rPr>
+              <a:t>   —   0 sur 12 mois</a:t>
+            </a:r>
+          </a:p>
+          <a:p>
+            <a:pPr algn="l">
+              <a:lnSpc>
+                <a:spcPts val="2000"/>
+              </a:lnSpc>
+              <a:buNone/>
+            </a:pPr>
+            <a:r>
+              <a:rPr lang="fr-FR" sz="1500" b="1" dirty="0">
+                <a:solidFill>
+                  <a:srgbClr val="1A1A1A"/>
+                </a:solidFill>
+                <a:latin typeface="Segoe UI"/>
+                <a:cs typeface="Segoe UI"/>
+              </a:rPr>
+              <a:t>Accès du prestataire nominatifs</a:t>
+            </a:r>
+            <a:r>
+              <a:rPr lang="fr-FR" sz="1500" dirty="0">
+                <a:solidFill>
+                  <a:srgbClr val="3C3C3C"/>
+                </a:solidFill>
+                <a:latin typeface="Segoe UI"/>
+                <a:cs typeface="Segoe UI"/>
+              </a:rPr>
+              <a:t>   —   0 %</a:t>
+            </a:r>
           </a:p>
         </p:txBody>
       </p:sp>
     </p:spTree>
     <p:extLst>
       <p:ext uri="{BB962C8B-B14F-4D97-AF65-F5344CB8AC3E}">
-        <p14:creationId xmlns:p14="http://schemas.microsoft.com/office/powerpoint/2010/main" val="4047070132"/>
+        <p14:creationId xmlns:p14="http://schemas.microsoft.com/office/powerpoint/2010/main" val="3309046714"/>
       </p:ext>
     </p:extLst>
   </p:cSld>
@@ -8551,7 +10459,7 @@
                 <a:latin typeface="Segoe UI"/>
                 <a:cs typeface="Segoe UI"/>
               </a:rPr>
-              <a:t>AVANT novembre 2026</a:t>
+              <a:t>avant novembre 2026</a:t>
             </a:r>
             <a:endParaRPr lang="en-FR" sz="1500" b="1">
               <a:solidFill>
@@ -8908,7 +10816,7 @@
     </p:spTree>
     <p:extLst>
       <p:ext uri="{BB962C8B-B14F-4D97-AF65-F5344CB8AC3E}">
-        <p14:creationId xmlns:p14="http://schemas.microsoft.com/office/powerpoint/2010/main" val="3859749599"/>
+        <p14:creationId xmlns:p14="http://schemas.microsoft.com/office/powerpoint/2010/main" val="2851108291"/>
       </p:ext>
     </p:extLst>
   </p:cSld>
@@ -9733,7 +11641,7 @@
     </p:spTree>
     <p:extLst>
       <p:ext uri="{BB962C8B-B14F-4D97-AF65-F5344CB8AC3E}">
-        <p14:creationId xmlns:p14="http://schemas.microsoft.com/office/powerpoint/2010/main" val="1625019277"/>
+        <p14:creationId xmlns:p14="http://schemas.microsoft.com/office/powerpoint/2010/main" val="3588216794"/>
       </p:ext>
     </p:extLst>
   </p:cSld>
@@ -11269,7 +13177,7 @@
         </p:nvSpPr>
         <p:spPr>
           <a:xfrm>
-            <a:off x="4953000" y="1879600"/>
+            <a:off x="4953000" y="1803400"/>
             <a:ext cx="6375400" cy="939800"/>
           </a:xfrm>
           <a:prstGeom prst="rect">
@@ -11285,17 +13193,147 @@
           <a:p>
             <a:pPr algn="l"/>
             <a:r>
-              <a:rPr lang="en-GB" sz="2000">
+              <a:rPr lang="en-GB" sz="2000" dirty="0">
                 <a:solidFill>
                   <a:srgbClr val="1A1A1A"/>
                 </a:solidFill>
                 <a:latin typeface="Segoe UI"/>
                 <a:cs typeface="Segoe UI"/>
               </a:rPr>
-              <a:t>du volume expédié du groupe passe par un seul système, sur un seul site,
-dont la restauration n'a jamais été testée</a:t>
-            </a:r>
-            <a:endParaRPr lang="en-FR" sz="2000">
+              <a:t>du volume </a:t>
+            </a:r>
+            <a:r>
+              <a:rPr lang="en-GB" sz="2000" dirty="0" err="1">
+                <a:solidFill>
+                  <a:srgbClr val="1A1A1A"/>
+                </a:solidFill>
+                <a:latin typeface="Segoe UI"/>
+                <a:cs typeface="Segoe UI"/>
+              </a:rPr>
+              <a:t>expédié</a:t>
+            </a:r>
+            <a:r>
+              <a:rPr lang="en-GB" sz="2000" dirty="0">
+                <a:solidFill>
+                  <a:srgbClr val="1A1A1A"/>
+                </a:solidFill>
+                <a:latin typeface="Segoe UI"/>
+                <a:cs typeface="Segoe UI"/>
+              </a:rPr>
+              <a:t> du </a:t>
+            </a:r>
+            <a:r>
+              <a:rPr lang="en-GB" sz="2000" dirty="0" err="1">
+                <a:solidFill>
+                  <a:srgbClr val="1A1A1A"/>
+                </a:solidFill>
+                <a:latin typeface="Segoe UI"/>
+                <a:cs typeface="Segoe UI"/>
+              </a:rPr>
+              <a:t>groupe</a:t>
+            </a:r>
+            <a:r>
+              <a:rPr lang="en-GB" sz="2000" dirty="0">
+                <a:solidFill>
+                  <a:srgbClr val="1A1A1A"/>
+                </a:solidFill>
+                <a:latin typeface="Segoe UI"/>
+                <a:cs typeface="Segoe UI"/>
+              </a:rPr>
+              <a:t> passe par un seul </a:t>
+            </a:r>
+            <a:r>
+              <a:rPr lang="en-GB" sz="2000" dirty="0" err="1">
+                <a:solidFill>
+                  <a:srgbClr val="1A1A1A"/>
+                </a:solidFill>
+                <a:latin typeface="Segoe UI"/>
+                <a:cs typeface="Segoe UI"/>
+              </a:rPr>
+              <a:t>système</a:t>
+            </a:r>
+            <a:r>
+              <a:rPr lang="en-GB" sz="2000" dirty="0">
+                <a:solidFill>
+                  <a:srgbClr val="1A1A1A"/>
+                </a:solidFill>
+                <a:latin typeface="Segoe UI"/>
+                <a:cs typeface="Segoe UI"/>
+              </a:rPr>
+              <a:t>, sur un seul site,
+</a:t>
+            </a:r>
+            <a:r>
+              <a:rPr lang="en-GB" sz="2000" dirty="0" err="1">
+                <a:solidFill>
+                  <a:srgbClr val="1A1A1A"/>
+                </a:solidFill>
+                <a:latin typeface="Segoe UI"/>
+                <a:cs typeface="Segoe UI"/>
+              </a:rPr>
+              <a:t>dont</a:t>
+            </a:r>
+            <a:r>
+              <a:rPr lang="en-GB" sz="2000" dirty="0">
+                <a:solidFill>
+                  <a:srgbClr val="1A1A1A"/>
+                </a:solidFill>
+                <a:latin typeface="Segoe UI"/>
+                <a:cs typeface="Segoe UI"/>
+              </a:rPr>
+              <a:t> la restauration </a:t>
+            </a:r>
+            <a:r>
+              <a:rPr lang="en-GB" sz="2000" dirty="0" err="1">
+                <a:solidFill>
+                  <a:srgbClr val="1A1A1A"/>
+                </a:solidFill>
+                <a:latin typeface="Segoe UI"/>
+                <a:cs typeface="Segoe UI"/>
+              </a:rPr>
+              <a:t>n'a</a:t>
+            </a:r>
+            <a:r>
+              <a:rPr lang="en-GB" sz="2000" dirty="0">
+                <a:solidFill>
+                  <a:srgbClr val="1A1A1A"/>
+                </a:solidFill>
+                <a:latin typeface="Segoe UI"/>
+                <a:cs typeface="Segoe UI"/>
+              </a:rPr>
+              <a:t> jamais </a:t>
+            </a:r>
+            <a:r>
+              <a:rPr lang="en-GB" sz="2000" dirty="0" err="1">
+                <a:solidFill>
+                  <a:srgbClr val="1A1A1A"/>
+                </a:solidFill>
+                <a:latin typeface="Segoe UI"/>
+                <a:cs typeface="Segoe UI"/>
+              </a:rPr>
+              <a:t>été</a:t>
+            </a:r>
+            <a:r>
+              <a:rPr lang="en-GB" sz="2000" dirty="0">
+                <a:solidFill>
+                  <a:srgbClr val="1A1A1A"/>
+                </a:solidFill>
+                <a:latin typeface="Segoe UI"/>
+                <a:cs typeface="Segoe UI"/>
+              </a:rPr>
+              <a:t> </a:t>
+            </a:r>
+            <a:r>
+              <a:rPr lang="en-GB" sz="2000" dirty="0" err="1">
+                <a:solidFill>
+                  <a:srgbClr val="1A1A1A"/>
+                </a:solidFill>
+                <a:latin typeface="Segoe UI"/>
+                <a:cs typeface="Segoe UI"/>
+              </a:rPr>
+              <a:t>testée</a:t>
+            </a:r>
+            <a:endParaRPr lang="en-FR" sz="2000" dirty="0">
               <a:solidFill>
                 <a:srgbClr val="1A1A1A"/>
               </a:solidFill>
@@ -11335,7 +13373,7 @@
           <a:p>
             <a:pPr algn="l"/>
             <a:r>
-              <a:rPr lang="en-FR" sz="4000" b="1">
+              <a:rPr lang="en-FR" sz="4000" b="1" dirty="0">
                 <a:solidFill>
                   <a:srgbClr val="1F4E79"/>
                 </a:solidFill>
@@ -11361,7 +13399,7 @@
         </p:nvSpPr>
         <p:spPr>
           <a:xfrm>
-            <a:off x="4953000" y="2921000"/>
+            <a:off x="4953000" y="2819400"/>
             <a:ext cx="6375400" cy="812800"/>
           </a:xfrm>
           <a:prstGeom prst="rect">
@@ -11377,16 +13415,106 @@
           <a:p>
             <a:pPr algn="l"/>
             <a:r>
-              <a:rPr lang="en-GB" sz="2000">
+              <a:rPr lang="en-GB" sz="2000" dirty="0">
                 <a:solidFill>
                   <a:srgbClr val="1A1A1A"/>
                 </a:solidFill>
                 <a:latin typeface="Segoe UI"/>
                 <a:cs typeface="Segoe UI"/>
               </a:rPr>
-              <a:t>par jour d'arrêt — pénalités contractuelles, notre propre contrat</a:t>
-            </a:r>
-            <a:endParaRPr lang="en-FR" sz="2000">
+              <a:t>par jour </a:t>
+            </a:r>
+            <a:r>
+              <a:rPr lang="en-GB" sz="2000" dirty="0" err="1">
+                <a:solidFill>
+                  <a:srgbClr val="1A1A1A"/>
+                </a:solidFill>
+                <a:latin typeface="Segoe UI"/>
+                <a:cs typeface="Segoe UI"/>
+              </a:rPr>
+              <a:t>d'arrêt</a:t>
+            </a:r>
+            <a:r>
+              <a:rPr lang="en-GB" sz="2000" dirty="0">
+                <a:solidFill>
+                  <a:srgbClr val="1A1A1A"/>
+                </a:solidFill>
+                <a:latin typeface="Segoe UI"/>
+                <a:cs typeface="Segoe UI"/>
+              </a:rPr>
+              <a:t> — </a:t>
+            </a:r>
+            <a:r>
+              <a:rPr lang="en-GB" sz="2000" dirty="0" err="1">
+                <a:solidFill>
+                  <a:srgbClr val="1A1A1A"/>
+                </a:solidFill>
+                <a:latin typeface="Segoe UI"/>
+                <a:cs typeface="Segoe UI"/>
+              </a:rPr>
+              <a:t>pénalités</a:t>
+            </a:r>
+            <a:r>
+              <a:rPr lang="en-GB" sz="2000" dirty="0">
+                <a:solidFill>
+                  <a:srgbClr val="1A1A1A"/>
+                </a:solidFill>
+                <a:latin typeface="Segoe UI"/>
+                <a:cs typeface="Segoe UI"/>
+              </a:rPr>
+              <a:t> </a:t>
+            </a:r>
+            <a:r>
+              <a:rPr lang="en-GB" sz="2000" dirty="0" err="1">
+                <a:solidFill>
+                  <a:srgbClr val="1A1A1A"/>
+                </a:solidFill>
+                <a:latin typeface="Segoe UI"/>
+                <a:cs typeface="Segoe UI"/>
+              </a:rPr>
+              <a:t>contractuelles</a:t>
+            </a:r>
+            <a:r>
+              <a:rPr lang="en-GB" sz="2000" dirty="0">
+                <a:solidFill>
+                  <a:srgbClr val="1A1A1A"/>
+                </a:solidFill>
+                <a:latin typeface="Segoe UI"/>
+                <a:cs typeface="Segoe UI"/>
+              </a:rPr>
+              <a:t>, </a:t>
+            </a:r>
+            <a:r>
+              <a:rPr lang="en-GB" sz="2000" dirty="0" err="1">
+                <a:solidFill>
+                  <a:srgbClr val="1A1A1A"/>
+                </a:solidFill>
+                <a:latin typeface="Segoe UI"/>
+                <a:cs typeface="Segoe UI"/>
+              </a:rPr>
+              <a:t>notre</a:t>
+            </a:r>
+            <a:r>
+              <a:rPr lang="en-GB" sz="2000" dirty="0">
+                <a:solidFill>
+                  <a:srgbClr val="1A1A1A"/>
+                </a:solidFill>
+                <a:latin typeface="Segoe UI"/>
+                <a:cs typeface="Segoe UI"/>
+              </a:rPr>
+              <a:t> propre </a:t>
+            </a:r>
+            <a:r>
+              <a:rPr lang="en-GB" sz="2000" dirty="0" err="1">
+                <a:solidFill>
+                  <a:srgbClr val="1A1A1A"/>
+                </a:solidFill>
+                <a:latin typeface="Segoe UI"/>
+                <a:cs typeface="Segoe UI"/>
+              </a:rPr>
+              <a:t>contrat</a:t>
+            </a:r>
+            <a:endParaRPr lang="en-FR" sz="2000" dirty="0">
               <a:solidFill>
                 <a:srgbClr val="1A1A1A"/>
               </a:solidFill>
@@ -11426,7 +13554,7 @@
           <a:p>
             <a:pPr algn="l"/>
             <a:r>
-              <a:rPr lang="en-GB" sz="4000" b="1">
+              <a:rPr lang="en-GB" sz="4000" b="1" dirty="0">
                 <a:solidFill>
                   <a:srgbClr val="1F4E79"/>
                 </a:solidFill>
@@ -11435,7 +13563,7 @@
               </a:rPr>
               <a:t>250–300 M$</a:t>
             </a:r>
-            <a:endParaRPr lang="en-FR" sz="4000" b="1">
+            <a:endParaRPr lang="en-FR" sz="4000" b="1" dirty="0">
               <a:solidFill>
                 <a:srgbClr val="1F4E79"/>
               </a:solidFill>
@@ -11459,7 +13587,7 @@
         </p:nvSpPr>
         <p:spPr>
           <a:xfrm>
-            <a:off x="4953000" y="3962400"/>
+            <a:off x="4953000" y="3860800"/>
             <a:ext cx="6375400" cy="812800"/>
           </a:xfrm>
           <a:prstGeom prst="rect">
@@ -11475,16 +13603,146 @@
           <a:p>
             <a:pPr algn="l"/>
             <a:r>
-              <a:rPr lang="en-GB" sz="2000">
+              <a:rPr lang="en-GB" sz="2000" dirty="0" err="1">
                 <a:solidFill>
                   <a:srgbClr val="1A1A1A"/>
                 </a:solidFill>
                 <a:latin typeface="Segoe UI"/>
                 <a:cs typeface="Segoe UI"/>
               </a:rPr>
-              <a:t>ce que la même situation a coûté à un transporteur européen en 2017</a:t>
-            </a:r>
-            <a:endParaRPr lang="en-FR" sz="2000">
+              <a:t>ce</a:t>
+            </a:r>
+            <a:r>
+              <a:rPr lang="en-GB" sz="2000" dirty="0">
+                <a:solidFill>
+                  <a:srgbClr val="1A1A1A"/>
+                </a:solidFill>
+                <a:latin typeface="Segoe UI"/>
+                <a:cs typeface="Segoe UI"/>
+              </a:rPr>
+              <a:t> </a:t>
+            </a:r>
+            <a:r>
+              <a:rPr lang="en-GB" sz="2000" dirty="0" err="1">
+                <a:solidFill>
+                  <a:srgbClr val="1A1A1A"/>
+                </a:solidFill>
+                <a:latin typeface="Segoe UI"/>
+                <a:cs typeface="Segoe UI"/>
+              </a:rPr>
+              <a:t>que</a:t>
+            </a:r>
+            <a:r>
+              <a:rPr lang="en-GB" sz="2000" dirty="0">
+                <a:solidFill>
+                  <a:srgbClr val="1A1A1A"/>
+                </a:solidFill>
+                <a:latin typeface="Segoe UI"/>
+                <a:cs typeface="Segoe UI"/>
+              </a:rPr>
+              <a:t> la </a:t>
+            </a:r>
+            <a:r>
+              <a:rPr lang="en-GB" sz="2000" dirty="0" err="1">
+                <a:solidFill>
+                  <a:srgbClr val="1A1A1A"/>
+                </a:solidFill>
+                <a:latin typeface="Segoe UI"/>
+                <a:cs typeface="Segoe UI"/>
+              </a:rPr>
+              <a:t>même</a:t>
+            </a:r>
+            <a:r>
+              <a:rPr lang="en-GB" sz="2000" dirty="0">
+                <a:solidFill>
+                  <a:srgbClr val="1A1A1A"/>
+                </a:solidFill>
+                <a:latin typeface="Segoe UI"/>
+                <a:cs typeface="Segoe UI"/>
+              </a:rPr>
+              <a:t> situation a </a:t>
+            </a:r>
+            <a:r>
+              <a:rPr lang="en-GB" sz="2000" dirty="0" err="1">
+                <a:solidFill>
+                  <a:srgbClr val="1A1A1A"/>
+                </a:solidFill>
+                <a:latin typeface="Segoe UI"/>
+                <a:cs typeface="Segoe UI"/>
+              </a:rPr>
+              <a:t>coûté</a:t>
+            </a:r>
+            <a:r>
+              <a:rPr lang="en-GB" sz="2000" dirty="0">
+                <a:solidFill>
+                  <a:srgbClr val="1A1A1A"/>
+                </a:solidFill>
+                <a:latin typeface="Segoe UI"/>
+                <a:cs typeface="Segoe UI"/>
+              </a:rPr>
+              <a:t> à un </a:t>
+            </a:r>
+            <a:r>
+              <a:rPr lang="en-GB" sz="2000" dirty="0" err="1">
+                <a:solidFill>
+                  <a:srgbClr val="1A1A1A"/>
+                </a:solidFill>
+                <a:latin typeface="Segoe UI"/>
+                <a:cs typeface="Segoe UI"/>
+              </a:rPr>
+              <a:t>transporteur</a:t>
+            </a:r>
+            <a:r>
+              <a:rPr lang="en-GB" sz="2000" dirty="0">
+                <a:solidFill>
+                  <a:srgbClr val="1A1A1A"/>
+                </a:solidFill>
+                <a:latin typeface="Segoe UI"/>
+                <a:cs typeface="Segoe UI"/>
+              </a:rPr>
+              <a:t> </a:t>
+            </a:r>
+            <a:r>
+              <a:rPr lang="en-GB" sz="2000" dirty="0" err="1">
+                <a:solidFill>
+                  <a:srgbClr val="1A1A1A"/>
+                </a:solidFill>
+                <a:latin typeface="Segoe UI"/>
+                <a:cs typeface="Segoe UI"/>
+              </a:rPr>
+              <a:t>européen</a:t>
+            </a:r>
+            <a:r>
+              <a:rPr lang="en-GB" sz="2000" dirty="0">
+                <a:solidFill>
+                  <a:srgbClr val="1A1A1A"/>
+                </a:solidFill>
+                <a:latin typeface="Segoe UI"/>
+                <a:cs typeface="Segoe UI"/>
+              </a:rPr>
+              <a:t> </a:t>
+            </a:r>
+            <a:r>
+              <a:rPr lang="en-GB" sz="2000" dirty="0" err="1">
+                <a:solidFill>
+                  <a:srgbClr val="1A1A1A"/>
+                </a:solidFill>
+                <a:latin typeface="Segoe UI"/>
+                <a:cs typeface="Segoe UI"/>
+              </a:rPr>
+              <a:t>en</a:t>
+            </a:r>
+            <a:r>
+              <a:rPr lang="en-GB" sz="2000" dirty="0">
+                <a:solidFill>
+                  <a:srgbClr val="1A1A1A"/>
+                </a:solidFill>
+                <a:latin typeface="Segoe UI"/>
+                <a:cs typeface="Segoe UI"/>
+              </a:rPr>
+              <a:t> 2017</a:t>
+            </a:r>
+            <a:endParaRPr lang="en-FR" sz="2000" dirty="0">
               <a:solidFill>
                 <a:srgbClr val="1A1A1A"/>
               </a:solidFill>
@@ -11508,7 +13766,7 @@
         </p:nvSpPr>
         <p:spPr>
           <a:xfrm>
-            <a:off x="914400" y="4902200"/>
+            <a:off x="914400" y="4876800"/>
             <a:ext cx="3683000" cy="660400"/>
           </a:xfrm>
           <a:prstGeom prst="rect">
@@ -11524,7 +13782,7 @@
           <a:p>
             <a:pPr algn="l"/>
             <a:r>
-              <a:rPr lang="en-GB" sz="4000" b="1">
+              <a:rPr lang="en-GB" sz="4000" b="1" dirty="0">
                 <a:solidFill>
                   <a:srgbClr val="1F4E79"/>
                 </a:solidFill>
@@ -11533,7 +13791,7 @@
               </a:rPr>
               <a:t>82 000 €/an</a:t>
             </a:r>
-            <a:endParaRPr lang="en-FR" sz="4000" b="1">
+            <a:endParaRPr lang="en-FR" sz="4000" b="1" dirty="0">
               <a:solidFill>
                 <a:srgbClr val="1F4E79"/>
               </a:solidFill>
@@ -11573,16 +13831,66 @@
           <a:p>
             <a:pPr algn="l"/>
             <a:r>
-              <a:rPr lang="en-GB" sz="2000">
+              <a:rPr lang="en-GB" sz="2000" dirty="0" err="1">
                 <a:solidFill>
                   <a:srgbClr val="1A1A1A"/>
                 </a:solidFill>
                 <a:latin typeface="Segoe UI"/>
                 <a:cs typeface="Segoe UI"/>
               </a:rPr>
-              <a:t>ce que nous venons vous demander</a:t>
-            </a:r>
-            <a:endParaRPr lang="en-FR" sz="2000">
+              <a:t>ce</a:t>
+            </a:r>
+            <a:r>
+              <a:rPr lang="en-GB" sz="2000" dirty="0">
+                <a:solidFill>
+                  <a:srgbClr val="1A1A1A"/>
+                </a:solidFill>
+                <a:latin typeface="Segoe UI"/>
+                <a:cs typeface="Segoe UI"/>
+              </a:rPr>
+              <a:t> </a:t>
+            </a:r>
+            <a:r>
+              <a:rPr lang="en-GB" sz="2000" dirty="0" err="1">
+                <a:solidFill>
+                  <a:srgbClr val="1A1A1A"/>
+                </a:solidFill>
+                <a:latin typeface="Segoe UI"/>
+                <a:cs typeface="Segoe UI"/>
+              </a:rPr>
+              <a:t>que</a:t>
+            </a:r>
+            <a:r>
+              <a:rPr lang="en-GB" sz="2000" dirty="0">
+                <a:solidFill>
+                  <a:srgbClr val="1A1A1A"/>
+                </a:solidFill>
+                <a:latin typeface="Segoe UI"/>
+                <a:cs typeface="Segoe UI"/>
+              </a:rPr>
+              <a:t> nous </a:t>
+            </a:r>
+            <a:r>
+              <a:rPr lang="en-GB" sz="2000" dirty="0" err="1">
+                <a:solidFill>
+                  <a:srgbClr val="1A1A1A"/>
+                </a:solidFill>
+                <a:latin typeface="Segoe UI"/>
+                <a:cs typeface="Segoe UI"/>
+              </a:rPr>
+              <a:t>venons</a:t>
+            </a:r>
+            <a:r>
+              <a:rPr lang="en-GB" sz="2000" dirty="0">
+                <a:solidFill>
+                  <a:srgbClr val="1A1A1A"/>
+                </a:solidFill>
+                <a:latin typeface="Segoe UI"/>
+                <a:cs typeface="Segoe UI"/>
+              </a:rPr>
+              <a:t> vous demander</a:t>
+            </a:r>
+            <a:endParaRPr lang="en-FR" sz="2000" dirty="0">
               <a:solidFill>
                 <a:srgbClr val="1A1A1A"/>
               </a:solidFill>
@@ -11595,7 +13903,7 @@
     </p:spTree>
     <p:extLst>
       <p:ext uri="{BB962C8B-B14F-4D97-AF65-F5344CB8AC3E}">
-        <p14:creationId xmlns:p14="http://schemas.microsoft.com/office/powerpoint/2010/main" val="4147317291"/>
+        <p14:creationId xmlns:p14="http://schemas.microsoft.com/office/powerpoint/2010/main" val="515008136"/>
       </p:ext>
     </p:extLst>
   </p:cSld>
@@ -13487,7 +15795,7 @@
         </p:nvSpPr>
         <p:spPr>
           <a:xfrm>
-            <a:off x="914400" y="3200400"/>
+            <a:off x="914400" y="3276600"/>
             <a:ext cx="10414000" cy="533400"/>
           </a:xfrm>
           <a:prstGeom prst="rect">
@@ -13667,7 +15975,27 @@
                 <a:latin typeface="Segoe UI"/>
                 <a:cs typeface="Segoe UI"/>
               </a:rPr>
-              <a:t>Quatre activités, treize supports, cinq actifs critiques — classés sur un critère écrit AVANT le classement</a:t>
+              <a:t>Quatre activités, treize supports, cinq actifs critiques — classés sur un critère écrit </a:t>
+            </a:r>
+            <a:r>
+              <a:rPr lang="en-GB" b="1">
+                <a:solidFill>
+                  <a:srgbClr val="8A8F98"/>
+                </a:solidFill>
+                <a:latin typeface="Segoe UI"/>
+                <a:cs typeface="Segoe UI"/>
+              </a:rPr>
+              <a:t>avant</a:t>
+            </a:r>
+            <a:r>
+              <a:rPr lang="en-GB">
+                <a:solidFill>
+                  <a:srgbClr val="8A8F98"/>
+                </a:solidFill>
+                <a:latin typeface="Segoe UI"/>
+                <a:cs typeface="Segoe UI"/>
+              </a:rPr>
+              <a:t> le classement</a:t>
             </a:r>
             <a:endParaRPr lang="en-FR">
               <a:solidFill>
@@ -13973,7 +16301,7 @@
         </p:nvSpPr>
         <p:spPr>
           <a:xfrm>
-            <a:off x="914400" y="3276600"/>
+            <a:off x="914400" y="3352800"/>
             <a:ext cx="304800" cy="381000"/>
           </a:xfrm>
           <a:prstGeom prst="rect">
@@ -14015,7 +16343,7 @@
         </p:nvSpPr>
         <p:spPr>
           <a:xfrm>
-            <a:off x="1320800" y="3276600"/>
+            <a:off x="1320800" y="3352800"/>
             <a:ext cx="3810000" cy="381000"/>
           </a:xfrm>
           <a:prstGeom prst="rect">
@@ -14064,7 +16392,7 @@
         </p:nvSpPr>
         <p:spPr>
           <a:xfrm>
-            <a:off x="5130800" y="3302000"/>
+            <a:off x="5130800" y="3378200"/>
             <a:ext cx="6197600" cy="381000"/>
           </a:xfrm>
           <a:prstGeom prst="rect">
@@ -14505,7 +16833,7 @@
           <p:nvPr/>
         </p:nvPicPr>
         <p:blipFill>
-          <a:blip r:embed="rId2"/>
+          <a:blip r:embed="rId3"/>
           <a:stretch>
             <a:fillRect/>
           </a:stretch>
@@ -14523,7 +16851,7 @@
     </p:spTree>
     <p:extLst>
       <p:ext uri="{BB962C8B-B14F-4D97-AF65-F5344CB8AC3E}">
-        <p14:creationId xmlns:p14="http://schemas.microsoft.com/office/powerpoint/2010/main" val="1837971646"/>
+        <p14:creationId xmlns:p14="http://schemas.microsoft.com/office/powerpoint/2010/main" val="2695676243"/>
       </p:ext>
     </p:extLst>
   </p:cSld>
@@ -15723,7 +18051,7 @@
     </p:spTree>
     <p:extLst>
       <p:ext uri="{BB962C8B-B14F-4D97-AF65-F5344CB8AC3E}">
-        <p14:creationId xmlns:p14="http://schemas.microsoft.com/office/powerpoint/2010/main" val="3171900670"/>
+        <p14:creationId xmlns:p14="http://schemas.microsoft.com/office/powerpoint/2010/main" val="2575903640"/>
       </p:ext>
     </p:extLst>
   </p:cSld>
@@ -16438,16 +18766,46 @@
           <a:p>
             <a:pPr algn="l"/>
             <a:r>
-              <a:rPr lang="en-GB" sz="1400">
+              <a:rPr lang="en-GB" sz="1400" dirty="0" err="1">
                 <a:solidFill>
                   <a:srgbClr val="8A8F98"/>
                 </a:solidFill>
                 <a:latin typeface="Segoe UI"/>
                 <a:cs typeface="Segoe UI"/>
               </a:rPr>
-              <a:t>Preuve : S5-05-ex5-5-couples-liste-pertinence.jpg — colonne « Pertinence », les deux écartés</a:t>
-            </a:r>
-            <a:endParaRPr lang="en-FR" sz="1400">
+              <a:t>Preuve</a:t>
+            </a:r>
+            <a:r>
+              <a:rPr lang="en-GB" sz="1400" dirty="0">
+                <a:solidFill>
+                  <a:srgbClr val="8A8F98"/>
+                </a:solidFill>
+                <a:latin typeface="Segoe UI"/>
+                <a:cs typeface="Segoe UI"/>
+              </a:rPr>
+              <a:t> : S5-05-ex5-5-couples-liste-pertinence.jpg — </a:t>
+            </a:r>
+            <a:r>
+              <a:rPr lang="en-GB" sz="1400" dirty="0" err="1">
+                <a:solidFill>
+                  <a:srgbClr val="8A8F98"/>
+                </a:solidFill>
+                <a:latin typeface="Segoe UI"/>
+                <a:cs typeface="Segoe UI"/>
+              </a:rPr>
+              <a:t>colonne</a:t>
+            </a:r>
+            <a:r>
+              <a:rPr lang="en-GB" sz="1400" dirty="0">
+                <a:solidFill>
+                  <a:srgbClr val="8A8F98"/>
+                </a:solidFill>
+                <a:latin typeface="Segoe UI"/>
+                <a:cs typeface="Segoe UI"/>
+              </a:rPr>
+              <a:t> « Pertinence », les deux écartés</a:t>
+            </a:r>
+            <a:endParaRPr lang="en-FR" sz="1400" dirty="0">
               <a:solidFill>
                 <a:srgbClr val="8A8F98"/>
               </a:solidFill>
@@ -16460,7 +18818,7 @@
     </p:spTree>
     <p:extLst>
       <p:ext uri="{BB962C8B-B14F-4D97-AF65-F5344CB8AC3E}">
-        <p14:creationId xmlns:p14="http://schemas.microsoft.com/office/powerpoint/2010/main" val="835777264"/>
+        <p14:creationId xmlns:p14="http://schemas.microsoft.com/office/powerpoint/2010/main" val="3673861807"/>
       </p:ext>
     </p:extLst>
   </p:cSld>
@@ -16620,16 +18978,96 @@
           <a:p>
             <a:pPr algn="l"/>
             <a:r>
-              <a:rPr lang="en-GB" sz="2400" b="1">
+              <a:rPr lang="en-GB" sz="2400" b="1" dirty="0" err="1">
                 <a:solidFill>
                   <a:srgbClr val="1A1A1A"/>
                 </a:solidFill>
                 <a:latin typeface="Segoe UI"/>
                 <a:cs typeface="Segoe UI"/>
               </a:rPr>
-              <a:t>L'arrêt non planifié de l'expédition au-delà de six heures</a:t>
-            </a:r>
-            <a:endParaRPr lang="en-FR" sz="2400" b="1">
+              <a:t>L'arrêt</a:t>
+            </a:r>
+            <a:r>
+              <a:rPr lang="en-GB" sz="2400" b="1" dirty="0">
+                <a:solidFill>
+                  <a:srgbClr val="1A1A1A"/>
+                </a:solidFill>
+                <a:latin typeface="Segoe UI"/>
+                <a:cs typeface="Segoe UI"/>
+              </a:rPr>
+              <a:t> non </a:t>
+            </a:r>
+            <a:r>
+              <a:rPr lang="en-GB" sz="2400" b="1" dirty="0" err="1">
+                <a:solidFill>
+                  <a:srgbClr val="1A1A1A"/>
+                </a:solidFill>
+                <a:latin typeface="Segoe UI"/>
+                <a:cs typeface="Segoe UI"/>
+              </a:rPr>
+              <a:t>planifié</a:t>
+            </a:r>
+            <a:r>
+              <a:rPr lang="en-GB" sz="2400" b="1" dirty="0">
+                <a:solidFill>
+                  <a:srgbClr val="1A1A1A"/>
+                </a:solidFill>
+                <a:latin typeface="Segoe UI"/>
+                <a:cs typeface="Segoe UI"/>
+              </a:rPr>
+              <a:t> de </a:t>
+            </a:r>
+            <a:r>
+              <a:rPr lang="en-GB" sz="2400" b="1" dirty="0" err="1">
+                <a:solidFill>
+                  <a:srgbClr val="1A1A1A"/>
+                </a:solidFill>
+                <a:latin typeface="Segoe UI"/>
+                <a:cs typeface="Segoe UI"/>
+              </a:rPr>
+              <a:t>l'expédition</a:t>
+            </a:r>
+            <a:r>
+              <a:rPr lang="en-GB" sz="2400" b="1" dirty="0">
+                <a:solidFill>
+                  <a:srgbClr val="1A1A1A"/>
+                </a:solidFill>
+                <a:latin typeface="Segoe UI"/>
+                <a:cs typeface="Segoe UI"/>
+              </a:rPr>
+              <a:t> au-</a:t>
+            </a:r>
+            <a:r>
+              <a:rPr lang="en-GB" sz="2400" b="1" dirty="0" err="1">
+                <a:solidFill>
+                  <a:srgbClr val="1A1A1A"/>
+                </a:solidFill>
+                <a:latin typeface="Segoe UI"/>
+                <a:cs typeface="Segoe UI"/>
+              </a:rPr>
+              <a:t>delà</a:t>
+            </a:r>
+            <a:r>
+              <a:rPr lang="en-GB" sz="2400" b="1" dirty="0">
+                <a:solidFill>
+                  <a:srgbClr val="1A1A1A"/>
+                </a:solidFill>
+                <a:latin typeface="Segoe UI"/>
+                <a:cs typeface="Segoe UI"/>
+              </a:rPr>
+              <a:t> de six </a:t>
+            </a:r>
+            <a:r>
+              <a:rPr lang="en-GB" sz="2400" b="1" dirty="0" err="1">
+                <a:solidFill>
+                  <a:srgbClr val="1A1A1A"/>
+                </a:solidFill>
+                <a:latin typeface="Segoe UI"/>
+                <a:cs typeface="Segoe UI"/>
+              </a:rPr>
+              <a:t>heures</a:t>
+            </a:r>
+            <a:endParaRPr lang="en-FR" sz="2400" b="1" dirty="0">
               <a:solidFill>
                 <a:srgbClr val="1A1A1A"/>
               </a:solidFill>
@@ -16777,6 +19215,237 @@
           <a:p>
             <a:pPr algn="l"/>
             <a:r>
+              <a:rPr lang="en-GB" sz="2200" b="1" dirty="0">
+                <a:solidFill>
+                  <a:srgbClr val="1F4E79"/>
+                </a:solidFill>
+                <a:latin typeface="Segoe UI"/>
+                <a:cs typeface="Segoe UI"/>
+              </a:rPr>
+              <a:t>GRAVE</a:t>
+            </a:r>
+            <a:endParaRPr lang="en-FR" sz="2200" b="1" dirty="0">
+              <a:solidFill>
+                <a:srgbClr val="1F4E79"/>
+              </a:solidFill>
+              <a:latin typeface="Segoe UI"/>
+              <a:cs typeface="Segoe UI"/>
+            </a:endParaRPr>
+          </a:p>
+        </p:txBody>
+      </p:sp>
+      <p:sp>
+        <p:nvSpPr>
+          <p:cNvPr id="18" name="TextBox 17">
+            <a:extLst>
+              <a:ext uri="{FF2B5EF4-FFF2-40B4-BE49-F238E27FC236}">
+                <a16:creationId xmlns:a16="http://schemas.microsoft.com/office/drawing/2014/main" id="{A5D8634A-B497-A844-B8C8-BFE4F1426527}"/>
+              </a:ext>
+            </a:extLst>
+          </p:cNvPr>
+          <p:cNvSpPr txBox="1"/>
+          <p:nvPr/>
+        </p:nvSpPr>
+        <p:spPr>
+          <a:xfrm>
+            <a:off x="1270000" y="2819400"/>
+            <a:ext cx="4064000" cy="558800"/>
+          </a:xfrm>
+          <a:prstGeom prst="rect">
+            <a:avLst/>
+          </a:prstGeom>
+          <a:noFill/>
+        </p:spPr>
+        <p:txBody>
+          <a:bodyPr vertOverflow="overflow" vert="horz" wrap="square" rtlCol="0" anchor="t">
+            <a:noAutofit/>
+          </a:bodyPr>
+          <a:lstStyle/>
+          <a:p>
+            <a:pPr algn="l"/>
+            <a:r>
+              <a:rPr lang="en-FR" sz="3400" b="1" dirty="0">
+                <a:solidFill>
+                  <a:srgbClr val="1A1A1A"/>
+                </a:solidFill>
+                <a:latin typeface="Segoe UI"/>
+                <a:cs typeface="Segoe UI"/>
+              </a:rPr>
+              <a:t>40 %</a:t>
+            </a:r>
+          </a:p>
+        </p:txBody>
+      </p:sp>
+      <p:sp>
+        <p:nvSpPr>
+          <p:cNvPr id="19" name="TextBox 18">
+            <a:extLst>
+              <a:ext uri="{FF2B5EF4-FFF2-40B4-BE49-F238E27FC236}">
+                <a16:creationId xmlns:a16="http://schemas.microsoft.com/office/drawing/2014/main" id="{2D5031ED-2AAE-E345-8581-FDF7A722EB1F}"/>
+              </a:ext>
+            </a:extLst>
+          </p:cNvPr>
+          <p:cNvSpPr txBox="1"/>
+          <p:nvPr/>
+        </p:nvSpPr>
+        <p:spPr>
+          <a:xfrm>
+            <a:off x="1270000" y="3403600"/>
+            <a:ext cx="4064000" cy="330200"/>
+          </a:xfrm>
+          <a:prstGeom prst="rect">
+            <a:avLst/>
+          </a:prstGeom>
+          <a:noFill/>
+        </p:spPr>
+        <p:txBody>
+          <a:bodyPr vertOverflow="overflow" vert="horz" wrap="square" rtlCol="0" anchor="t">
+            <a:noAutofit/>
+          </a:bodyPr>
+          <a:lstStyle/>
+          <a:p>
+            <a:pPr algn="l"/>
+            <a:r>
+              <a:rPr lang="en-GB" sz="1700">
+                <a:solidFill>
+                  <a:srgbClr val="3C3C3C"/>
+                </a:solidFill>
+                <a:latin typeface="Segoe UI"/>
+                <a:cs typeface="Segoe UI"/>
+              </a:rPr>
+              <a:t>du volume expédié du groupe</a:t>
+            </a:r>
+            <a:endParaRPr lang="en-FR" sz="1700">
+              <a:solidFill>
+                <a:srgbClr val="3C3C3C"/>
+              </a:solidFill>
+              <a:latin typeface="Segoe UI"/>
+              <a:cs typeface="Segoe UI"/>
+            </a:endParaRPr>
+          </a:p>
+        </p:txBody>
+      </p:sp>
+      <p:sp>
+        <p:nvSpPr>
+          <p:cNvPr id="20" name="TextBox 19">
+            <a:extLst>
+              <a:ext uri="{FF2B5EF4-FFF2-40B4-BE49-F238E27FC236}">
+                <a16:creationId xmlns:a16="http://schemas.microsoft.com/office/drawing/2014/main" id="{F04ED05D-0CBA-EA4D-9B3B-7E9B135C07A1}"/>
+              </a:ext>
+            </a:extLst>
+          </p:cNvPr>
+          <p:cNvSpPr txBox="1"/>
+          <p:nvPr/>
+        </p:nvSpPr>
+        <p:spPr>
+          <a:xfrm>
+            <a:off x="1270000" y="4013200"/>
+            <a:ext cx="4064000" cy="558800"/>
+          </a:xfrm>
+          <a:prstGeom prst="rect">
+            <a:avLst/>
+          </a:prstGeom>
+          <a:noFill/>
+        </p:spPr>
+        <p:txBody>
+          <a:bodyPr vertOverflow="overflow" vert="horz" wrap="square" rtlCol="0" anchor="t">
+            <a:noAutofit/>
+          </a:bodyPr>
+          <a:lstStyle/>
+          <a:p>
+            <a:pPr algn="l"/>
+            <a:r>
+              <a:rPr lang="en-FR" sz="3400" b="1">
+                <a:solidFill>
+                  <a:srgbClr val="1A1A1A"/>
+                </a:solidFill>
+                <a:latin typeface="Segoe UI"/>
+                <a:cs typeface="Segoe UI"/>
+              </a:rPr>
+              <a:t>12 000 €</a:t>
+            </a:r>
+          </a:p>
+        </p:txBody>
+      </p:sp>
+      <p:sp>
+        <p:nvSpPr>
+          <p:cNvPr id="21" name="TextBox 20">
+            <a:extLst>
+              <a:ext uri="{FF2B5EF4-FFF2-40B4-BE49-F238E27FC236}">
+                <a16:creationId xmlns:a16="http://schemas.microsoft.com/office/drawing/2014/main" id="{A6E8B760-ED0D-4842-8A50-03853041A826}"/>
+              </a:ext>
+            </a:extLst>
+          </p:cNvPr>
+          <p:cNvSpPr txBox="1"/>
+          <p:nvPr/>
+        </p:nvSpPr>
+        <p:spPr>
+          <a:xfrm>
+            <a:off x="1270000" y="4597400"/>
+            <a:ext cx="4064000" cy="330200"/>
+          </a:xfrm>
+          <a:prstGeom prst="rect">
+            <a:avLst/>
+          </a:prstGeom>
+          <a:noFill/>
+        </p:spPr>
+        <p:txBody>
+          <a:bodyPr vertOverflow="overflow" vert="horz" wrap="square" rtlCol="0" anchor="t">
+            <a:noAutofit/>
+          </a:bodyPr>
+          <a:lstStyle/>
+          <a:p>
+            <a:pPr algn="l"/>
+            <a:r>
+              <a:rPr lang="en-GB" sz="1700">
+                <a:solidFill>
+                  <a:srgbClr val="3C3C3C"/>
+                </a:solidFill>
+                <a:latin typeface="Segoe UI"/>
+                <a:cs typeface="Segoe UI"/>
+              </a:rPr>
+              <a:t>par jour de pénalités contractuelles</a:t>
+            </a:r>
+            <a:endParaRPr lang="en-FR" sz="1700">
+              <a:solidFill>
+                <a:srgbClr val="3C3C3C"/>
+              </a:solidFill>
+              <a:latin typeface="Segoe UI"/>
+              <a:cs typeface="Segoe UI"/>
+            </a:endParaRPr>
+          </a:p>
+        </p:txBody>
+      </p:sp>
+      <p:sp>
+        <p:nvSpPr>
+          <p:cNvPr id="22" name="TextBox 21">
+            <a:extLst>
+              <a:ext uri="{FF2B5EF4-FFF2-40B4-BE49-F238E27FC236}">
+                <a16:creationId xmlns:a16="http://schemas.microsoft.com/office/drawing/2014/main" id="{B074A865-B8C0-2F48-8783-1869859378B0}"/>
+              </a:ext>
+            </a:extLst>
+          </p:cNvPr>
+          <p:cNvSpPr txBox="1"/>
+          <p:nvPr/>
+        </p:nvSpPr>
+        <p:spPr>
+          <a:xfrm>
+            <a:off x="6248400" y="2209800"/>
+            <a:ext cx="4775200" cy="406400"/>
+          </a:xfrm>
+          <a:prstGeom prst="rect">
+            <a:avLst/>
+          </a:prstGeom>
+          <a:noFill/>
+        </p:spPr>
+        <p:txBody>
+          <a:bodyPr vertOverflow="overflow" vert="horz" wrap="square" rtlCol="0" anchor="t">
+            <a:noAutofit/>
+          </a:bodyPr>
+          <a:lstStyle/>
+          <a:p>
+            <a:pPr algn="l"/>
+            <a:r>
               <a:rPr lang="en-GB" sz="2200" b="1">
                 <a:solidFill>
                   <a:srgbClr val="1F4E79"/>
@@ -16784,7 +19453,7 @@
                 <a:latin typeface="Segoe UI"/>
                 <a:cs typeface="Segoe UI"/>
               </a:rPr>
-              <a:t>GRAVE</a:t>
+              <a:t>CRÉDIBLE</a:t>
             </a:r>
             <a:endParaRPr lang="en-FR" sz="2200" b="1">
               <a:solidFill>
@@ -16798,237 +19467,6 @@
       </p:sp>
       <p:sp>
         <p:nvSpPr>
-          <p:cNvPr id="18" name="TextBox 17">
-            <a:extLst>
-              <a:ext uri="{FF2B5EF4-FFF2-40B4-BE49-F238E27FC236}">
-                <a16:creationId xmlns:a16="http://schemas.microsoft.com/office/drawing/2014/main" id="{A5D8634A-B497-A844-B8C8-BFE4F1426527}"/>
-              </a:ext>
-            </a:extLst>
-          </p:cNvPr>
-          <p:cNvSpPr txBox="1"/>
-          <p:nvPr/>
-        </p:nvSpPr>
-        <p:spPr>
-          <a:xfrm>
-            <a:off x="1270000" y="2819400"/>
-            <a:ext cx="4064000" cy="558800"/>
-          </a:xfrm>
-          <a:prstGeom prst="rect">
-            <a:avLst/>
-          </a:prstGeom>
-          <a:noFill/>
-        </p:spPr>
-        <p:txBody>
-          <a:bodyPr vertOverflow="overflow" vert="horz" wrap="square" rtlCol="0" anchor="t">
-            <a:noAutofit/>
-          </a:bodyPr>
-          <a:lstStyle/>
-          <a:p>
-            <a:pPr algn="l"/>
-            <a:r>
-              <a:rPr lang="en-FR" sz="3400" b="1">
-                <a:solidFill>
-                  <a:srgbClr val="1A1A1A"/>
-                </a:solidFill>
-                <a:latin typeface="Segoe UI"/>
-                <a:cs typeface="Segoe UI"/>
-              </a:rPr>
-              <a:t>40 %</a:t>
-            </a:r>
-          </a:p>
-        </p:txBody>
-      </p:sp>
-      <p:sp>
-        <p:nvSpPr>
-          <p:cNvPr id="19" name="TextBox 18">
-            <a:extLst>
-              <a:ext uri="{FF2B5EF4-FFF2-40B4-BE49-F238E27FC236}">
-                <a16:creationId xmlns:a16="http://schemas.microsoft.com/office/drawing/2014/main" id="{2D5031ED-2AAE-E345-8581-FDF7A722EB1F}"/>
-              </a:ext>
-            </a:extLst>
-          </p:cNvPr>
-          <p:cNvSpPr txBox="1"/>
-          <p:nvPr/>
-        </p:nvSpPr>
-        <p:spPr>
-          <a:xfrm>
-            <a:off x="1270000" y="3403600"/>
-            <a:ext cx="4064000" cy="330200"/>
-          </a:xfrm>
-          <a:prstGeom prst="rect">
-            <a:avLst/>
-          </a:prstGeom>
-          <a:noFill/>
-        </p:spPr>
-        <p:txBody>
-          <a:bodyPr vertOverflow="overflow" vert="horz" wrap="square" rtlCol="0" anchor="t">
-            <a:noAutofit/>
-          </a:bodyPr>
-          <a:lstStyle/>
-          <a:p>
-            <a:pPr algn="l"/>
-            <a:r>
-              <a:rPr lang="en-GB" sz="1700">
-                <a:solidFill>
-                  <a:srgbClr val="3C3C3C"/>
-                </a:solidFill>
-                <a:latin typeface="Segoe UI"/>
-                <a:cs typeface="Segoe UI"/>
-              </a:rPr>
-              <a:t>du volume expédié du groupe</a:t>
-            </a:r>
-            <a:endParaRPr lang="en-FR" sz="1700">
-              <a:solidFill>
-                <a:srgbClr val="3C3C3C"/>
-              </a:solidFill>
-              <a:latin typeface="Segoe UI"/>
-              <a:cs typeface="Segoe UI"/>
-            </a:endParaRPr>
-          </a:p>
-        </p:txBody>
-      </p:sp>
-      <p:sp>
-        <p:nvSpPr>
-          <p:cNvPr id="20" name="TextBox 19">
-            <a:extLst>
-              <a:ext uri="{FF2B5EF4-FFF2-40B4-BE49-F238E27FC236}">
-                <a16:creationId xmlns:a16="http://schemas.microsoft.com/office/drawing/2014/main" id="{F04ED05D-0CBA-EA4D-9B3B-7E9B135C07A1}"/>
-              </a:ext>
-            </a:extLst>
-          </p:cNvPr>
-          <p:cNvSpPr txBox="1"/>
-          <p:nvPr/>
-        </p:nvSpPr>
-        <p:spPr>
-          <a:xfrm>
-            <a:off x="1270000" y="4013200"/>
-            <a:ext cx="4064000" cy="558800"/>
-          </a:xfrm>
-          <a:prstGeom prst="rect">
-            <a:avLst/>
-          </a:prstGeom>
-          <a:noFill/>
-        </p:spPr>
-        <p:txBody>
-          <a:bodyPr vertOverflow="overflow" vert="horz" wrap="square" rtlCol="0" anchor="t">
-            <a:noAutofit/>
-          </a:bodyPr>
-          <a:lstStyle/>
-          <a:p>
-            <a:pPr algn="l"/>
-            <a:r>
-              <a:rPr lang="en-FR" sz="3400" b="1">
-                <a:solidFill>
-                  <a:srgbClr val="1A1A1A"/>
-                </a:solidFill>
-                <a:latin typeface="Segoe UI"/>
-                <a:cs typeface="Segoe UI"/>
-              </a:rPr>
-              <a:t>12 000 €</a:t>
-            </a:r>
-          </a:p>
-        </p:txBody>
-      </p:sp>
-      <p:sp>
-        <p:nvSpPr>
-          <p:cNvPr id="21" name="TextBox 20">
-            <a:extLst>
-              <a:ext uri="{FF2B5EF4-FFF2-40B4-BE49-F238E27FC236}">
-                <a16:creationId xmlns:a16="http://schemas.microsoft.com/office/drawing/2014/main" id="{A6E8B760-ED0D-4842-8A50-03853041A826}"/>
-              </a:ext>
-            </a:extLst>
-          </p:cNvPr>
-          <p:cNvSpPr txBox="1"/>
-          <p:nvPr/>
-        </p:nvSpPr>
-        <p:spPr>
-          <a:xfrm>
-            <a:off x="1270000" y="4597400"/>
-            <a:ext cx="4064000" cy="330200"/>
-          </a:xfrm>
-          <a:prstGeom prst="rect">
-            <a:avLst/>
-          </a:prstGeom>
-          <a:noFill/>
-        </p:spPr>
-        <p:txBody>
-          <a:bodyPr vertOverflow="overflow" vert="horz" wrap="square" rtlCol="0" anchor="t">
-            <a:noAutofit/>
-          </a:bodyPr>
-          <a:lstStyle/>
-          <a:p>
-            <a:pPr algn="l"/>
-            <a:r>
-              <a:rPr lang="en-GB" sz="1700">
-                <a:solidFill>
-                  <a:srgbClr val="3C3C3C"/>
-                </a:solidFill>
-                <a:latin typeface="Segoe UI"/>
-                <a:cs typeface="Segoe UI"/>
-              </a:rPr>
-              <a:t>par jour de pénalités contractuelles</a:t>
-            </a:r>
-            <a:endParaRPr lang="en-FR" sz="1700">
-              <a:solidFill>
-                <a:srgbClr val="3C3C3C"/>
-              </a:solidFill>
-              <a:latin typeface="Segoe UI"/>
-              <a:cs typeface="Segoe UI"/>
-            </a:endParaRPr>
-          </a:p>
-        </p:txBody>
-      </p:sp>
-      <p:sp>
-        <p:nvSpPr>
-          <p:cNvPr id="22" name="TextBox 21">
-            <a:extLst>
-              <a:ext uri="{FF2B5EF4-FFF2-40B4-BE49-F238E27FC236}">
-                <a16:creationId xmlns:a16="http://schemas.microsoft.com/office/drawing/2014/main" id="{B074A865-B8C0-2F48-8783-1869859378B0}"/>
-              </a:ext>
-            </a:extLst>
-          </p:cNvPr>
-          <p:cNvSpPr txBox="1"/>
-          <p:nvPr/>
-        </p:nvSpPr>
-        <p:spPr>
-          <a:xfrm>
-            <a:off x="6248400" y="2209800"/>
-            <a:ext cx="4775200" cy="406400"/>
-          </a:xfrm>
-          <a:prstGeom prst="rect">
-            <a:avLst/>
-          </a:prstGeom>
-          <a:noFill/>
-        </p:spPr>
-        <p:txBody>
-          <a:bodyPr vertOverflow="overflow" vert="horz" wrap="square" rtlCol="0" anchor="t">
-            <a:noAutofit/>
-          </a:bodyPr>
-          <a:lstStyle/>
-          <a:p>
-            <a:pPr algn="l"/>
-            <a:r>
-              <a:rPr lang="en-GB" sz="2200" b="1">
-                <a:solidFill>
-                  <a:srgbClr val="1F4E79"/>
-                </a:solidFill>
-                <a:latin typeface="Segoe UI"/>
-                <a:cs typeface="Segoe UI"/>
-              </a:rPr>
-              <a:t>CRÉDIBLE</a:t>
-            </a:r>
-            <a:endParaRPr lang="en-FR" sz="2200" b="1">
-              <a:solidFill>
-                <a:srgbClr val="1F4E79"/>
-              </a:solidFill>
-              <a:latin typeface="Segoe UI"/>
-              <a:cs typeface="Segoe UI"/>
-            </a:endParaRPr>
-          </a:p>
-        </p:txBody>
-      </p:sp>
-      <p:sp>
-        <p:nvSpPr>
           <p:cNvPr id="23" name="TextBox 22">
             <a:extLst>
               <a:ext uri="{FF2B5EF4-FFF2-40B4-BE49-F238E27FC236}">
@@ -17226,7 +19664,7 @@
     </p:spTree>
     <p:extLst>
       <p:ext uri="{BB962C8B-B14F-4D97-AF65-F5344CB8AC3E}">
-        <p14:creationId xmlns:p14="http://schemas.microsoft.com/office/powerpoint/2010/main" val="2544386870"/>
+        <p14:creationId xmlns:p14="http://schemas.microsoft.com/office/powerpoint/2010/main" val="3274753624"/>
       </p:ext>
     </p:extLst>
   </p:cSld>
@@ -18086,7 +20524,7 @@
     </p:spTree>
     <p:extLst>
       <p:ext uri="{BB962C8B-B14F-4D97-AF65-F5344CB8AC3E}">
-        <p14:creationId xmlns:p14="http://schemas.microsoft.com/office/powerpoint/2010/main" val="2281686066"/>
+        <p14:creationId xmlns:p14="http://schemas.microsoft.com/office/powerpoint/2010/main" val="53064528"/>
       </p:ext>
     </p:extLst>
   </p:cSld>
@@ -18644,7 +21082,27 @@
                 <a:latin typeface="Segoe UI"/>
                 <a:cs typeface="Segoe UI"/>
               </a:rPr>
-              <a:t>Opposables par la Direction Juridique AVANT signature.</a:t>
+              <a:t>Opposables par la Direction Juridique </a:t>
+            </a:r>
+            <a:r>
+              <a:rPr lang="en-GB" sz="1900" b="1" i="1">
+                <a:solidFill>
+                  <a:srgbClr val="3C3C3C"/>
+                </a:solidFill>
+                <a:latin typeface="Segoe UI"/>
+                <a:cs typeface="Segoe UI"/>
+              </a:rPr>
+              <a:t>avant</a:t>
+            </a:r>
+            <a:r>
+              <a:rPr lang="en-GB" sz="1900" i="1">
+                <a:solidFill>
+                  <a:srgbClr val="3C3C3C"/>
+                </a:solidFill>
+                <a:latin typeface="Segoe UI"/>
+                <a:cs typeface="Segoe UI"/>
+              </a:rPr>
+              <a:t> signature.</a:t>
             </a:r>
             <a:endParaRPr lang="en-FR" sz="1900" i="1">
               <a:solidFill>
@@ -18962,7 +21420,7 @@
     </p:spTree>
     <p:extLst>
       <p:ext uri="{BB962C8B-B14F-4D97-AF65-F5344CB8AC3E}">
-        <p14:creationId xmlns:p14="http://schemas.microsoft.com/office/powerpoint/2010/main" val="606520696"/>
+        <p14:creationId xmlns:p14="http://schemas.microsoft.com/office/powerpoint/2010/main" val="1522341628"/>
       </p:ext>
     </p:extLst>
   </p:cSld>
@@ -19466,14 +21924,14 @@
         </p:xfrm>
         <a:graphic>
           <a:graphicData uri="http://schemas.openxmlformats.org/drawingml/2006/chart">
-            <c:chart xmlns:c="http://schemas.openxmlformats.org/drawingml/2006/chart" xmlns:r="http://schemas.openxmlformats.org/officeDocument/2006/relationships" r:id="rId2"/>
+            <c:chart xmlns:c="http://schemas.openxmlformats.org/drawingml/2006/chart" xmlns:r="http://schemas.openxmlformats.org/officeDocument/2006/relationships" r:id="rId3"/>
           </a:graphicData>
         </a:graphic>
       </p:graphicFrame>
     </p:spTree>
     <p:extLst>
       <p:ext uri="{BB962C8B-B14F-4D97-AF65-F5344CB8AC3E}">
-        <p14:creationId xmlns:p14="http://schemas.microsoft.com/office/powerpoint/2010/main" val="3502152009"/>
+        <p14:creationId xmlns:p14="http://schemas.microsoft.com/office/powerpoint/2010/main" val="1537915205"/>
       </p:ext>
     </p:extLst>
   </p:cSld>
@@ -19798,6 +22256,321 @@
 </a:theme>
 </file>
 
+<file path=ppt/theme/theme2.xml><?xml version="1.0" encoding="utf-8"?>
+<a:theme xmlns:a="http://schemas.openxmlformats.org/drawingml/2006/main" name="Office Theme">
+  <a:themeElements>
+    <a:clrScheme name="Office">
+      <a:dk1>
+        <a:sysClr val="windowText" lastClr="000000"/>
+      </a:dk1>
+      <a:lt1>
+        <a:sysClr val="window" lastClr="FFFFFF"/>
+      </a:lt1>
+      <a:dk2>
+        <a:srgbClr val="0E2841"/>
+      </a:dk2>
+      <a:lt2>
+        <a:srgbClr val="E8E8E8"/>
+      </a:lt2>
+      <a:accent1>
+        <a:srgbClr val="156082"/>
+      </a:accent1>
+      <a:accent2>
+        <a:srgbClr val="E97132"/>
+      </a:accent2>
+      <a:accent3>
+        <a:srgbClr val="196B24"/>
+      </a:accent3>
+      <a:accent4>
+        <a:srgbClr val="0F9ED5"/>
+      </a:accent4>
+      <a:accent5>
+        <a:srgbClr val="A02B93"/>
+      </a:accent5>
+      <a:accent6>
+        <a:srgbClr val="4EA72E"/>
+      </a:accent6>
+      <a:hlink>
+        <a:srgbClr val="467886"/>
+      </a:hlink>
+      <a:folHlink>
+        <a:srgbClr val="96607D"/>
+      </a:folHlink>
+    </a:clrScheme>
+    <a:fontScheme name="Office">
+      <a:majorFont>
+        <a:latin typeface="Aptos Display" panose="02110004020202020204"/>
+        <a:ea typeface=""/>
+        <a:cs typeface=""/>
+        <a:font script="Jpan" typeface="游ゴシック Light"/>
+        <a:font script="Hang" typeface="맑은 고딕"/>
+        <a:font script="Hans" typeface="等线 Light"/>
+        <a:font script="Hant" typeface="新細明體"/>
+        <a:font script="Arab" typeface="Times New Roman"/>
+        <a:font script="Hebr" typeface="Times New Roman"/>
+        <a:font script="Thai" typeface="Angsana New"/>
+        <a:font script="Ethi" typeface="Nyala"/>
+        <a:font script="Beng" typeface="Vrinda"/>
+        <a:font script="Gujr" typeface="Shruti"/>
+        <a:font script="Khmr" typeface="MoolBoran"/>
+        <a:font script="Knda" typeface="Tunga"/>
+        <a:font script="Guru" typeface="Raavi"/>
+        <a:font script="Cans" typeface="Euphemia"/>
+        <a:font script="Cher" typeface="Plantagenet Cherokee"/>
+        <a:font script="Yiii" typeface="Microsoft Yi Baiti"/>
+        <a:font script="Tibt" typeface="Microsoft Himalaya"/>
+        <a:font script="Thaa" typeface="MV Boli"/>
+        <a:font script="Deva" typeface="Mangal"/>
+        <a:font script="Telu" typeface="Gautami"/>
+        <a:font script="Taml" typeface="Latha"/>
+        <a:font script="Syrc" typeface="Estrangelo Edessa"/>
+        <a:font script="Orya" typeface="Kalinga"/>
+        <a:font script="Mlym" typeface="Kartika"/>
+        <a:font script="Laoo" typeface="DokChampa"/>
+        <a:font script="Sinh" typeface="Iskoola Pota"/>
+        <a:font script="Mong" typeface="Mongolian Baiti"/>
+        <a:font script="Viet" typeface="Times New Roman"/>
+        <a:font script="Uigh" typeface="Microsoft Uighur"/>
+        <a:font script="Geor" typeface="Sylfaen"/>
+        <a:font script="Armn" typeface="Arial"/>
+        <a:font script="Bugi" typeface="Leelawadee UI"/>
+        <a:font script="Bopo" typeface="Microsoft JhengHei"/>
+        <a:font script="Java" typeface="Javanese Text"/>
+        <a:font script="Lisu" typeface="Segoe UI"/>
+        <a:font script="Mymr" typeface="Myanmar Text"/>
+        <a:font script="Nkoo" typeface="Ebrima"/>
+        <a:font script="Olck" typeface="Nirmala UI"/>
+        <a:font script="Osma" typeface="Ebrima"/>
+        <a:font script="Phag" typeface="Phagspa"/>
+        <a:font script="Syrn" typeface="Estrangelo Edessa"/>
+        <a:font script="Syrj" typeface="Estrangelo Edessa"/>
+        <a:font script="Syre" typeface="Estrangelo Edessa"/>
+        <a:font script="Sora" typeface="Nirmala UI"/>
+        <a:font script="Tale" typeface="Microsoft Tai Le"/>
+        <a:font script="Talu" typeface="Microsoft New Tai Lue"/>
+        <a:font script="Tfng" typeface="Ebrima"/>
+      </a:majorFont>
+      <a:minorFont>
+        <a:latin typeface="Aptos" panose="02110004020202020204"/>
+        <a:ea typeface=""/>
+        <a:cs typeface=""/>
+        <a:font script="Jpan" typeface="游ゴシック"/>
+        <a:font script="Hang" typeface="맑은 고딕"/>
+        <a:font script="Hans" typeface="等线"/>
+        <a:font script="Hant" typeface="新細明體"/>
+        <a:font script="Arab" typeface="Arial"/>
+        <a:font script="Hebr" typeface="Arial"/>
+        <a:font script="Thai" typeface="Cordia New"/>
+        <a:font script="Ethi" typeface="Nyala"/>
+        <a:font script="Beng" typeface="Vrinda"/>
+        <a:font script="Gujr" typeface="Shruti"/>
+        <a:font script="Khmr" typeface="DaunPenh"/>
+        <a:font script="Knda" typeface="Tunga"/>
+        <a:font script="Guru" typeface="Raavi"/>
+        <a:font script="Cans" typeface="Euphemia"/>
+        <a:font script="Cher" typeface="Plantagenet Cherokee"/>
+        <a:font script="Yiii" typeface="Microsoft Yi Baiti"/>
+        <a:font script="Tibt" typeface="Microsoft Himalaya"/>
+        <a:font script="Thaa" typeface="MV Boli"/>
+        <a:font script="Deva" typeface="Mangal"/>
+        <a:font script="Telu" typeface="Gautami"/>
+        <a:font script="Taml" typeface="Latha"/>
+        <a:font script="Syrc" typeface="Estrangelo Edessa"/>
+        <a:font script="Orya" typeface="Kalinga"/>
+        <a:font script="Mlym" typeface="Kartika"/>
+        <a:font script="Laoo" typeface="DokChampa"/>
+        <a:font script="Sinh" typeface="Iskoola Pota"/>
+        <a:font script="Mong" typeface="Mongolian Baiti"/>
+        <a:font script="Viet" typeface="Arial"/>
+        <a:font script="Uigh" typeface="Microsoft Uighur"/>
+        <a:font script="Geor" typeface="Sylfaen"/>
+        <a:font script="Armn" typeface="Arial"/>
+        <a:font script="Bugi" typeface="Leelawadee UI"/>
+        <a:font script="Bopo" typeface="Microsoft JhengHei"/>
+        <a:font script="Java" typeface="Javanese Text"/>
+        <a:font script="Lisu" typeface="Segoe UI"/>
+        <a:font script="Mymr" typeface="Myanmar Text"/>
+        <a:font script="Nkoo" typeface="Ebrima"/>
+        <a:font script="Olck" typeface="Nirmala UI"/>
+        <a:font script="Osma" typeface="Ebrima"/>
+        <a:font script="Phag" typeface="Phagspa"/>
+        <a:font script="Syrn" typeface="Estrangelo Edessa"/>
+        <a:font script="Syrj" typeface="Estrangelo Edessa"/>
+        <a:font script="Syre" typeface="Estrangelo Edessa"/>
+        <a:font script="Sora" typeface="Nirmala UI"/>
+        <a:font script="Tale" typeface="Microsoft Tai Le"/>
+        <a:font script="Talu" typeface="Microsoft New Tai Lue"/>
+        <a:font script="Tfng" typeface="Ebrima"/>
+      </a:minorFont>
+    </a:fontScheme>
+    <a:fmtScheme name="Office">
+      <a:fillStyleLst>
+        <a:solidFill>
+          <a:schemeClr val="phClr"/>
+        </a:solidFill>
+        <a:gradFill rotWithShape="1">
+          <a:gsLst>
+            <a:gs pos="0">
+              <a:schemeClr val="phClr">
+                <a:lumMod val="110000"/>
+                <a:satMod val="105000"/>
+                <a:tint val="67000"/>
+              </a:schemeClr>
+            </a:gs>
+            <a:gs pos="50000">
+              <a:schemeClr val="phClr">
+                <a:lumMod val="105000"/>
+                <a:satMod val="103000"/>
+                <a:tint val="73000"/>
+              </a:schemeClr>
+            </a:gs>
+            <a:gs pos="100000">
+              <a:schemeClr val="phClr">
+                <a:lumMod val="105000"/>
+                <a:satMod val="109000"/>
+                <a:tint val="81000"/>
+              </a:schemeClr>
+            </a:gs>
+          </a:gsLst>
+          <a:lin ang="5400000" scaled="0"/>
+        </a:gradFill>
+        <a:gradFill rotWithShape="1">
+          <a:gsLst>
+            <a:gs pos="0">
+              <a:schemeClr val="phClr">
+                <a:satMod val="103000"/>
+                <a:lumMod val="102000"/>
+                <a:tint val="94000"/>
+              </a:schemeClr>
+            </a:gs>
+            <a:gs pos="50000">
+              <a:schemeClr val="phClr">
+                <a:satMod val="110000"/>
+                <a:lumMod val="100000"/>
+                <a:shade val="100000"/>
+              </a:schemeClr>
+            </a:gs>
+            <a:gs pos="100000">
+              <a:schemeClr val="phClr">
+                <a:lumMod val="99000"/>
+                <a:satMod val="120000"/>
+                <a:shade val="78000"/>
+              </a:schemeClr>
+            </a:gs>
+          </a:gsLst>
+          <a:lin ang="5400000" scaled="0"/>
+        </a:gradFill>
+      </a:fillStyleLst>
+      <a:lnStyleLst>
+        <a:ln w="12700" cap="flat" cmpd="sng" algn="ctr">
+          <a:solidFill>
+            <a:schemeClr val="phClr"/>
+          </a:solidFill>
+          <a:prstDash val="solid"/>
+          <a:miter lim="800000"/>
+        </a:ln>
+        <a:ln w="19050" cap="flat" cmpd="sng" algn="ctr">
+          <a:solidFill>
+            <a:schemeClr val="phClr"/>
+          </a:solidFill>
+          <a:prstDash val="solid"/>
+          <a:miter lim="800000"/>
+        </a:ln>
+        <a:ln w="25400" cap="flat" cmpd="sng" algn="ctr">
+          <a:solidFill>
+            <a:schemeClr val="phClr"/>
+          </a:solidFill>
+          <a:prstDash val="solid"/>
+          <a:miter lim="800000"/>
+        </a:ln>
+      </a:lnStyleLst>
+      <a:effectStyleLst>
+        <a:effectStyle>
+          <a:effectLst/>
+        </a:effectStyle>
+        <a:effectStyle>
+          <a:effectLst/>
+        </a:effectStyle>
+        <a:effectStyle>
+          <a:effectLst>
+            <a:outerShdw blurRad="57150" dist="19050" dir="5400000" algn="ctr" rotWithShape="0">
+              <a:srgbClr val="000000">
+                <a:alpha val="63000"/>
+              </a:srgbClr>
+            </a:outerShdw>
+          </a:effectLst>
+        </a:effectStyle>
+      </a:effectStyleLst>
+      <a:bgFillStyleLst>
+        <a:solidFill>
+          <a:schemeClr val="phClr"/>
+        </a:solidFill>
+        <a:solidFill>
+          <a:schemeClr val="phClr">
+            <a:tint val="95000"/>
+            <a:satMod val="170000"/>
+          </a:schemeClr>
+        </a:solidFill>
+        <a:gradFill rotWithShape="1">
+          <a:gsLst>
+            <a:gs pos="0">
+              <a:schemeClr val="phClr">
+                <a:tint val="93000"/>
+                <a:satMod val="150000"/>
+                <a:shade val="98000"/>
+                <a:lumMod val="102000"/>
+              </a:schemeClr>
+            </a:gs>
+            <a:gs pos="50000">
+              <a:schemeClr val="phClr">
+                <a:tint val="98000"/>
+                <a:satMod val="130000"/>
+                <a:shade val="90000"/>
+                <a:lumMod val="103000"/>
+              </a:schemeClr>
+            </a:gs>
+            <a:gs pos="100000">
+              <a:schemeClr val="phClr">
+                <a:shade val="63000"/>
+                <a:satMod val="120000"/>
+              </a:schemeClr>
+            </a:gs>
+          </a:gsLst>
+          <a:lin ang="5400000" scaled="0"/>
+        </a:gradFill>
+      </a:bgFillStyleLst>
+    </a:fmtScheme>
+  </a:themeElements>
+  <a:objectDefaults>
+    <a:lnDef>
+      <a:spPr/>
+      <a:bodyPr/>
+      <a:lstStyle/>
+      <a:style>
+        <a:lnRef idx="2">
+          <a:schemeClr val="accent1"/>
+        </a:lnRef>
+        <a:fillRef idx="0">
+          <a:schemeClr val="accent1"/>
+        </a:fillRef>
+        <a:effectRef idx="1">
+          <a:schemeClr val="accent1"/>
+        </a:effectRef>
+        <a:fontRef idx="minor">
+          <a:schemeClr val="tx1"/>
+        </a:fontRef>
+      </a:style>
+    </a:lnDef>
+  </a:objectDefaults>
+  <a:extraClrSchemeLst/>
+  <a:extLst>
+    <a:ext uri="{05A4C25C-085E-4340-85A3-A5531E510DB2}">
+      <thm15:themeFamily xmlns:thm15="http://schemas.microsoft.com/office/thememl/2012/main" name="Office Theme" id="{2E142A2C-CD16-42D6-873A-C26D2A0506FA}" vid="{1BDDFF52-6CD6-40A5-AB3C-68EB2F1E4D0A}"/>
+    </a:ext>
+  </a:extLst>
+</a:theme>
+</file>
+
 <file path=ppt/webextensions/taskpanes.xml><?xml version="1.0" encoding="utf-8"?>
 <wetp:taskpanes xmlns:wetp="http://schemas.microsoft.com/office/webextensions/taskpanes/2010/11">
   <wetp:taskpane dockstate="right" visibility="0" width="350" row="0">

--- a/meridian.pptx
+++ b/meridian.pptx
@@ -6005,17 +6005,57 @@
           <a:p>
             <a:pPr algn="l"/>
             <a:r>
-              <a:rPr lang="en-GB" sz="2000">
+              <a:rPr lang="en-GB" sz="2000" dirty="0">
                 <a:solidFill>
                   <a:srgbClr val="8A8F98"/>
                 </a:solidFill>
                 <a:latin typeface="Segoe UI"/>
                 <a:cs typeface="Segoe UI"/>
               </a:rPr>
-              <a:t>Miguel Monereo · Maxime
-Groupe 4 « Translog » · 17 septembre 2026</a:t>
-            </a:r>
-            <a:endParaRPr lang="en-FR" sz="2000">
+              <a:t>Miguel · Maxime
+Groupe 4 « </a:t>
+            </a:r>
+            <a:r>
+              <a:rPr lang="en-GB" sz="2000" dirty="0" err="1">
+                <a:solidFill>
+                  <a:srgbClr val="8A8F98"/>
+                </a:solidFill>
+                <a:latin typeface="Segoe UI"/>
+                <a:cs typeface="Segoe UI"/>
+              </a:rPr>
+              <a:t>Translog</a:t>
+            </a:r>
+            <a:r>
+              <a:rPr lang="en-GB" sz="2000" dirty="0">
+                <a:solidFill>
+                  <a:srgbClr val="8A8F98"/>
+                </a:solidFill>
+                <a:latin typeface="Segoe UI"/>
+                <a:cs typeface="Segoe UI"/>
+              </a:rPr>
+              <a:t> » · 17 </a:t>
+            </a:r>
+            <a:r>
+              <a:rPr lang="en-GB" sz="2000" dirty="0" err="1">
+                <a:solidFill>
+                  <a:srgbClr val="8A8F98"/>
+                </a:solidFill>
+                <a:latin typeface="Segoe UI"/>
+                <a:cs typeface="Segoe UI"/>
+              </a:rPr>
+              <a:t>septembre</a:t>
+            </a:r>
+            <a:r>
+              <a:rPr lang="en-GB" sz="2000" dirty="0">
+                <a:solidFill>
+                  <a:srgbClr val="8A8F98"/>
+                </a:solidFill>
+                <a:latin typeface="Segoe UI"/>
+                <a:cs typeface="Segoe UI"/>
+              </a:rPr>
+              <a:t> 2026</a:t>
+            </a:r>
+            <a:endParaRPr lang="en-FR" sz="2000" dirty="0">
               <a:solidFill>
                 <a:srgbClr val="8A8F98"/>
               </a:solidFill>

--- a/meridian.pptx
+++ b/meridian.pptx
@@ -8,21 +8,21 @@
     <p:notesMasterId r:id="rId26"/>
   </p:notesMasterIdLst>
   <p:sldIdLst>
-    <p:sldId id="293" r:id="rId2"/>
-    <p:sldId id="294" r:id="rId3"/>
-    <p:sldId id="295" r:id="rId4"/>
-    <p:sldId id="296" r:id="rId5"/>
-    <p:sldId id="297" r:id="rId6"/>
-    <p:sldId id="298" r:id="rId7"/>
-    <p:sldId id="299" r:id="rId8"/>
-    <p:sldId id="300" r:id="rId9"/>
-    <p:sldId id="301" r:id="rId10"/>
-    <p:sldId id="302" r:id="rId11"/>
-    <p:sldId id="303" r:id="rId12"/>
-    <p:sldId id="304" r:id="rId13"/>
-    <p:sldId id="305" r:id="rId14"/>
-    <p:sldId id="306" r:id="rId15"/>
-    <p:sldId id="307" r:id="rId16"/>
+    <p:sldId id="308" r:id="rId2"/>
+    <p:sldId id="309" r:id="rId3"/>
+    <p:sldId id="310" r:id="rId4"/>
+    <p:sldId id="311" r:id="rId5"/>
+    <p:sldId id="312" r:id="rId6"/>
+    <p:sldId id="313" r:id="rId7"/>
+    <p:sldId id="314" r:id="rId8"/>
+    <p:sldId id="315" r:id="rId9"/>
+    <p:sldId id="316" r:id="rId10"/>
+    <p:sldId id="317" r:id="rId11"/>
+    <p:sldId id="318" r:id="rId12"/>
+    <p:sldId id="319" r:id="rId13"/>
+    <p:sldId id="320" r:id="rId14"/>
+    <p:sldId id="321" r:id="rId15"/>
+    <p:sldId id="322" r:id="rId16"/>
     <p:sldId id="273" r:id="rId17"/>
     <p:sldId id="274" r:id="rId18"/>
     <p:sldId id="275" r:id="rId19"/>
@@ -130,6 +130,11 @@
       </a:defRPr>
     </a:lvl9pPr>
   </p:defaultTextStyle>
+  <p:extLst>
+    <p:ext uri="{EFAFB233-063F-42B5-8137-9DF3F51BA10A}">
+      <p15:sldGuideLst xmlns:p15="http://schemas.microsoft.com/office/powerpoint/2012/main"/>
+    </p:ext>
+  </p:extLst>
 </p:presentation>
 </file>
 
@@ -1124,25 +1129,31 @@
           <a:p>
             <a:r>
               <a:rPr lang="fr-FR" dirty="0"/>
-              <a:t>Slide 1 · Titre — 00:00 → 00:20 · Miguel</a:t>
+              <a:t>Slide 1 · Titre — 0:00 → 0:20 · Miguel</a:t>
             </a:r>
           </a:p>
           <a:p>
             <a:r>
               <a:rPr lang="fr-FR" dirty="0"/>
-              <a:t>Bonjour. Miguel Monereo, et Maxime. Nous portons la sécurité de l'information chez MERIDIAN Logistique.</a:t>
+              <a:t>Bonjour.</a:t>
             </a:r>
           </a:p>
           <a:p>
             <a:r>
               <a:rPr lang="fr-FR" dirty="0"/>
-              <a:t>Nous avons dix-huit minutes. Nous n'allons pas vous faire un rapport : nous venons vous demander quatre décisions, et vous dire ce qu'elles coûtent.</a:t>
+              <a:t>Miguel Monereo, Maxime. On s'occupe de la sécurité chez MERIDIAN Logistique.</a:t>
             </a:r>
           </a:p>
           <a:p>
             <a:r>
               <a:rPr lang="fr-FR" dirty="0"/>
-              <a:t>[Clic immédiat. Pas de slide « sommaire ».]</a:t>
+              <a:t>On a dix-huit minutes. On ne vient pas vous faire un rapport. On vient vous demander quatre décisions, et vous dire ce qu'elles coûtent.</a:t>
+            </a:r>
+          </a:p>
+          <a:p>
+            <a:r>
+              <a:rPr lang="fr-FR" dirty="0"/>
+              <a:t>[→ clic tout de suite. Pas de slide « sommaire ».]</a:t>
             </a:r>
           </a:p>
         </p:txBody>
@@ -1203,37 +1214,43 @@
           <a:p>
             <a:r>
               <a:rPr lang="fr-FR" dirty="0"/>
-              <a:t>Le plan, maintenant. Treize mesures.</a:t>
+              <a:t>Le plan, maintenant. Treize mesures. On les a rangées par décision, pas par risque. C'est volontaire.</a:t>
             </a:r>
           </a:p>
           <a:p>
             <a:r>
               <a:rPr lang="fr-FR" dirty="0"/>
-              <a:t>Nous les avons rangées par décision, pas par risque. C'est volontaire : VOUS NE SIGNEZ PAS UN SCÉNARIO, VOUS SIGNEZ UN AVENANT, UN BUDGET OU UNE ACCEPTATION.</a:t>
+              <a:t>VOUS NE SIGNEZ PAS UN SCÉNARIO. VOUS SIGNEZ UN AVENANT, UN BUDGET, OU UNE ACCEPTATION.</a:t>
             </a:r>
           </a:p>
           <a:p>
             <a:r>
               <a:rPr lang="fr-FR" dirty="0"/>
-              <a:t>Cinq relèvent de vous : deux avenants contractuels, deux acceptations de risque, et le pilotage du projet avec MERIDIAN Santé.</a:t>
+              <a:t>Cinq relèvent de vous. Un avenant avec le prestataire de maintenance. Un avenant avec l'intégrateur des machines de tri. L'acceptation formelle du risque sur la chaîne du froid. L'acceptation simple sur les données du client. Et le pilotage du projet avec MERIDIAN Santé.</a:t>
             </a:r>
           </a:p>
           <a:p>
             <a:r>
               <a:rPr lang="fr-FR" dirty="0"/>
-              <a:t>Huit relèvent de l'exécution. Et dans ces huit, deux comptent double, parce qu'elles traitent plusieurs risques à la fois. La première : des comptes nominatifs et une authentification forte pour notre prestataire. La seconde : séparer le réseau de bureau du réseau des machines, sur les six sites.</a:t>
+              <a:t>Huit relèvent de l'exécution. Et dans ces huit, deux comptent double. Elles traitent plusieurs risques à la fois.</a:t>
             </a:r>
           </a:p>
           <a:p>
             <a:r>
               <a:rPr lang="fr-FR" dirty="0"/>
-              <a:t>Si vous ne deviez en financer que deux, ce sont ces deux-là.</a:t>
+              <a:t>La première : des comptes nominatifs et une authentification forte pour le prestataire de maintenance. La deuxième : séparer le réseau de bureau du réseau des machines de tri, sur les six sites.</a:t>
             </a:r>
           </a:p>
           <a:p>
             <a:r>
               <a:rPr lang="fr-FR" dirty="0"/>
-              <a:t>° Chaque mesure a un responsable nommé et une date. La plus proche est en novembre, la plus lointaine en septembre 2027.</a:t>
+              <a:t>Si vous ne deviez en financer que deux, c'est celles-là.</a:t>
+            </a:r>
+          </a:p>
+          <a:p>
+            <a:r>
+              <a:rPr lang="fr-FR" dirty="0"/>
+              <a:t>[si le temps] Chaque mesure a un responsable nommé et une date. La plus proche, c'est le test de restauration, en novembre. La plus lointaine, c'est la mise par écrit du savoir-faire des six entrepôts, en septembre 2027.</a:t>
             </a:r>
           </a:p>
         </p:txBody>
@@ -1294,31 +1311,37 @@
           <a:p>
             <a:r>
               <a:rPr lang="fr-FR" dirty="0"/>
-              <a:t>Et voici ce que cela coûte.</a:t>
+              <a:t>Et voilà ce que ça coûte.</a:t>
             </a:r>
           </a:p>
           <a:p>
             <a:r>
               <a:rPr lang="fr-FR" dirty="0"/>
-              <a:t>À gauche, ce que nous demandons : quatre-vingt-deux mille euros par an, treize mesures. Un coût certain, annuel, borné.</a:t>
+              <a:t>À gauche, ce qu'on demande. Quatre-vingt-deux mille euros par an. Treize mesures. Un coût certain, annuel, plafonné.</a:t>
             </a:r>
           </a:p>
           <a:p>
             <a:r>
               <a:rPr lang="fr-FR" dirty="0"/>
-              <a:t>À droite, ce que nous évitons. Douze mille euros pour une seule journée d'arrêt — déjà le tiers du budget annuel du plan, pour une seule journée de l'accident que ce plan traite. Et plusieurs millions si l'attaque aboutit.</a:t>
+              <a:t>À droite, ce qu'on évite. Douze mille euros pour une seule journée d'arrêt du système d'entrepôt. Déjà le tiers du budget annuel du plan — pour une seule journée de l'arrêt que ce plan traite. Et plusieurs millions si le rançongiciel aboutit.</a:t>
             </a:r>
           </a:p>
           <a:p>
             <a:r>
               <a:rPr lang="fr-FR" dirty="0"/>
-              <a:t>La phrase que je voudrais que vous reteniez est celle-ci. [Pause.] UN COÛT CERTAIN, ANNUEL ET BORNÉ, CONTRE UNE PERTE PLAUSIBLE ET NON BORNÉE. UNE PERTE QUI SE RÉALISE EN UN JOUR DE PLUS QUE LE PLAN N'EN COÛTE EN UN AN.</a:t>
+              <a:t>La phrase que j'aimerais que vous gardiez, c'est celle-là. [→ pause.]</a:t>
             </a:r>
           </a:p>
           <a:p>
             <a:r>
               <a:rPr lang="fr-FR" dirty="0"/>
-              <a:t>° Un mot sur la solidité de ces chiffres. Le douze mille est contractuel. La borne haute est un ordre de grandeur, et nous l'assumons comme tel — c'est justement pour la remplacer par un chiffre mesuré que nous demandons le test de novembre.</a:t>
+              <a:t>UN COÛT CERTAIN, ANNUEL, PLAFONNÉ — CONTRE UNE PERTE PROBABLE, ET SANS PLAFOND. UNE PERTE QUI SE RÉALISE EN UN JOUR DE PLUS QUE LE PLAN NE COÛTE EN UN AN.</a:t>
+            </a:r>
+          </a:p>
+          <a:p>
+            <a:r>
+              <a:rPr lang="fr-FR" dirty="0"/>
+              <a:t>[si le temps] Un mot sur la solidité des chiffres. Le douze mille est contractuel. La borne haute est un ordre de grandeur, et on l'assume comme tel. C'est justement pour la remplacer par un chiffre mesuré qu'on demande le test de novembre.</a:t>
             </a:r>
           </a:p>
         </p:txBody>
@@ -1373,37 +1396,49 @@
           <a:p>
             <a:r>
               <a:rPr lang="fr-FR" dirty="0"/>
-              <a:t>Slide 12 · Ce qui reste ouvert — 13:50 → 14:35 · Miguel</a:t>
+              <a:t>Slide 12 · Ce qui reste ouvert — 13:50 → 14:35 · Miguel (checkpoint 14:35)</a:t>
             </a:r>
           </a:p>
           <a:p>
             <a:r>
               <a:rPr lang="fr-FR" dirty="0"/>
-              <a:t>Trois choses n'ont pas de réponse aujourd'hui. Chacune porte une date. Je préfère vous les donner plutôt que d'attendre que vous les trouviez.</a:t>
+              <a:t>Trois choses n'ont pas de réponse aujourd'hui. Chacune a une date. Je préfère vous les donner plutôt que d'attendre que vous les trouviez.</a:t>
             </a:r>
           </a:p>
           <a:p>
             <a:r>
               <a:rPr lang="fr-FR" dirty="0"/>
-              <a:t>Un : combien de temps pour repartir après un arrêt. Nous ne le savons pas. Test de restauration, 14 novembre.</a:t>
+              <a:t>Un. Combien de temps il nous faut pour redémarrer le système d'entrepôt après un arrêt. On ne le sait pas. Ça se lève au test de restauration, le 14 novembre.</a:t>
             </a:r>
           </a:p>
           <a:p>
             <a:r>
               <a:rPr lang="fr-FR" dirty="0"/>
-              <a:t>Deux : le risque porté par l'intégrateur de nos machines reste à moyen, et il ne descendra pas plus bas, quel que soit le budget. ° C'est une limite de ce type de partenaire, pas un échec du plan. Revue sous douze mois.</a:t>
+              <a:t>Deux. Le risque qui passe par l'intégrateur de nos machines de tri — celui qui est noté douze — reste à moyen. Et il ne descendra pas plus bas, quel que soit le budget.</a:t>
             </a:r>
           </a:p>
           <a:p>
             <a:r>
               <a:rPr lang="fr-FR" dirty="0"/>
-              <a:t>Trois : la reprise du flux vers MERIDIAN Santé n'atteint sa cible qu'en fin de projet, en septembre 2027. D'ici là, le risque reste élevé dans les faits.</a:t>
+              <a:t>[si le temps] C'est une limite de ce type de partenaire, pas un échec du plan.</a:t>
             </a:r>
           </a:p>
           <a:p>
             <a:r>
               <a:rPr lang="fr-FR" dirty="0"/>
-              <a:t>[Passage de parole.] Maxime conclut.</a:t>
+              <a:t>Ça se revoit dans douze mois au plus tard.</a:t>
+            </a:r>
+          </a:p>
+          <a:p>
+            <a:r>
+              <a:rPr lang="fr-FR" dirty="0"/>
+              <a:t>Trois. La reprise du flux vers MERIDIAN Santé n'atteint sa cible qu'au sixième et dernier jalon du projet. En septembre 2027. D'ici là, le risque reste élevé dans les faits.</a:t>
+            </a:r>
+          </a:p>
+          <a:p>
+            <a:r>
+              <a:rPr lang="fr-FR" dirty="0"/>
+              <a:t>[→ passage de parole.] Maxime conclut.</a:t>
             </a:r>
           </a:p>
         </p:txBody>
@@ -1464,43 +1499,67 @@
           <a:p>
             <a:r>
               <a:rPr lang="fr-FR" dirty="0"/>
-              <a:t>Deux périmètres, et c'est un choix.</a:t>
+              <a:t>Deux périmètres. Et c'est un choix.</a:t>
             </a:r>
           </a:p>
           <a:p>
             <a:r>
               <a:rPr lang="fr-FR" dirty="0"/>
-              <a:t>Le système de management couvre la filiale entière : six exclusions nommées, quatre interfaces déclarées.</a:t>
+              <a:t>Le système de management couvre la filiale entière. Six exclusions nommées. Quatre interfaces déclarées.</a:t>
             </a:r>
           </a:p>
           <a:p>
             <a:r>
               <a:rPr lang="fr-FR" dirty="0"/>
-              <a:t>Le périmètre de la première certification est plus étroit : seulement les services que reçoit notre client pharmaceutique. Avec une exception écrite — l'automatisation du site E4 en est exclue, jusqu'au 14 juin 2027.</a:t>
+              <a:t>[si le temps] Les six exclusions, pour que vous sachiez ce qu'on ne couvre pas : les trois autres filiales, la paie qui est tenue par le holding, l'hébergement du logiciel des sondes chez son fournisseur, le centre de supervision du groupe, le flux d'urgence qui appartient à MERIDIAN Santé, et la flotte de véhicules.</a:t>
             </a:r>
           </a:p>
           <a:p>
             <a:r>
               <a:rPr lang="fr-FR" dirty="0"/>
-              <a:t>Pourquoi ? Parce que ce site sert ce client, et qu'il porte aussi des machines de tri sur un réseau qui n'est pas séparé du reste. CERTIFIER CE PÉRIMÈTRE AUJOURD'HUI, CE SERAIT CERTIFIER CE DÉFAUT. L'exclusion tombera sur preuve, pas à la date.</a:t>
+              <a:t>Le périmètre de la première certification est plus étroit. Seulement les services que reçoit notre client pharmaceutique. Avec une exception écrite : l'automatisation du site E4 en est exclue. Jusqu'au 14 juin 2027.</a:t>
             </a:r>
           </a:p>
           <a:p>
             <a:r>
               <a:rPr lang="fr-FR" dirty="0"/>
-              <a:t>° Et nous ne faisons pas attendre le client dix-huit mois : nous lui répondons dès maintenant, au titre d'une démarche documentée équivalente. Le référentiel, l'audit, le plan chiffré. Les trois pièces existent.</a:t>
+              <a:t>Pourquoi ? Parce que le site E4 sert ce client, et qu'il porte aussi des machines de tri — le numéro cinq de la liste de Miguel — sur un réseau qui n'est pas séparé du reste.</a:t>
             </a:r>
           </a:p>
           <a:p>
             <a:r>
               <a:rPr lang="fr-FR" dirty="0"/>
-              <a:t>Dernier point : comment saurez-vous que tout cela tient ? Sept indicateurs, un point trimestriel, une revue annuelle. Chacun se présente sous la même forme : CE CHIFFRE VOUS DIT SI… ET S'IL FRANCHIT LE SEUIL, LA DÉCISION À PRENDRE EST…</a:t>
+              <a:t>CERTIFIER CE PÉRIMÈTRE AUJOURD'HUI, CE SERAIT CERTIFIER CE DÉFAUT.</a:t>
             </a:r>
           </a:p>
           <a:p>
             <a:r>
               <a:rPr lang="fr-FR" dirty="0"/>
-              <a:t>Un seul exemple, celui qui commande cette page. La séparation des réseaux : zéro entrepôt sur six aujourd'hui. Ce chiffre vous dit si l'exclusion du site E4 peut tomber au 14 juin 2027. S'il n'est pas à six sur six à cette date, la décision à prendre est de reporter la certification, ou de la lancer sans ce site.</a:t>
+              <a:t>Et l'exclusion tombera sur preuve. Pas à la date.</a:t>
+            </a:r>
+          </a:p>
+          <a:p>
+            <a:r>
+              <a:rPr lang="fr-FR" dirty="0"/>
+              <a:t>[si le temps] On ne fait pas attendre le client dix-huit mois pour autant. On lui répond dès maintenant, au titre d'une démarche documentée équivalente. Le référentiel, l'audit, le plan chiffré. Les trois pièces existent.</a:t>
+            </a:r>
+          </a:p>
+          <a:p>
+            <a:r>
+              <a:rPr lang="fr-FR" dirty="0"/>
+              <a:t>Dernier point. Comment vous saurez que tout ça tient ? Sept indicateurs. Un point trimestriel. Une revue annuelle.</a:t>
+            </a:r>
+          </a:p>
+          <a:p>
+            <a:r>
+              <a:rPr lang="fr-FR" dirty="0"/>
+              <a:t>Chacun se présente de la même façon : CE CHIFFRE VOUS DIT SI… ET S'IL PASSE LE SEUIL, LA DÉCISION À PRENDRE EST…</a:t>
+            </a:r>
+          </a:p>
+          <a:p>
+            <a:r>
+              <a:rPr lang="fr-FR" dirty="0"/>
+              <a:t>Un seul exemple : l'indicateur qui commande cette page. L'avancement de la séparation des réseaux. Zéro entrepôt sur six aujourd'hui. Ce chiffre vous dit si l'exclusion du site E4 peut tomber au 14 juin 2027. S'il n'est pas à six sur six à cette date, la décision, c'est : ou on reporte la certification, ou on la lance sans ce site.</a:t>
             </a:r>
           </a:p>
         </p:txBody>
@@ -1555,43 +1614,67 @@
           <a:p>
             <a:r>
               <a:rPr lang="fr-FR" dirty="0"/>
-              <a:t>Slide 14 · Ce que nous vous demandons de signer — 16:05 → 17:20 · les deux (pas de coupe)</a:t>
+              <a:t>Slide 14 · Ce qu'on vous demande de signer — 16:05 → 17:20 · Miguel puis Maxime</a:t>
             </a:r>
           </a:p>
           <a:p>
             <a:r>
               <a:rPr lang="fr-FR" dirty="0"/>
-              <a:t>MIGUEL : Voilà ce que nous vous demandons de signer. Quatre décisions, pas une de plus.</a:t>
+              <a:t>MIGUEL :</a:t>
             </a:r>
           </a:p>
           <a:p>
             <a:r>
               <a:rPr lang="fr-FR" dirty="0"/>
-              <a:t>Un. Confirmer la règle d'acceptation du risque que j'ai énoncée tout à l'heure. C'est la direction générale qui la fixe, le conseil l'approuve. Sans elle, nos treize mesures n'ont plus d'ordre de priorité.</a:t>
+              <a:t>Voilà ce qu'on vous demande de signer. Quatre décisions. Pas une de plus.</a:t>
             </a:r>
           </a:p>
           <a:p>
             <a:r>
               <a:rPr lang="fr-FR" dirty="0"/>
-              <a:t>Deux. Financer le plan : quatre-vingt-deux mille euros par an, sur l'exercice 2027.</a:t>
+              <a:t>Un. Confirmer la règle d'acceptation du risque que j'ai donnée tout à l'heure. C'est la direction générale qui la fixe. Le conseil l'approuve. Sans elle, nos treize mesures n'ont plus d'ordre de priorité.</a:t>
             </a:r>
           </a:p>
           <a:p>
             <a:r>
               <a:rPr lang="fr-FR" dirty="0"/>
-              <a:t>MAXIME : Trois. Autoriser deux avenants contractuels — avec notre prestataire de maintenance, et avec l'intégrateur de nos machines. AVANT LE RENOUVELLEMENT DE NOVEMBRE. Après, la fenêtre se referme : les mêmes exigences se paient, ou ne s'obtiennent pas.</a:t>
+              <a:t>Deux. Financer le plan. Quatre-vingt-deux mille euros par an. Sur l'exercice 2027.</a:t>
             </a:r>
           </a:p>
           <a:p>
             <a:r>
               <a:rPr lang="fr-FR" dirty="0"/>
-              <a:t>Quatre. Arrêter le périmètre de la première certification, tel que je viens de le décrire.</a:t>
+              <a:t>MAXIME :</a:t>
             </a:r>
           </a:p>
           <a:p>
             <a:r>
               <a:rPr lang="fr-FR" dirty="0"/>
-              <a:t>Deux signatures les accompagnent : l'acceptation formelle du risque sur la chaîne du froid, et une acceptation simple sur les données d'expédition du client. Et je le redis : AUCUNE DÉROGATION DEMANDÉE.</a:t>
+              <a:t>Trois. Autoriser deux avenants. Un avec le prestataire qui maintient notre système d'entrepôt. Un avec l'intégrateur de nos machines de tri. AVANT LE RENOUVELLEMENT DE NOVEMBRE.</a:t>
+            </a:r>
+          </a:p>
+          <a:p>
+            <a:r>
+              <a:rPr lang="fr-FR" dirty="0"/>
+              <a:t>Après, la fenêtre se referme. Les mêmes exigences se paient, ou ne s'obtiennent pas.</a:t>
+            </a:r>
+          </a:p>
+          <a:p>
+            <a:r>
+              <a:rPr lang="fr-FR" dirty="0"/>
+              <a:t>Quatre. Arrêter le périmètre de la première certification : les services du client pharmaceutique, hors automatisation du site E4 jusqu'au 14 juin 2027.</a:t>
+            </a:r>
+          </a:p>
+          <a:p>
+            <a:r>
+              <a:rPr lang="fr-FR" dirty="0"/>
+              <a:t>Deux signatures les accompagnent : l'acceptation formelle du risque sur la chaîne du froid, et une acceptation simple sur les données d'expédition du client.</a:t>
+            </a:r>
+          </a:p>
+          <a:p>
+            <a:r>
+              <a:rPr lang="fr-FR" dirty="0"/>
+              <a:t>Et je le redis : AUCUNE DÉROGATION DEMANDÉE.</a:t>
             </a:r>
           </a:p>
         </p:txBody>
@@ -1646,49 +1729,55 @@
           <a:p>
             <a:r>
               <a:rPr lang="fr-FR" dirty="0"/>
-              <a:t>Slide 15 · La limite — 17:20 → 18:00 · Maxime (pas de coupe)</a:t>
+              <a:t>Slide 15 · La limite — 17:20 → 18:00 · Maxime</a:t>
             </a:r>
           </a:p>
           <a:p>
             <a:r>
               <a:rPr lang="fr-FR" dirty="0"/>
-              <a:t>Un dernier mot, et c'est une limite que je préfère poser moi-même.</a:t>
+              <a:t>Un dernier mot. Et c'est une limite que je préfère poser moi-même.</a:t>
             </a:r>
           </a:p>
           <a:p>
             <a:r>
               <a:rPr lang="fr-FR" dirty="0"/>
-              <a:t>UN DOSSIER PROUVE UNE MÉTHODE. IL NE PROUVE JAMAIS LA SÉCURITÉ. Des serveurs mal configurés se moquent de la qualité du classeur.</a:t>
+              <a:t>UN DOSSIER PROUVE UNE MÉTHODE. IL NE PROUVE JAMAIS LA SÉCURITÉ.</a:t>
             </a:r>
           </a:p>
           <a:p>
             <a:r>
               <a:rPr lang="fr-FR" dirty="0"/>
-              <a:t>Ce que nous venons d'établir : où nous en sommes, ce qui nous menace, et ce que coûte le traitement. Ce que nous n'avons pas établi : que nous sommes protégés.</a:t>
+              <a:t>Des serveurs mal configurés se moquent de la qualité du classeur.</a:t>
             </a:r>
           </a:p>
           <a:p>
             <a:r>
               <a:rPr lang="fr-FR" dirty="0"/>
-              <a:t>° Notre propre mesure est une auto-évaluation, pas un audit indépendant, et notre dossier le dit.</a:t>
+              <a:t>Ce qu'on vient d'établir : où on en est, ce qui nous menace, ce que coûte le traitement. Ce qu'on n'a pas établi : qu'on est protégés.</a:t>
             </a:r>
           </a:p>
           <a:p>
             <a:r>
               <a:rPr lang="fr-FR" dirty="0"/>
-              <a:t>Trois dates transformeront cette méthode en preuve. Le 14 novembre, le test de restauration. Le 14 janvier, les comptes nominatifs de notre prestataire. Le 14 juin, la séparation des réseaux.</a:t>
+              <a:t>[si le temps] Notre propre mesure est une auto-évaluation, pas un audit indépendant. Et notre dossier le dit.</a:t>
             </a:r>
           </a:p>
           <a:p>
             <a:r>
               <a:rPr lang="fr-FR" dirty="0"/>
-              <a:t>Nous prenons vos questions.</a:t>
+              <a:t>Trois dates transformeront cette méthode en preuve. Le 14 novembre, le test de restauration du système d'entrepôt. Le 14 janvier, les comptes nominatifs du prestataire de maintenance. Le 14 juin, la séparation du réseau de bureau et du réseau des machines de tri.</a:t>
             </a:r>
           </a:p>
           <a:p>
             <a:r>
               <a:rPr lang="fr-FR" dirty="0"/>
-              <a:t>[La slide 15 reste affichée pendant les douze minutes de questions.]</a:t>
+              <a:t>On prend vos questions.</a:t>
+            </a:r>
+          </a:p>
+          <a:p>
+            <a:r>
+              <a:rPr lang="fr-FR" dirty="0"/>
+              <a:t>[→ la slide 15 reste affichée pendant les douze minutes de questions.]</a:t>
             </a:r>
           </a:p>
         </p:txBody>
@@ -1743,49 +1832,61 @@
           <a:p>
             <a:r>
               <a:rPr lang="fr-FR" dirty="0"/>
-              <a:t>Slide 2 · Le message en une minute — 00:20 → 01:05 · Miguel</a:t>
+              <a:t>Slide 2 · Le message — 0:20 → 1:05 · Miguel</a:t>
             </a:r>
           </a:p>
           <a:p>
             <a:r>
               <a:rPr lang="fr-FR" dirty="0"/>
-              <a:t>Je commence par le résumé, pour que vous l'ayez tout de suite.</a:t>
+              <a:t>Je vous donne la fin tout de suite.</a:t>
             </a:r>
           </a:p>
           <a:p>
             <a:r>
               <a:rPr lang="fr-FR" dirty="0"/>
-              <a:t>Quarante pour cent de tout ce que le groupe expédie passe par un seul système informatique. Sur un seul site. Et nous n'avons jamais vérifié que nous savions le redémarrer.</a:t>
+              <a:t>Quarante pour cent de ce que le groupe expédie passe par un seul système : celui qui gère nos six entrepôts. Il est sur un seul site, sans secours. Et on n'a jamais vérifié qu'on savait le redémarrer.</a:t>
             </a:r>
           </a:p>
           <a:p>
             <a:r>
               <a:rPr lang="fr-FR" dirty="0"/>
-              <a:t>Une journée d'arrêt nous coûte douze mille euros de pénalités. Ce n'est pas une estimation, c'est notre contrat.</a:t>
+              <a:t>Une journée d'arrêt, ça nous coûte douze mille euros de pénalités. Ce n'est pas une estimation. C'est écrit dans notre contrat.</a:t>
             </a:r>
           </a:p>
           <a:p>
             <a:r>
               <a:rPr lang="fr-FR" dirty="0"/>
-              <a:t>° En 2017, la même situation a coûté près de trois cents millions de dollars à un transporteur européen ; Maxime y reviendra.</a:t>
+              <a:t>[si le temps] En 2017, la même situation a coûté trois cents millions de dollars à un transporteur européen. Maxime y reviendra.</a:t>
             </a:r>
           </a:p>
           <a:p>
             <a:r>
               <a:rPr lang="fr-FR" dirty="0"/>
-              <a:t>Nous venons vous demander quatre-vingt-deux mille euros par an. LE PLAN COMPLET COÛTE MOINS DE SEPT JOURS D'ARRÊT.</a:t>
+              <a:t>On vient vous demander quatre-vingt-deux mille euros par an.</a:t>
             </a:r>
           </a:p>
           <a:p>
             <a:r>
               <a:rPr lang="fr-FR" dirty="0"/>
-              <a:t>Voilà la décision que nous vous apportons. Les quinze minutes qui suivent l'expliquent.</a:t>
+              <a:t>LE PLAN COMPLET COÛTE MOINS DE SEPT JOURS D'ARRÊT.</a:t>
             </a:r>
           </a:p>
           <a:p>
             <a:r>
               <a:rPr lang="fr-FR" dirty="0"/>
-              <a:t>[Pause d'une seconde. Puis :] Commençons par ce que nous protégeons.</a:t>
+              <a:t>Voilà la décision. Les quinze minutes qui suivent l'expliquent.</a:t>
+            </a:r>
+          </a:p>
+          <a:p>
+            <a:r>
+              <a:rPr lang="fr-FR" dirty="0"/>
+              <a:t>[→ une seconde de pause.]</a:t>
+            </a:r>
+          </a:p>
+          <a:p>
+            <a:r>
+              <a:rPr lang="fr-FR" dirty="0"/>
+              <a:t>Commençons par ce qu'on protège.</a:t>
             </a:r>
           </a:p>
         </p:txBody>
@@ -1840,55 +1941,85 @@
           <a:p>
             <a:r>
               <a:rPr lang="fr-FR" dirty="0"/>
-              <a:t>Slide 3 · Les cinq éléments critiques — 01:05 → 03:00 · Miguel</a:t>
+              <a:t>Slide 3 · Ce qu'on protège — 1:05 → 3:00 · Miguel</a:t>
             </a:r>
           </a:p>
           <a:p>
             <a:r>
               <a:rPr lang="fr-FR" dirty="0"/>
-              <a:t>Première question : qu'est-ce que nous protégeons ?</a:t>
+              <a:t>Première question : qu'est-ce qu'on protège ?</a:t>
             </a:r>
           </a:p>
           <a:p>
             <a:r>
               <a:rPr lang="fr-FR" dirty="0"/>
-              <a:t>Nous avons cartographié la filiale. Quatre activités. Treize équipements ou logiciels qui les font tourner. Et parmi eux, cinq qui comptent plus que les autres.</a:t>
+              <a:t>On a fait la carte de la filiale. Quatre activités. Treize outils et équipements pour les faire tourner. Et parmi eux, cinq qui comptent plus que les autres.</a:t>
             </a:r>
           </a:p>
           <a:p>
             <a:r>
               <a:rPr lang="fr-FR" dirty="0"/>
-              <a:t>Un mot sur la méthode, parce qu'elle vaut plus que la liste : NOUS AVONS ÉCRIT LE CRITÈRE DE CLASSEMENT AVANT DE CLASSER. Quatre conditions. L'activité qu'il porte est vitale. Si on y touche, ça dépasse la filiale. La faiblesse est connue et réelle aujourd'hui. Et il n'existe pas de remplacement rapide.</a:t>
+              <a:t>Un mot sur la méthode — elle vaut plus que la liste. ON A ÉCRIT LA RÈGLE DU CLASSEMENT AVANT DE CLASSER.</a:t>
             </a:r>
           </a:p>
           <a:p>
             <a:r>
               <a:rPr lang="fr-FR" dirty="0"/>
-              <a:t>Deux choses ressortent, et ce sont elles que je voudrais que vous reteniez.</a:t>
+              <a:t>Quatre conditions. L'activité derrière est vitale. Si on y touche, ça dépasse la filiale. La faiblesse est connue, et elle est réelle aujourd'hui. Et il n'y a pas de remplacement rapide.</a:t>
             </a:r>
           </a:p>
           <a:p>
             <a:r>
               <a:rPr lang="fr-FR" dirty="0"/>
-              <a:t>La première, c'est la portée. Ces cinq-là débordent la filiale. Le premier, notre système d'entrepôt, arrête quarante pour cent du volume du groupe. ° Le quatrième, le logiciel des sondes de température, porte à la fois la chaîne du froid et la preuve que nous devons à notre client pharmaceutique.</a:t>
+              <a:t>Deux choses ressortent. Ce sont les deux que j'aimerais que vous gardiez.</a:t>
             </a:r>
           </a:p>
           <a:p>
             <a:r>
               <a:rPr lang="fr-FR" dirty="0"/>
-              <a:t>La deuxième est plus inhabituelle. [Pause.] Le troisième de cette liste n'est ni un serveur, ni un logiciel. C'est une personne. Notre responsable d'exploitation est le seul à connaître l'organisation des six entrepôts. Rien n'est écrit. C'EST LE SEUL ÉLÉMENT DE CETTE LISTE QU'AUCUN BUDGET NE REMPLACE APRÈS COUP.</a:t>
+              <a:t>La première, c'est la portée. Ces cinq-là débordent la filiale. Numéro un, le système de gestion d'entrepôt : s'il s'arrête, c'est quarante pour cent du volume du groupe.</a:t>
             </a:r>
           </a:p>
           <a:p>
             <a:r>
               <a:rPr lang="fr-FR" dirty="0"/>
-              <a:t>° Et pour vous montrer que ce classement a vraiment été fait : nos trois cents scannettes n'y sont pas, parce qu'elles sont nombreuses, donc remplaçables. Le local serveur non plus : s'il chauffe, on le voit venir.</a:t>
+              <a:t>[si le temps] Numéro quatre, le logiciel des sondes de température : il porte deux choses à la fois. La chaîne du froid, et la preuve qu'on doit à notre client pharmaceutique.</a:t>
             </a:r>
           </a:p>
           <a:p>
             <a:r>
               <a:rPr lang="fr-FR" dirty="0"/>
-              <a:t>Voilà ce que nous protégeons. La question suivante, c'est : est-ce que c'est protégé ?</a:t>
+              <a:t>La deuxième est plus surprenante. [→ pause.]</a:t>
+            </a:r>
+          </a:p>
+          <a:p>
+            <a:r>
+              <a:rPr lang="fr-FR" dirty="0"/>
+              <a:t>Numéro trois : notre responsable d'exploitation. Ce n'est ni un serveur, ni un logiciel. C'est quelqu'un. Il est le seul à connaître l'organisation des six entrepôts. Rien n'est écrit.</a:t>
+            </a:r>
+          </a:p>
+          <a:p>
+            <a:r>
+              <a:rPr lang="fr-FR" dirty="0"/>
+              <a:t>C'EST LE SEUL DE LA LISTE QU'AUCUN BUDGET NE REMPLACE APRÈS COUP.</a:t>
+            </a:r>
+          </a:p>
+          <a:p>
+            <a:r>
+              <a:rPr lang="fr-FR" dirty="0"/>
+              <a:t>[si le temps] Les deux autres, je les cite parce qu'ils reviennent dans une minute. Numéro deux, le compte technique qui pilote nos machines de tri : même mot de passe sur les six sites depuis 2019. Numéro cinq, les machines de tri elles-mêmes.</a:t>
+            </a:r>
+          </a:p>
+          <a:p>
+            <a:r>
+              <a:rPr lang="fr-FR" dirty="0"/>
+              <a:t>[si le temps] Et pour vous montrer qu'on a vraiment trié : nos trois cents scannettes n'y sont pas, elles sont nombreuses donc remplaçables. Le local serveur non plus — s'il chauffe, on le voit venir.</a:t>
+            </a:r>
+          </a:p>
+          <a:p>
+            <a:r>
+              <a:rPr lang="fr-FR" dirty="0"/>
+              <a:t>Voilà ce qu'on protège. Question suivante : est-ce que c'est protégé ?</a:t>
             </a:r>
           </a:p>
         </p:txBody>
@@ -1943,55 +2074,73 @@
           <a:p>
             <a:r>
               <a:rPr lang="fr-FR" dirty="0"/>
-              <a:t>Slide 4 · Ce que la mesure a donné — 03:00 → 05:00 · Miguel</a:t>
+              <a:t>Slide 4 · Ce que la mesure a donné — 3:00 → 5:00 · Miguel (checkpoint 5:00)</a:t>
             </a:r>
           </a:p>
           <a:p>
             <a:r>
               <a:rPr lang="fr-FR" dirty="0"/>
-              <a:t>Nous l'avons mesuré, pour la première fois, avec le référentiel que vous avez adopté.</a:t>
+              <a:t>On l'a mesuré. Pour la première fois. Avec le référentiel que vous avez adopté.</a:t>
             </a:r>
           </a:p>
           <a:p>
             <a:r>
               <a:rPr lang="fr-FR" dirty="0"/>
-              <a:t>Le résultat tient en une phrase : DES FONDATIONS ÉCRITES, UNE APPLICATION NON PROUVÉE, DES ANGLES MORTS QUE NOUS NOMMONS.</a:t>
+              <a:t>Le résultat tient en une phrase. ON A DES FONDATIONS ÉCRITES, ON N'A JAMAIS PROUVÉ QU'ELLES S'APPLIQUENT, ET ON A DES TROUS QU'ON NOMME.</a:t>
             </a:r>
           </a:p>
           <a:p>
             <a:r>
               <a:rPr lang="fr-FR" dirty="0"/>
-              <a:t>Sur ce que nous avons regardé, presque rien n'est en place. Je dis bien : sur ce que nous avons regardé. ° Jamais « nous sommes conformes à neuf pour cent » — la différence compte devant un client, et la seconde formule se retournerait contre nous au premier contrôle.</a:t>
+              <a:t>Sur ce qu'on a regardé, presque rien n'est en place. Je dis bien : sur ce qu'on a regardé.</a:t>
             </a:r>
           </a:p>
           <a:p>
             <a:r>
               <a:rPr lang="fr-FR" dirty="0"/>
-              <a:t>Mais le vrai message de cette page n'est pas ce chiffre. [Pause. Désigner la ligne.] Regardez la troisième ligne. Le domaine physique : zéro exigence examinée sur quatorze. Zéro. Alors que nous exploitons six entrepôts, des chambres froides, et un seul local serveur.</a:t>
+              <a:t>[si le temps] Jamais « on est conforme à neuf pour cent ». La nuance compte devant un client — la deuxième formule se retourne contre nous au premier contrôle.</a:t>
             </a:r>
           </a:p>
           <a:p>
             <a:r>
               <a:rPr lang="fr-FR" dirty="0"/>
-              <a:t>Ce n'est pas un mauvais résultat. C'est un trou dans notre propre évaluation. Et il n'apparaît que parce que nous avons détaillé domaine par domaine. Le total seul le cachait.</a:t>
+              <a:t>Mais le vrai message de cette page, ce n'est pas ce chiffre. [→ pause. Montrer la ligne surlignée.]</a:t>
             </a:r>
           </a:p>
           <a:p>
             <a:r>
               <a:rPr lang="fr-FR" dirty="0"/>
-              <a:t>Deuxième chose : les deux problèmes les plus graves touchent le même système. Celui de la page précédente, le premier de la liste. D'un côté, le réseau de bureau et le réseau des machines ne sont pas séparés. De l'autre, un compte d'administration est partagé avec notre prestataire, et nous ne savons pas combien de personnes s'en servent.</a:t>
+              <a:t>Regardez la ligne « Physique ». Zéro exigence examinée sur quatorze. Zéro. Alors qu'on exploite six entrepôts, des chambres froides, et un seul local serveur.</a:t>
             </a:r>
           </a:p>
           <a:p>
             <a:r>
               <a:rPr lang="fr-FR" dirty="0"/>
-              <a:t>Enfin, la limite, et je préfère la dire moi-même : cette mesure, c'est nous qui l'avons faite. Il lui manque l'indépendance. Notre rapport l'écrit en première page.</a:t>
+              <a:t>Ce n'est pas un mauvais résultat. C'est un trou dans notre propre évaluation. Et il n'apparaît que parce qu'on a détaillé domaine par domaine. Le total seul le cachait.</a:t>
             </a:r>
           </a:p>
           <a:p>
             <a:r>
               <a:rPr lang="fr-FR" dirty="0"/>
-              <a:t>[Passage de parole.] Maxime prend la suite : contre qui ?</a:t>
+              <a:t>Deuxième point : les deux problèmes les plus graves touchent le même système. Le système de gestion d'entrepôt. Le numéro un de la page d'avant.</a:t>
+            </a:r>
+          </a:p>
+          <a:p>
+            <a:r>
+              <a:rPr lang="fr-FR" dirty="0"/>
+              <a:t>D'un côté, le réseau de bureau et le réseau des machines de tri ne sont pas séparés. De l'autre, un compte d'administration est partagé avec notre prestataire de maintenance — et on ne sait pas combien de gens s'en servent.</a:t>
+            </a:r>
+          </a:p>
+          <a:p>
+            <a:r>
+              <a:rPr lang="fr-FR" dirty="0"/>
+              <a:t>Dernière chose, et je préfère la dire moi-même. Cette mesure, c'est nous qui l'avons faite. Il lui manque l'indépendance. Notre rapport l'écrit en première page.</a:t>
+            </a:r>
+          </a:p>
+          <a:p>
+            <a:r>
+              <a:rPr lang="fr-FR" dirty="0"/>
+              <a:t>[→ passage de parole.] Maxime prend la suite : contre qui ?</a:t>
             </a:r>
           </a:p>
         </p:txBody>
@@ -2046,49 +2195,73 @@
           <a:p>
             <a:r>
               <a:rPr lang="fr-FR" dirty="0"/>
-              <a:t>Slide 5 · Trois acteurs, trois cibles — 05:00 → 06:30 · Maxime</a:t>
+              <a:t>Slide 5 · Trois acteurs, trois cibles — 5:00 → 6:30 · Maxime</a:t>
             </a:r>
           </a:p>
           <a:p>
             <a:r>
               <a:rPr lang="fr-FR" dirty="0"/>
-              <a:t>Maxime. Je porte les risques, les partenaires et le périmètre.</a:t>
+              <a:t>Maxime. Je prends les risques, les partenaires et le périmètre.</a:t>
             </a:r>
           </a:p>
           <a:p>
             <a:r>
               <a:rPr lang="fr-FR" dirty="0"/>
-              <a:t>Nous avons examiné cinq profils d'attaquants. Nous en retenons trois. ° Les deux écartés le sont avec un motif écrit — c'est un choix de méthode, pas un oubli.</a:t>
+              <a:t>On a regardé cinq profils d'attaquants. On en garde trois.</a:t>
             </a:r>
           </a:p>
           <a:p>
             <a:r>
               <a:rPr lang="fr-FR" dirty="0"/>
-              <a:t>Le premier : un groupe criminel organisé. Il chiffre notre système d'entrepôt, l'expédition s'arrête, il demande une rançon.</a:t>
+              <a:t>[si le temps] Les deux qu'on écarte, on écrit pourquoi. C'est un choix, pas un oubli.</a:t>
             </a:r>
           </a:p>
           <a:p>
             <a:r>
               <a:rPr lang="fr-FR" dirty="0"/>
-              <a:t>Le deuxième : quelqu'un de chez nous. Un salarié mécontent, ou sur le départ. Il fausse les données de préparation, et il emporte le savoir-faire des six sites — celui dont Miguel vient de dire qu'il n'est écrit nulle part. C'EST LE SEUL DES TROIS QUI N'A BESOIN DE FORCER AUCUNE PORTE.</a:t>
+              <a:t>Le premier : un groupe criminel organisé. Il chiffre le système de gestion d'entrepôt, l'expédition s'arrête, il demande une rançon.</a:t>
             </a:r>
           </a:p>
           <a:p>
             <a:r>
               <a:rPr lang="fr-FR" dirty="0"/>
-              <a:t>Le troisième : un concurrent, qui capte nos données d'exploitation et celles de notre client pharmaceutique.</a:t>
+              <a:t>Le deuxième : quelqu'un de chez nous. Un salarié en colère, ou sur le départ. Il fausse les données de préparation, et il part avec le savoir-faire des six sites — celui de notre responsable d'exploitation, le numéro trois de Miguel, celui qui n'est écrit nulle part.</a:t>
             </a:r>
           </a:p>
           <a:p>
             <a:r>
               <a:rPr lang="fr-FR" dirty="0"/>
-              <a:t>Ce qui compte ici, ce n'est pas la liste. C'est que chacun de ces trois vise l'un des cinq éléments de la page précédente. Une analyse qui les ignorerait décrirait une autre entreprise que la nôtre.</a:t>
+              <a:t>C'EST LE SEUL DES TROIS QUI N'A AUCUNE PORTE À FORCER.</a:t>
             </a:r>
           </a:p>
           <a:p>
             <a:r>
               <a:rPr lang="fr-FR" dirty="0"/>
-              <a:t>Il y a un quatrième acteur. Je le garde pour dans deux minutes, parce qu'il n'entre pas par la même porte.</a:t>
+              <a:t>Le troisième : un concurrent. Il récupère nos données d'exploitation et celles de notre client pharmaceutique.</a:t>
+            </a:r>
+          </a:p>
+          <a:p>
+            <a:r>
+              <a:rPr lang="fr-FR" dirty="0"/>
+              <a:t>Ce qui compte, ce n'est pas la liste. C'est que chacun des trois vise un des cinq éléments de Miguel.</a:t>
+            </a:r>
+          </a:p>
+          <a:p>
+            <a:r>
+              <a:rPr lang="fr-FR" dirty="0"/>
+              <a:t>Le criminel vise le système d'entrepôt, le numéro un. Le salarié vise les données de préparation et le savoir-faire, le numéro trois. Le concurrent vise les données du client pharmaceutique, qui vivent dans le logiciel des sondes, le numéro quatre.</a:t>
+            </a:r>
+          </a:p>
+          <a:p>
+            <a:r>
+              <a:rPr lang="fr-FR" dirty="0"/>
+              <a:t>Une analyse qui les ignorerait décrirait une autre entreprise que la nôtre.</a:t>
+            </a:r>
+          </a:p>
+          <a:p>
+            <a:r>
+              <a:rPr lang="fr-FR" dirty="0"/>
+              <a:t>Il y a un quatrième acteur : le prestataire qui installe et entretient nos machines de tri. Je le garde pour dans deux minutes. Il n'entre pas par la même porte.</a:t>
             </a:r>
           </a:p>
         </p:txBody>
@@ -2143,49 +2316,67 @@
           <a:p>
             <a:r>
               <a:rPr lang="fr-FR" dirty="0"/>
-              <a:t>Slide 6 · L'événement le plus grave — 06:30 → 08:00 · Maxime (pas de coupe)</a:t>
+              <a:t>Slide 6 · Le pire, et pourquoi c'est crédible — 6:30 → 8:00 · Maxime</a:t>
             </a:r>
           </a:p>
           <a:p>
             <a:r>
               <a:rPr lang="fr-FR" dirty="0"/>
-              <a:t>Parmi tout cela, un événement se détache : l'arrêt non prévu de l'expédition au-delà de six heures.</a:t>
+              <a:t>Dans tout ça, un événement se détache. L'expédition qui s'arrête, sans prévenir, plus de six heures.</a:t>
             </a:r>
           </a:p>
           <a:p>
             <a:r>
               <a:rPr lang="fr-FR" dirty="0"/>
-              <a:t>Qu'il soit grave, vous le savez déjà : quarante pour cent du volume du groupe, douze mille euros par jour. Ce n'est pas ce que je viens vous dire. Je viens vous dire qu'il est CRÉDIBLE. Trois faits.</a:t>
+              <a:t>Que ce soit grave, vous le savez déjà. Quarante pour cent du volume du groupe. Douze mille euros par jour. Ce n'est pas ce que je viens vous dire.</a:t>
             </a:r>
           </a:p>
           <a:p>
             <a:r>
               <a:rPr lang="fr-FR" dirty="0"/>
-              <a:t>Un : le système est sur un seul site, sans secours.</a:t>
+              <a:t>Je viens vous dire que c'est CRÉDIBLE. Trois faits.</a:t>
             </a:r>
           </a:p>
           <a:p>
             <a:r>
               <a:rPr lang="fr-FR" dirty="0"/>
-              <a:t>Deux : nos sauvegardes tournent tous les jours, et elles n'ont jamais été restaurées. Pas une seule fois depuis la mise en service. Nous ne savons donc pas si elles fonctionnent.</a:t>
+              <a:t>Un. Le système est sur un seul site. Sans secours.</a:t>
             </a:r>
           </a:p>
           <a:p>
             <a:r>
               <a:rPr lang="fr-FR" dirty="0"/>
-              <a:t>Trois. [Pause.] C'est déjà arrivé. En avril. Le système s'est arrêté. Trois chefs d'entrepôt ont appelé le prestataire, deux ont appelé l'intégrateur, un a appelé le responsable informatique, qui était en congé. Et personne n'a noté l'heure.</a:t>
+              <a:t>Deux. Nos sauvegardes tournent tous les jours. Elles n'ont jamais été restaurées. Pas une fois depuis la mise en service. Donc on ne sait pas si elles marchent.</a:t>
             </a:r>
           </a:p>
           <a:p>
             <a:r>
               <a:rPr lang="fr-FR" dirty="0"/>
-              <a:t>Résultat : aujourd'hui, je ne peux pas vous dire combien de temps il nous faudrait pour repartir. C'est exactement ce que la première mesure de notre plan va mesurer, au 14 novembre.</a:t>
+              <a:t>Trois. [→ pause.] C'est déjà arrivé. En avril.</a:t>
             </a:r>
           </a:p>
           <a:p>
             <a:r>
               <a:rPr lang="fr-FR" dirty="0"/>
-              <a:t>Et il y a une porte d'entrée que nous n'avions pas vue en premier.</a:t>
+              <a:t>Le système s'est arrêté. Trois chefs d'entrepôt ont appelé le prestataire. Deux ont appelé l'intégrateur. Un a appelé le responsable informatique, qui était en congé. Et personne n'a noté l'heure.</a:t>
+            </a:r>
+          </a:p>
+          <a:p>
+            <a:r>
+              <a:rPr lang="fr-FR" dirty="0"/>
+              <a:t>Résultat : aujourd'hui, je ne peux pas vous dire combien de temps il nous faut pour repartir.</a:t>
+            </a:r>
+          </a:p>
+          <a:p>
+            <a:r>
+              <a:rPr lang="fr-FR" dirty="0"/>
+              <a:t>C'est exactement ce que le test de restauration va mesurer. C'est la première échéance du plan : le 14 novembre.</a:t>
+            </a:r>
+          </a:p>
+          <a:p>
+            <a:r>
+              <a:rPr lang="fr-FR" dirty="0"/>
+              <a:t>Et il y a une porte d'entrée qu'on n'avait pas vue en premier.</a:t>
             </a:r>
           </a:p>
         </p:txBody>
@@ -2240,55 +2431,73 @@
           <a:p>
             <a:r>
               <a:rPr lang="fr-FR" dirty="0"/>
-              <a:t>Slide 7 · Le risque entre par le contrat — 08:00 → 09:45 · Maxime</a:t>
+              <a:t>Slide 7 · Le risque entre par le contrat — 8:00 → 9:45 · Maxime (checkpoint 9:45)</a:t>
             </a:r>
           </a:p>
           <a:p>
             <a:r>
               <a:rPr lang="fr-FR" dirty="0"/>
-              <a:t>Nous avons noté nos cinq partenaires sur deux choses : à quel point nous dépendons d'eux, et à quel point nous les maîtrisons. LE SEUIL A ÉTÉ FIXÉ AVANT LA NOTATION. Deux le dépassent.</a:t>
+              <a:t>On a noté nos cinq partenaires sur deux choses. À quel point on dépend d'eux. Et à quel point on les maîtrise.</a:t>
             </a:r>
           </a:p>
           <a:p>
             <a:r>
               <a:rPr lang="fr-FR" dirty="0"/>
-              <a:t>L'intégrateur de nos machines de tri, tout en haut. Il se connecte en permanence à nos automates, par une liaison mobile qui ne passe pas par notre réseau surveillé. Son contrat ne contient aucune exigence de sécurité. Aucune.</a:t>
+              <a:t>LE SEUIL A ÉTÉ FIXÉ AVANT LA NOTATION. IL EST À QUATRE.</a:t>
             </a:r>
           </a:p>
           <a:p>
             <a:r>
               <a:rPr lang="fr-FR" dirty="0"/>
-              <a:t>Le prestataire qui maintient notre système d'entrepôt, juste en dessous. Il intervient avec un compte partagé, et nous ne savons pas combien de personnes s'en servent.</a:t>
+              <a:t>Deux partenaires le dépassent.</a:t>
             </a:r>
           </a:p>
           <a:p>
             <a:r>
               <a:rPr lang="fr-FR" dirty="0"/>
-              <a:t>° Ce ne sont pas nos plus gros fournisseurs. Ce sont ceux dont nous dépendons le plus et que nous maîtrisons le moins.</a:t>
+              <a:t>Le premier, tout en haut : l'intégrateur de nos machines de tri. Il est noté douze. Il est connecté en permanence à nos machines, par une liaison mobile qui ne passe pas par notre réseau surveillé. Son contrat ne contient aucune exigence de sécurité. Aucune.</a:t>
             </a:r>
           </a:p>
           <a:p>
             <a:r>
               <a:rPr lang="fr-FR" dirty="0"/>
-              <a:t>Voilà pourquoi le scénario que nous jugeons le plus grave n'est pas quelqu'un qui force notre porte. C'est quelqu'un qui entre par celle de notre prestataire — une porte que nous lui avons ouverte par contrat.</a:t>
+              <a:t>Le deuxième, juste en dessous : le prestataire qui maintient le système de gestion d'entrepôt. Il est noté huit. Il intervient avec un compte partagé. On ne sait pas combien de personnes s'en servent.</a:t>
             </a:r>
           </a:p>
           <a:p>
             <a:r>
               <a:rPr lang="fr-FR" dirty="0"/>
-              <a:t>En 2017, un transporteur européen s'est retrouvé exactement là. Il n'était pas visé. Il n'a pas été piraté. Il a installé, de bonne foi, la mise à jour d'un fournisseur compromis. Deux cent cinquante à trois cents millions de dollars, en un trimestre.</a:t>
+              <a:t>Les trois autres partenaires sont à un, ou en dessous. L'écart n'est pas discutable.</a:t>
             </a:r>
           </a:p>
           <a:p>
             <a:r>
               <a:rPr lang="fr-FR" dirty="0"/>
-              <a:t>Je le résume comme ça : CHEZ NOUS, LE POINT D'ENTRÉE EST SIGNÉ, IL N'EST PAS PIRATÉ.</a:t>
+              <a:t>[si le temps] Ce ne sont pas nos plus gros fournisseurs. Ce sont ceux dont on dépend le plus, et qu'on maîtrise le moins.</a:t>
             </a:r>
           </a:p>
           <a:p>
             <a:r>
               <a:rPr lang="fr-FR" dirty="0"/>
-              <a:t>Et un risque qui entre par un contrat se traite par un contrat.</a:t>
+              <a:t>Voilà pourquoi le pire scénario, pour nous, ce n'est pas quelqu'un qui force notre porte. C'est quelqu'un qui entre par celle de notre prestataire. Une porte qu'on lui a ouverte par contrat.</a:t>
+            </a:r>
+          </a:p>
+          <a:p>
+            <a:r>
+              <a:rPr lang="fr-FR" dirty="0"/>
+              <a:t>En 2017, un transporteur européen s'est retrouvé exactement là. Il n'était pas visé. Il n'a pas été piraté. Il a installé, de bonne foi, la mise à jour d'un fournisseur compromis. Deux cent cinquante à trois cents millions de dollars. En un trimestre.</a:t>
+            </a:r>
+          </a:p>
+          <a:p>
+            <a:r>
+              <a:rPr lang="fr-FR" dirty="0"/>
+              <a:t>Je le résume comme ça : CHEZ NOUS, LE POINT D'ENTRÉE EST SIGNÉ. IL N'EST PAS PIRATÉ.</a:t>
+            </a:r>
+          </a:p>
+          <a:p>
+            <a:r>
+              <a:rPr lang="fr-FR" dirty="0"/>
+              <a:t>Et un risque qui entre par un contrat, ça se traite par un contrat.</a:t>
             </a:r>
           </a:p>
         </p:txBody>
@@ -2343,43 +2552,55 @@
           <a:p>
             <a:r>
               <a:rPr lang="fr-FR" dirty="0"/>
-              <a:t>Slide 8 · La règle que nous adoptons — 09:45 → 10:35 · Maxime</a:t>
+              <a:t>Slide 8 · La règle qu'on adopte — 9:45 → 10:35 · Maxime</a:t>
             </a:r>
           </a:p>
           <a:p>
             <a:r>
               <a:rPr lang="fr-FR" dirty="0"/>
-              <a:t>Voici donc la règle que nous vous proposons.</a:t>
+              <a:t>Donc voilà la règle qu'on vous propose.</a:t>
             </a:r>
           </a:p>
           <a:p>
             <a:r>
               <a:rPr lang="fr-FR" dirty="0"/>
-              <a:t>Aucun contrat donnant accès à l'un de nos cinq éléments critiques n'est signé ni renouvelé sans trois exigences. Savoir qui a fait quoi, nom par nom. Être prévenus en vingt-quatre heures si le prestataire est attaqué. Et pouvoir partir.</a:t>
+              <a:t>Aucun contrat qui donne accès à un de nos cinq éléments critiques — le système d'entrepôt en premier — n'est signé ni renouvelé sans trois choses.</a:t>
             </a:r>
           </a:p>
           <a:p>
             <a:r>
               <a:rPr lang="fr-FR" dirty="0"/>
-              <a:t>Elles ne coûtent rien la première année : ce sont des conditions de signature, pas des achats. C'est la direction juridique qui les oppose, avant signature.</a:t>
+              <a:t>Savoir qui a fait quoi, nom par nom. Être prévenus en vingt-quatre heures si le prestataire se fait attaquer. Et pouvoir partir.</a:t>
             </a:r>
           </a:p>
           <a:p>
             <a:r>
               <a:rPr lang="fr-FR" dirty="0"/>
-              <a:t>Premier cas d'application : le contrat de maintenance de notre système d'entrepôt. IL ARRIVE À RENOUVELLEMENT EN NOVEMBRE, ET IL N'EN CONTIENT AUJOURD'HUI AUCUNE DES TROIS.</a:t>
+              <a:t>Ça ne coûte rien la première année. Ce sont des conditions de signature, pas des achats. C'est la direction juridique qui les oppose. Avant de signer.</a:t>
             </a:r>
           </a:p>
           <a:p>
             <a:r>
               <a:rPr lang="fr-FR" dirty="0"/>
-              <a:t>° Nous appliquons la même logique en amont des projets : six étapes de sécurité, chacune avec un critère vérifiable. Premier projet à y passer, la reprise du flux vers MERIDIAN Santé, bloqué depuis trois mois.</a:t>
+              <a:t>Premier cas d'application : le contrat de maintenance du système de gestion d'entrepôt.</a:t>
             </a:r>
           </a:p>
           <a:p>
             <a:r>
               <a:rPr lang="fr-FR" dirty="0"/>
-              <a:t>[Passage de parole.]</a:t>
+              <a:t>IL ARRIVE À RENOUVELLEMENT EN NOVEMBRE. ET AUJOURD'HUI, IL N'EN CONTIENT AUCUNE DES TROIS.</a:t>
+            </a:r>
+          </a:p>
+          <a:p>
+            <a:r>
+              <a:rPr lang="fr-FR" dirty="0"/>
+              <a:t>[si le temps] On applique la même logique aux projets : six étapes de sécurité, chacune avec un critère vérifiable. Premier projet concerné, la reprise du flux vers MERIDIAN Santé, bloqué depuis trois mois.</a:t>
+            </a:r>
+          </a:p>
+          <a:p>
+            <a:r>
+              <a:rPr lang="fr-FR" dirty="0"/>
+              <a:t>[→ passage de parole.]</a:t>
             </a:r>
           </a:p>
         </p:txBody>
@@ -2446,31 +2667,49 @@
           <a:p>
             <a:r>
               <a:rPr lang="fr-FR" dirty="0"/>
-              <a:t>Voici où nous en sommes après traitement. Huit risques au registre. Avant : trois au rouge. Après : plus aucun.</a:t>
+              <a:t>Voilà où on en est après traitement. Huit risques au registre. Avant : trois risques élevés. Après : zéro élevé, six moyens, deux faibles.</a:t>
             </a:r>
           </a:p>
           <a:p>
             <a:r>
               <a:rPr lang="fr-FR" dirty="0"/>
-              <a:t>Cela suppose une règle que nous vous demandons de confirmer, et je la dis simplement. Un risque élevé : inacceptable, on le traite avant toute mise en service. Un risque moyen : toléré, mais daté, surveillé, et confié à quelqu'un de nommé. Un risque faible : accepté tel quel.</a:t>
+              <a:t>Ça suppose une règle, et c'est la première chose qu'on vous demande de confirmer. Je la dis simplement.</a:t>
             </a:r>
           </a:p>
           <a:p>
             <a:r>
               <a:rPr lang="fr-FR" dirty="0"/>
-              <a:t>Maintenant, l'honnêteté. [Pause.] NOUS NE FERMONS AUCUN RISQUE. Aucun ne disparaît. Ils passent d'inacceptable à toléré-formalisé. Ce n'est pas la même chose, et nous ne le maquillons pas.</a:t>
+              <a:t>Risque élevé : inacceptable. On le traite avant toute mise en service. Risque moyen : toléré. Mais daté, surveillé, confié à quelqu'un de nommé. Risque faible : accepté tel quel.</a:t>
             </a:r>
           </a:p>
           <a:p>
             <a:r>
               <a:rPr lang="fr-FR" dirty="0"/>
-              <a:t>Sept fiches d'acceptation sont à signer. Et nous ne vous demandons aucune dérogation. C'est une position, pas un détail.</a:t>
+              <a:t>Maintenant, l'honnêteté. [→ pause.]</a:t>
             </a:r>
           </a:p>
           <a:p>
             <a:r>
               <a:rPr lang="fr-FR" dirty="0"/>
-              <a:t>° Un exemple, pour vous montrer que la règle est vraiment appliquée. Sur la chaîne du froid, le risque ne baisse pas, alors que nous prenons une mesure. Parce que cette mesure est une surveillance, pas une correction. On ne baisse pas un niveau parce qu'on a agi ; on le baisse parce que la cause a changé.</a:t>
+              <a:t>ON NE FERME AUCUN RISQUE.</a:t>
+            </a:r>
+          </a:p>
+          <a:p>
+            <a:r>
+              <a:rPr lang="fr-FR" dirty="0"/>
+              <a:t>Aucun ne disparaît. Ils passent d'inacceptable à toléré-formalisé. Ce n'est pas la même chose. Et on ne le maquille pas.</a:t>
+            </a:r>
+          </a:p>
+          <a:p>
+            <a:r>
+              <a:rPr lang="fr-FR" dirty="0"/>
+              <a:t>Il y a sept fiches d'acceptation à signer. Et on ne vous demande aucune dérogation. C'est une position, pas un détail.</a:t>
+            </a:r>
+          </a:p>
+          <a:p>
+            <a:r>
+              <a:rPr lang="fr-FR" dirty="0"/>
+              <a:t>[si le temps] Un exemple, pour montrer que la règle est vraiment appliquée. Sur la chaîne du froid, on prend une mesure, et le risque ne baisse pas. Parce que cette mesure surveille, elle ne corrige pas. On ne baisse pas un niveau parce qu'on a agi. On le baisse quand la cause a changé.</a:t>
             </a:r>
           </a:p>
         </p:txBody>
@@ -6068,7 +6307,7 @@
     </p:spTree>
     <p:extLst>
       <p:ext uri="{BB962C8B-B14F-4D97-AF65-F5344CB8AC3E}">
-        <p14:creationId xmlns:p14="http://schemas.microsoft.com/office/powerpoint/2010/main" val="2051767"/>
+        <p14:creationId xmlns:p14="http://schemas.microsoft.com/office/powerpoint/2010/main" val="813182727"/>
       </p:ext>
     </p:extLst>
   </p:cSld>
@@ -6911,7 +7150,7 @@
     </p:spTree>
     <p:extLst>
       <p:ext uri="{BB962C8B-B14F-4D97-AF65-F5344CB8AC3E}">
-        <p14:creationId xmlns:p14="http://schemas.microsoft.com/office/powerpoint/2010/main" val="1160454889"/>
+        <p14:creationId xmlns:p14="http://schemas.microsoft.com/office/powerpoint/2010/main" val="812384942"/>
       </p:ext>
     </p:extLst>
   </p:cSld>
@@ -7733,7 +7972,7 @@
     </p:spTree>
     <p:extLst>
       <p:ext uri="{BB962C8B-B14F-4D97-AF65-F5344CB8AC3E}">
-        <p14:creationId xmlns:p14="http://schemas.microsoft.com/office/powerpoint/2010/main" val="1377716115"/>
+        <p14:creationId xmlns:p14="http://schemas.microsoft.com/office/powerpoint/2010/main" val="4232317869"/>
       </p:ext>
     </p:extLst>
   </p:cSld>
@@ -8621,7 +8860,7 @@
     </p:spTree>
     <p:extLst>
       <p:ext uri="{BB962C8B-B14F-4D97-AF65-F5344CB8AC3E}">
-        <p14:creationId xmlns:p14="http://schemas.microsoft.com/office/powerpoint/2010/main" val="3759228815"/>
+        <p14:creationId xmlns:p14="http://schemas.microsoft.com/office/powerpoint/2010/main" val="3324562974"/>
       </p:ext>
     </p:extLst>
   </p:cSld>
@@ -9456,7 +9695,7 @@
     </p:spTree>
     <p:extLst>
       <p:ext uri="{BB962C8B-B14F-4D97-AF65-F5344CB8AC3E}">
-        <p14:creationId xmlns:p14="http://schemas.microsoft.com/office/powerpoint/2010/main" val="3309046714"/>
+        <p14:creationId xmlns:p14="http://schemas.microsoft.com/office/powerpoint/2010/main" val="3468612046"/>
       </p:ext>
     </p:extLst>
   </p:cSld>
@@ -10856,7 +11095,7 @@
     </p:spTree>
     <p:extLst>
       <p:ext uri="{BB962C8B-B14F-4D97-AF65-F5344CB8AC3E}">
-        <p14:creationId xmlns:p14="http://schemas.microsoft.com/office/powerpoint/2010/main" val="2851108291"/>
+        <p14:creationId xmlns:p14="http://schemas.microsoft.com/office/powerpoint/2010/main" val="3684553105"/>
       </p:ext>
     </p:extLst>
   </p:cSld>
@@ -11681,7 +11920,7 @@
     </p:spTree>
     <p:extLst>
       <p:ext uri="{BB962C8B-B14F-4D97-AF65-F5344CB8AC3E}">
-        <p14:creationId xmlns:p14="http://schemas.microsoft.com/office/powerpoint/2010/main" val="3588216794"/>
+        <p14:creationId xmlns:p14="http://schemas.microsoft.com/office/powerpoint/2010/main" val="2712406132"/>
       </p:ext>
     </p:extLst>
   </p:cSld>
@@ -13943,7 +14182,7 @@
     </p:spTree>
     <p:extLst>
       <p:ext uri="{BB962C8B-B14F-4D97-AF65-F5344CB8AC3E}">
-        <p14:creationId xmlns:p14="http://schemas.microsoft.com/office/powerpoint/2010/main" val="515008136"/>
+        <p14:creationId xmlns:p14="http://schemas.microsoft.com/office/powerpoint/2010/main" val="476913648"/>
       </p:ext>
     </p:extLst>
   </p:cSld>
@@ -16891,7 +17130,7 @@
     </p:spTree>
     <p:extLst>
       <p:ext uri="{BB962C8B-B14F-4D97-AF65-F5344CB8AC3E}">
-        <p14:creationId xmlns:p14="http://schemas.microsoft.com/office/powerpoint/2010/main" val="2695676243"/>
+        <p14:creationId xmlns:p14="http://schemas.microsoft.com/office/powerpoint/2010/main" val="503697605"/>
       </p:ext>
     </p:extLst>
   </p:cSld>
@@ -18091,7 +18330,7 @@
     </p:spTree>
     <p:extLst>
       <p:ext uri="{BB962C8B-B14F-4D97-AF65-F5344CB8AC3E}">
-        <p14:creationId xmlns:p14="http://schemas.microsoft.com/office/powerpoint/2010/main" val="2575903640"/>
+        <p14:creationId xmlns:p14="http://schemas.microsoft.com/office/powerpoint/2010/main" val="4011929659"/>
       </p:ext>
     </p:extLst>
   </p:cSld>
@@ -18858,7 +19097,7 @@
     </p:spTree>
     <p:extLst>
       <p:ext uri="{BB962C8B-B14F-4D97-AF65-F5344CB8AC3E}">
-        <p14:creationId xmlns:p14="http://schemas.microsoft.com/office/powerpoint/2010/main" val="3673861807"/>
+        <p14:creationId xmlns:p14="http://schemas.microsoft.com/office/powerpoint/2010/main" val="2989941095"/>
       </p:ext>
     </p:extLst>
   </p:cSld>
@@ -19704,7 +19943,7 @@
     </p:spTree>
     <p:extLst>
       <p:ext uri="{BB962C8B-B14F-4D97-AF65-F5344CB8AC3E}">
-        <p14:creationId xmlns:p14="http://schemas.microsoft.com/office/powerpoint/2010/main" val="3274753624"/>
+        <p14:creationId xmlns:p14="http://schemas.microsoft.com/office/powerpoint/2010/main" val="691444362"/>
       </p:ext>
     </p:extLst>
   </p:cSld>
@@ -20564,7 +20803,7 @@
     </p:spTree>
     <p:extLst>
       <p:ext uri="{BB962C8B-B14F-4D97-AF65-F5344CB8AC3E}">
-        <p14:creationId xmlns:p14="http://schemas.microsoft.com/office/powerpoint/2010/main" val="53064528"/>
+        <p14:creationId xmlns:p14="http://schemas.microsoft.com/office/powerpoint/2010/main" val="320752471"/>
       </p:ext>
     </p:extLst>
   </p:cSld>
@@ -21460,7 +21699,7 @@
     </p:spTree>
     <p:extLst>
       <p:ext uri="{BB962C8B-B14F-4D97-AF65-F5344CB8AC3E}">
-        <p14:creationId xmlns:p14="http://schemas.microsoft.com/office/powerpoint/2010/main" val="1522341628"/>
+        <p14:creationId xmlns:p14="http://schemas.microsoft.com/office/powerpoint/2010/main" val="150235209"/>
       </p:ext>
     </p:extLst>
   </p:cSld>
@@ -21971,7 +22210,7 @@
     </p:spTree>
     <p:extLst>
       <p:ext uri="{BB962C8B-B14F-4D97-AF65-F5344CB8AC3E}">
-        <p14:creationId xmlns:p14="http://schemas.microsoft.com/office/powerpoint/2010/main" val="1537915205"/>
+        <p14:creationId xmlns:p14="http://schemas.microsoft.com/office/powerpoint/2010/main" val="812784516"/>
       </p:ext>
     </p:extLst>
   </p:cSld>
